--- a/docs/event-submission/Riskora-pitch-deck.pptx
+++ b/docs/event-submission/Riskora-pitch-deck.pptx
@@ -6,11 +6,11 @@
   </p:sldMasterIdLst>
   <p:sldIdLst>
     <p:sldId id="256" r:id="rId7"/>
-    <p:sldId id="257" r:id="rId8"/>
-    <p:sldId id="258" r:id="rId9"/>
-    <p:sldId id="259" r:id="rId10"/>
-    <p:sldId id="260" r:id="rId11"/>
-    <p:sldId id="261" r:id="rId12"/>
+    <p:sldId id="257" r:id="rId9"/>
+    <p:sldId id="258" r:id="rId10"/>
+    <p:sldId id="259" r:id="rId11"/>
+    <p:sldId id="260" r:id="rId12"/>
+    <p:sldId id="261" r:id="rId13"/>
   </p:sldIdLst>
   <p:sldSz cx="12191695" cy="6858000" type="screen4x3"/>
   <p:notesSz cx="6858000" cy="9144000"/>
@@ -110,6 +110,788 @@
     </a:lvl9pPr>
   </p:defaultTextStyle>
 </p:presentation>
+</file>
+
+<file path=ppt/notesMasters/notesMaster1.xml><?xml version="1.0" encoding="utf-8"?>
+<p:notesMaster xmlns:a="http://schemas.openxmlformats.org/drawingml/2006/main" xmlns:p="http://schemas.openxmlformats.org/presentationml/2006/main" xmlns:r="http://schemas.openxmlformats.org/officeDocument/2006/relationships">
+  <p:cSld>
+    <p:bg>
+      <p:bgRef idx="1001">
+        <a:schemeClr val="bg1"/>
+      </p:bgRef>
+    </p:bg>
+    <p:spTree>
+      <p:nvGrpSpPr>
+        <p:cNvPr id="1" name=""/>
+        <p:cNvGrpSpPr/>
+        <p:nvPr/>
+      </p:nvGrpSpPr>
+      <p:grpSpPr>
+        <a:xfrm>
+          <a:off x="0" y="0"/>
+          <a:ext cx="0" cy="0"/>
+          <a:chOff x="0" y="0"/>
+          <a:chExt cx="0" cy="0"/>
+        </a:xfrm>
+      </p:grpSpPr>
+      <p:sp>
+        <p:nvSpPr>
+          <p:cNvPr id="2" name="Header Placeholder 1"/>
+          <p:cNvSpPr>
+            <a:spLocks noGrp="1"/>
+          </p:cNvSpPr>
+          <p:nvPr>
+            <p:ph type="hdr" sz="quarter"/>
+          </p:nvPr>
+        </p:nvSpPr>
+        <p:spPr>
+          <a:xfrm>
+            <a:off x="0" y="0"/>
+            <a:ext cx="2971800" cy="457200"/>
+          </a:xfrm>
+          <a:prstGeom prst="rect">
+            <a:avLst/>
+          </a:prstGeom>
+        </p:spPr>
+        <p:txBody>
+          <a:bodyPr vert="horz" lIns="91440" tIns="45720" rIns="91440" bIns="45720" rtlCol="0"/>
+          <a:lstStyle>
+            <a:lvl1pPr algn="l">
+              <a:defRPr sz="1200"/>
+            </a:lvl1pPr>
+          </a:lstStyle>
+          <a:p>
+            <a:endParaRPr lang="en-US"/>
+          </a:p>
+        </p:txBody>
+      </p:sp>
+      <p:sp>
+        <p:nvSpPr>
+          <p:cNvPr id="3" name="Date Placeholder 2"/>
+          <p:cNvSpPr>
+            <a:spLocks noGrp="1"/>
+          </p:cNvSpPr>
+          <p:nvPr>
+            <p:ph type="dt" idx="1"/>
+          </p:nvPr>
+        </p:nvSpPr>
+        <p:spPr>
+          <a:xfrm>
+            <a:off x="3884613" y="0"/>
+            <a:ext cx="2971800" cy="457200"/>
+          </a:xfrm>
+          <a:prstGeom prst="rect">
+            <a:avLst/>
+          </a:prstGeom>
+        </p:spPr>
+        <p:txBody>
+          <a:bodyPr vert="horz" lIns="91440" tIns="45720" rIns="91440" bIns="45720" rtlCol="0"/>
+          <a:lstStyle>
+            <a:lvl1pPr algn="r">
+              <a:defRPr sz="1200"/>
+            </a:lvl1pPr>
+          </a:lstStyle>
+          <a:p>
+            <a:fld id="{0F89C1C7-3DCD-1040-A9CF-14679D8B5DDD}" type="datetimeFigureOut">
+              <a:rPr lang="en-US" smtClean="0"/>
+              <a:t>10/17/16</a:t>
+            </a:fld>
+            <a:endParaRPr lang="en-US"/>
+          </a:p>
+        </p:txBody>
+      </p:sp>
+      <p:sp>
+        <p:nvSpPr>
+          <p:cNvPr id="4" name="Slide Image Placeholder 3"/>
+          <p:cNvSpPr>
+            <a:spLocks noGrp="1" noRot="1" noChangeAspect="1"/>
+          </p:cNvSpPr>
+          <p:nvPr>
+            <p:ph type="sldImg" idx="2"/>
+          </p:nvPr>
+        </p:nvSpPr>
+        <p:spPr>
+          <a:xfrm>
+            <a:off x="1143000" y="685800"/>
+            <a:ext cx="4572000" cy="3429000"/>
+          </a:xfrm>
+          <a:prstGeom prst="rect">
+            <a:avLst/>
+          </a:prstGeom>
+          <a:noFill/>
+          <a:ln w="12700">
+            <a:solidFill>
+              <a:prstClr val="black"/>
+            </a:solidFill>
+          </a:ln>
+        </p:spPr>
+        <p:txBody>
+          <a:bodyPr vert="horz" lIns="91440" tIns="45720" rIns="91440" bIns="45720" rtlCol="0" anchor="ctr"/>
+          <a:lstStyle/>
+          <a:p>
+            <a:endParaRPr lang="en-US"/>
+          </a:p>
+        </p:txBody>
+      </p:sp>
+      <p:sp>
+        <p:nvSpPr>
+          <p:cNvPr id="5" name="Notes Placeholder 4"/>
+          <p:cNvSpPr>
+            <a:spLocks noGrp="1"/>
+          </p:cNvSpPr>
+          <p:nvPr>
+            <p:ph type="body" sz="quarter" idx="3"/>
+          </p:nvPr>
+        </p:nvSpPr>
+        <p:spPr>
+          <a:xfrm>
+            <a:off x="685800" y="4343400"/>
+            <a:ext cx="5486400" cy="4114800"/>
+          </a:xfrm>
+          <a:prstGeom prst="rect">
+            <a:avLst/>
+          </a:prstGeom>
+        </p:spPr>
+        <p:txBody>
+          <a:bodyPr vert="horz" lIns="91440" tIns="45720" rIns="91440" bIns="45720" rtlCol="0"/>
+          <a:lstStyle/>
+          <a:p>
+            <a:pPr lvl="0"/>
+            <a:r>
+              <a:rPr lang="en-US" smtClean="0"/>
+              <a:t>Click to edit Master text styles</a:t>
+            </a:r>
+          </a:p>
+          <a:p>
+            <a:pPr lvl="1"/>
+            <a:r>
+              <a:rPr lang="en-US" smtClean="0"/>
+              <a:t>Second level</a:t>
+            </a:r>
+          </a:p>
+          <a:p>
+            <a:pPr lvl="2"/>
+            <a:r>
+              <a:rPr lang="en-US" smtClean="0"/>
+              <a:t>Third level</a:t>
+            </a:r>
+          </a:p>
+          <a:p>
+            <a:pPr lvl="3"/>
+            <a:r>
+              <a:rPr lang="en-US" smtClean="0"/>
+              <a:t>Fourth level</a:t>
+            </a:r>
+          </a:p>
+          <a:p>
+            <a:pPr lvl="4"/>
+            <a:r>
+              <a:rPr lang="en-US" smtClean="0"/>
+              <a:t>Fifth level</a:t>
+            </a:r>
+            <a:endParaRPr lang="en-US"/>
+          </a:p>
+        </p:txBody>
+      </p:sp>
+      <p:sp>
+        <p:nvSpPr>
+          <p:cNvPr id="6" name="Footer Placeholder 5"/>
+          <p:cNvSpPr>
+            <a:spLocks noGrp="1"/>
+          </p:cNvSpPr>
+          <p:nvPr>
+            <p:ph type="ftr" sz="quarter" idx="4"/>
+          </p:nvPr>
+        </p:nvSpPr>
+        <p:spPr>
+          <a:xfrm>
+            <a:off x="0" y="8685213"/>
+            <a:ext cx="2971800" cy="457200"/>
+          </a:xfrm>
+          <a:prstGeom prst="rect">
+            <a:avLst/>
+          </a:prstGeom>
+        </p:spPr>
+        <p:txBody>
+          <a:bodyPr vert="horz" lIns="91440" tIns="45720" rIns="91440" bIns="45720" rtlCol="0" anchor="b"/>
+          <a:lstStyle>
+            <a:lvl1pPr algn="l">
+              <a:defRPr sz="1200"/>
+            </a:lvl1pPr>
+          </a:lstStyle>
+          <a:p>
+            <a:endParaRPr lang="en-US"/>
+          </a:p>
+        </p:txBody>
+      </p:sp>
+      <p:sp>
+        <p:nvSpPr>
+          <p:cNvPr id="7" name="Slide Number Placeholder 6"/>
+          <p:cNvSpPr>
+            <a:spLocks noGrp="1"/>
+          </p:cNvSpPr>
+          <p:nvPr>
+            <p:ph type="sldNum" sz="quarter" idx="5"/>
+          </p:nvPr>
+        </p:nvSpPr>
+        <p:spPr>
+          <a:xfrm>
+            <a:off x="3884613" y="8685213"/>
+            <a:ext cx="2971800" cy="457200"/>
+          </a:xfrm>
+          <a:prstGeom prst="rect">
+            <a:avLst/>
+          </a:prstGeom>
+        </p:spPr>
+        <p:txBody>
+          <a:bodyPr vert="horz" lIns="91440" tIns="45720" rIns="91440" bIns="45720" rtlCol="0" anchor="b"/>
+          <a:lstStyle>
+            <a:lvl1pPr algn="r">
+              <a:defRPr sz="1200"/>
+            </a:lvl1pPr>
+          </a:lstStyle>
+          <a:p>
+            <a:fld id="{BB5E49A5-4136-284D-997B-48E1D791AD67}" type="slidenum">
+              <a:rPr lang="en-US" smtClean="0"/>
+              <a:t>‹#›</a:t>
+            </a:fld>
+            <a:endParaRPr lang="en-US"/>
+          </a:p>
+        </p:txBody>
+      </p:sp>
+    </p:spTree>
+    <p:extLst>
+      <p:ext uri="{BB962C8B-B14F-4D97-AF65-F5344CB8AC3E}">
+        <p14:creationId xmlns:p14="http://schemas.microsoft.com/office/powerpoint/2010/main" val="2623252185"/>
+      </p:ext>
+    </p:extLst>
+  </p:cSld>
+  <p:clrMap bg1="lt1" tx1="dk1" bg2="lt2" tx2="dk2" accent1="accent1" accent2="accent2" accent3="accent3" accent4="accent4" accent5="accent5" accent6="accent6" hlink="hlink" folHlink="folHlink"/>
+  <p:notesStyle>
+    <a:lvl1pPr marL="0" algn="l" defTabSz="457200" rtl="0" eaLnBrk="1" latinLnBrk="0" hangingPunct="1">
+      <a:defRPr sz="1200" kern="1200">
+        <a:solidFill>
+          <a:schemeClr val="tx1"/>
+        </a:solidFill>
+        <a:latin typeface="+mn-lt"/>
+        <a:ea typeface="+mn-ea"/>
+        <a:cs typeface="+mn-cs"/>
+      </a:defRPr>
+    </a:lvl1pPr>
+    <a:lvl2pPr marL="457200" algn="l" defTabSz="457200" rtl="0" eaLnBrk="1" latinLnBrk="0" hangingPunct="1">
+      <a:defRPr sz="1200" kern="1200">
+        <a:solidFill>
+          <a:schemeClr val="tx1"/>
+        </a:solidFill>
+        <a:latin typeface="+mn-lt"/>
+        <a:ea typeface="+mn-ea"/>
+        <a:cs typeface="+mn-cs"/>
+      </a:defRPr>
+    </a:lvl2pPr>
+    <a:lvl3pPr marL="914400" algn="l" defTabSz="457200" rtl="0" eaLnBrk="1" latinLnBrk="0" hangingPunct="1">
+      <a:defRPr sz="1200" kern="1200">
+        <a:solidFill>
+          <a:schemeClr val="tx1"/>
+        </a:solidFill>
+        <a:latin typeface="+mn-lt"/>
+        <a:ea typeface="+mn-ea"/>
+        <a:cs typeface="+mn-cs"/>
+      </a:defRPr>
+    </a:lvl3pPr>
+    <a:lvl4pPr marL="1371600" algn="l" defTabSz="457200" rtl="0" eaLnBrk="1" latinLnBrk="0" hangingPunct="1">
+      <a:defRPr sz="1200" kern="1200">
+        <a:solidFill>
+          <a:schemeClr val="tx1"/>
+        </a:solidFill>
+        <a:latin typeface="+mn-lt"/>
+        <a:ea typeface="+mn-ea"/>
+        <a:cs typeface="+mn-cs"/>
+      </a:defRPr>
+    </a:lvl4pPr>
+    <a:lvl5pPr marL="1828800" algn="l" defTabSz="457200" rtl="0" eaLnBrk="1" latinLnBrk="0" hangingPunct="1">
+      <a:defRPr sz="1200" kern="1200">
+        <a:solidFill>
+          <a:schemeClr val="tx1"/>
+        </a:solidFill>
+        <a:latin typeface="+mn-lt"/>
+        <a:ea typeface="+mn-ea"/>
+        <a:cs typeface="+mn-cs"/>
+      </a:defRPr>
+    </a:lvl5pPr>
+    <a:lvl6pPr marL="2286000" algn="l" defTabSz="457200" rtl="0" eaLnBrk="1" latinLnBrk="0" hangingPunct="1">
+      <a:defRPr sz="1200" kern="1200">
+        <a:solidFill>
+          <a:schemeClr val="tx1"/>
+        </a:solidFill>
+        <a:latin typeface="+mn-lt"/>
+        <a:ea typeface="+mn-ea"/>
+        <a:cs typeface="+mn-cs"/>
+      </a:defRPr>
+    </a:lvl6pPr>
+    <a:lvl7pPr marL="2743200" algn="l" defTabSz="457200" rtl="0" eaLnBrk="1" latinLnBrk="0" hangingPunct="1">
+      <a:defRPr sz="1200" kern="1200">
+        <a:solidFill>
+          <a:schemeClr val="tx1"/>
+        </a:solidFill>
+        <a:latin typeface="+mn-lt"/>
+        <a:ea typeface="+mn-ea"/>
+        <a:cs typeface="+mn-cs"/>
+      </a:defRPr>
+    </a:lvl7pPr>
+    <a:lvl8pPr marL="3200400" algn="l" defTabSz="457200" rtl="0" eaLnBrk="1" latinLnBrk="0" hangingPunct="1">
+      <a:defRPr sz="1200" kern="1200">
+        <a:solidFill>
+          <a:schemeClr val="tx1"/>
+        </a:solidFill>
+        <a:latin typeface="+mn-lt"/>
+        <a:ea typeface="+mn-ea"/>
+        <a:cs typeface="+mn-cs"/>
+      </a:defRPr>
+    </a:lvl8pPr>
+    <a:lvl9pPr marL="3657600" algn="l" defTabSz="457200" rtl="0" eaLnBrk="1" latinLnBrk="0" hangingPunct="1">
+      <a:defRPr sz="1200" kern="1200">
+        <a:solidFill>
+          <a:schemeClr val="tx1"/>
+        </a:solidFill>
+        <a:latin typeface="+mn-lt"/>
+        <a:ea typeface="+mn-ea"/>
+        <a:cs typeface="+mn-cs"/>
+      </a:defRPr>
+    </a:lvl9pPr>
+  </p:notesStyle>
+</p:notesMaster>
+</file>
+
+<file path=ppt/notesSlides/notesSlide1.xml><?xml version="1.0" encoding="utf-8"?>
+<p:notes xmlns:a="http://schemas.openxmlformats.org/drawingml/2006/main" xmlns:p="http://schemas.openxmlformats.org/presentationml/2006/main" xmlns:r="http://schemas.openxmlformats.org/officeDocument/2006/relationships">
+  <p:cSld>
+    <p:spTree>
+      <p:nvGrpSpPr>
+        <p:cNvPr id="1" name=""/>
+        <p:cNvGrpSpPr/>
+        <p:nvPr/>
+      </p:nvGrpSpPr>
+      <p:grpSpPr>
+        <a:xfrm>
+          <a:off x="0" y="0"/>
+          <a:ext cx="0" cy="0"/>
+          <a:chOff x="0" y="0"/>
+          <a:chExt cx="0" cy="0"/>
+        </a:xfrm>
+      </p:grpSpPr>
+      <p:sp>
+        <p:nvSpPr>
+          <p:cNvPr id="2" name="Slide Image Placeholder 1"/>
+          <p:cNvSpPr>
+            <a:spLocks noGrp="1"/>
+          </p:cNvSpPr>
+          <p:nvPr>
+            <p:ph type="sldImg" idx="2"/>
+          </p:nvPr>
+        </p:nvSpPr>
+        <p:spPr/>
+      </p:sp>
+      <p:sp>
+        <p:nvSpPr>
+          <p:cNvPr id="3" name="Notes Placeholder 2"/>
+          <p:cNvSpPr>
+            <a:spLocks noGrp="1"/>
+          </p:cNvSpPr>
+          <p:nvPr>
+            <p:ph type="body" idx="3" sz="quarter"/>
+          </p:nvPr>
+        </p:nvSpPr>
+        <p:spPr/>
+        <p:txBody>
+          <a:bodyPr/>
+          <a:lstStyle/>
+          <a:p>
+            <a:r>
+              <a:t>0:00–0:20. Riskora is a research workspace for Indian equity mutual-fund disclosures. The target is a stock newly present in a later complete, comparable statement. It does not identify an order or trade date. The screenshot is the working local app, showing an actual ABSL Flexi Cap disclosure; its publication date is unverified.</a:t>
+            </a:r>
+          </a:p>
+        </p:txBody>
+      </p:sp>
+      <p:sp>
+        <p:nvSpPr>
+          <p:cNvPr id="4" name="Slide Number Placeholder 3"/>
+          <p:cNvSpPr>
+            <a:spLocks noGrp="1"/>
+          </p:cNvSpPr>
+          <p:nvPr>
+            <p:ph type="sldNum" idx="5" sz="quarter"/>
+          </p:nvPr>
+        </p:nvSpPr>
+        <p:spPr/>
+      </p:sp>
+    </p:spTree>
+  </p:cSld>
+  <p:clrMapOvr>
+    <a:masterClrMapping/>
+  </p:clrMapOvr>
+</p:notes>
+</file>
+
+<file path=ppt/notesSlides/notesSlide2.xml><?xml version="1.0" encoding="utf-8"?>
+<p:notes xmlns:a="http://schemas.openxmlformats.org/drawingml/2006/main" xmlns:p="http://schemas.openxmlformats.org/presentationml/2006/main" xmlns:r="http://schemas.openxmlformats.org/officeDocument/2006/relationships">
+  <p:cSld>
+    <p:spTree>
+      <p:nvGrpSpPr>
+        <p:cNvPr id="1" name=""/>
+        <p:cNvGrpSpPr/>
+        <p:nvPr/>
+      </p:nvGrpSpPr>
+      <p:grpSpPr>
+        <a:xfrm>
+          <a:off x="0" y="0"/>
+          <a:ext cx="0" cy="0"/>
+          <a:chOff x="0" y="0"/>
+          <a:chExt cx="0" cy="0"/>
+        </a:xfrm>
+      </p:grpSpPr>
+      <p:sp>
+        <p:nvSpPr>
+          <p:cNvPr id="2" name="Slide Image Placeholder 1"/>
+          <p:cNvSpPr>
+            <a:spLocks noGrp="1"/>
+          </p:cNvSpPr>
+          <p:nvPr>
+            <p:ph type="sldImg" idx="2"/>
+          </p:nvPr>
+        </p:nvSpPr>
+        <p:spPr/>
+      </p:sp>
+      <p:sp>
+        <p:nvSpPr>
+          <p:cNvPr id="3" name="Notes Placeholder 2"/>
+          <p:cNvSpPr>
+            <a:spLocks noGrp="1"/>
+          </p:cNvSpPr>
+          <p:nvPr>
+            <p:ph type="body" idx="3" sz="quarter"/>
+          </p:nvPr>
+        </p:nvSpPr>
+        <p:spPr/>
+        <p:txBody>
+          <a:bodyPr/>
+          <a:lstStyle/>
+          <a:p>
+            <a:r>
+              <a:t>0:20–0:50. Analysts can confuse a new position with a late publication or an incomplete statement. Riskora makes the eligibility rule explicit. If the earlier statement is incomplete, an absent stock is unknown rather than a negative example. This is the key product insight, and the target remains a later disclosed position rather than a purchase.</a:t>
+            </a:r>
+          </a:p>
+        </p:txBody>
+      </p:sp>
+      <p:sp>
+        <p:nvSpPr>
+          <p:cNvPr id="4" name="Slide Number Placeholder 3"/>
+          <p:cNvSpPr>
+            <a:spLocks noGrp="1"/>
+          </p:cNvSpPr>
+          <p:nvPr>
+            <p:ph type="sldNum" idx="5" sz="quarter"/>
+          </p:nvPr>
+        </p:nvSpPr>
+        <p:spPr/>
+      </p:sp>
+    </p:spTree>
+  </p:cSld>
+  <p:clrMapOvr>
+    <a:masterClrMapping/>
+  </p:clrMapOvr>
+</p:notes>
+</file>
+
+<file path=ppt/notesSlides/notesSlide3.xml><?xml version="1.0" encoding="utf-8"?>
+<p:notes xmlns:a="http://schemas.openxmlformats.org/drawingml/2006/main" xmlns:p="http://schemas.openxmlformats.org/presentationml/2006/main" xmlns:r="http://schemas.openxmlformats.org/officeDocument/2006/relationships">
+  <p:cSld>
+    <p:spTree>
+      <p:nvGrpSpPr>
+        <p:cNvPr id="1" name=""/>
+        <p:cNvGrpSpPr/>
+        <p:nvPr/>
+      </p:nvGrpSpPr>
+      <p:grpSpPr>
+        <a:xfrm>
+          <a:off x="0" y="0"/>
+          <a:ext cx="0" cy="0"/>
+          <a:chOff x="0" y="0"/>
+          <a:chExt cx="0" cy="0"/>
+        </a:xfrm>
+      </p:grpSpPr>
+      <p:sp>
+        <p:nvSpPr>
+          <p:cNvPr id="2" name="Slide Image Placeholder 1"/>
+          <p:cNvSpPr>
+            <a:spLocks noGrp="1"/>
+          </p:cNvSpPr>
+          <p:nvPr>
+            <p:ph type="sldImg" idx="2"/>
+          </p:nvPr>
+        </p:nvSpPr>
+        <p:spPr/>
+      </p:sp>
+      <p:sp>
+        <p:nvSpPr>
+          <p:cNvPr id="3" name="Notes Placeholder 2"/>
+          <p:cNvSpPr>
+            <a:spLocks noGrp="1"/>
+          </p:cNvSpPr>
+          <p:nvPr>
+            <p:ph type="body" idx="3" sz="quarter"/>
+          </p:nvPr>
+        </p:nvSpPr>
+        <p:spPr/>
+        <p:txBody>
+          <a:bodyPr/>
+          <a:lstStyle/>
+          <a:p>
+            <a:r>
+              <a:t>0:50–1:25. Show the actual application. The screenshot is from the fictional synthetic sample and is clearly labelled. Data management imports attributed CSVs; Fund explorer shows dated positions; Evaluation checks readiness and a saved holdout; Predictions ranks known candidates; Evidence shows cutoff-dated features and source links. Navigate live through these screens if the demo is available. The ranking score is relative, not a calibrated probability.</a:t>
+            </a:r>
+          </a:p>
+        </p:txBody>
+      </p:sp>
+      <p:sp>
+        <p:nvSpPr>
+          <p:cNvPr id="4" name="Slide Number Placeholder 3"/>
+          <p:cNvSpPr>
+            <a:spLocks noGrp="1"/>
+          </p:cNvSpPr>
+          <p:nvPr>
+            <p:ph type="sldNum" idx="5" sz="quarter"/>
+          </p:nvPr>
+        </p:nvSpPr>
+        <p:spPr/>
+      </p:sp>
+    </p:spTree>
+  </p:cSld>
+  <p:clrMapOvr>
+    <a:masterClrMapping/>
+  </p:clrMapOvr>
+</p:notes>
+</file>
+
+<file path=ppt/notesSlides/notesSlide4.xml><?xml version="1.0" encoding="utf-8"?>
+<p:notes xmlns:a="http://schemas.openxmlformats.org/drawingml/2006/main" xmlns:p="http://schemas.openxmlformats.org/presentationml/2006/main" xmlns:r="http://schemas.openxmlformats.org/officeDocument/2006/relationships">
+  <p:cSld>
+    <p:spTree>
+      <p:nvGrpSpPr>
+        <p:cNvPr id="1" name=""/>
+        <p:cNvGrpSpPr/>
+        <p:nvPr/>
+      </p:nvGrpSpPr>
+      <p:grpSpPr>
+        <a:xfrm>
+          <a:off x="0" y="0"/>
+          <a:ext cx="0" cy="0"/>
+          <a:chOff x="0" y="0"/>
+          <a:chExt cx="0" cy="0"/>
+        </a:xfrm>
+      </p:grpSpPr>
+      <p:sp>
+        <p:nvSpPr>
+          <p:cNvPr id="2" name="Slide Image Placeholder 1"/>
+          <p:cNvSpPr>
+            <a:spLocks noGrp="1"/>
+          </p:cNvSpPr>
+          <p:nvPr>
+            <p:ph type="sldImg" idx="2"/>
+          </p:nvPr>
+        </p:nvSpPr>
+        <p:spPr/>
+      </p:sp>
+      <p:sp>
+        <p:nvSpPr>
+          <p:cNvPr id="3" name="Notes Placeholder 2"/>
+          <p:cNvSpPr>
+            <a:spLocks noGrp="1"/>
+          </p:cNvSpPr>
+          <p:nvPr>
+            <p:ph type="body" idx="3" sz="quarter"/>
+          </p:nvPr>
+        </p:nvSpPr>
+        <p:spPr/>
+        <p:txBody>
+          <a:bodyPr/>
+          <a:lstStyle/>
+          <a:p>
+            <a:r>
+              <a:t>1:25–2:05. The working AI is a scikit-learn logistic classifier. It uses features known at the cutoff, including fund preferences and optional market returns and volume. Training compares with historical-addition and fund-preference baselines on later periods, then checks a final holdout. This screenshot is the local synthetic run: only 14 holdout cases and 2 additions. It proves the evaluation code path, not Indian-market predictive power. Optional LLM event extraction is constrained to verbatim supplied excerpts and is not configured in this demo. Backend: FastAPI and SQLite; frontend: React and Vite.</a:t>
+            </a:r>
+          </a:p>
+        </p:txBody>
+      </p:sp>
+      <p:sp>
+        <p:nvSpPr>
+          <p:cNvPr id="4" name="Slide Number Placeholder 3"/>
+          <p:cNvSpPr>
+            <a:spLocks noGrp="1"/>
+          </p:cNvSpPr>
+          <p:nvPr>
+            <p:ph type="sldNum" idx="5" sz="quarter"/>
+          </p:nvPr>
+        </p:nvSpPr>
+        <p:spPr/>
+      </p:sp>
+    </p:spTree>
+  </p:cSld>
+  <p:clrMapOvr>
+    <a:masterClrMapping/>
+  </p:clrMapOvr>
+</p:notes>
+</file>
+
+<file path=ppt/notesSlides/notesSlide5.xml><?xml version="1.0" encoding="utf-8"?>
+<p:notes xmlns:a="http://schemas.openxmlformats.org/drawingml/2006/main" xmlns:p="http://schemas.openxmlformats.org/presentationml/2006/main" xmlns:r="http://schemas.openxmlformats.org/officeDocument/2006/relationships">
+  <p:cSld>
+    <p:spTree>
+      <p:nvGrpSpPr>
+        <p:cNvPr id="1" name=""/>
+        <p:cNvGrpSpPr/>
+        <p:nvPr/>
+      </p:nvGrpSpPr>
+      <p:grpSpPr>
+        <a:xfrm>
+          <a:off x="0" y="0"/>
+          <a:ext cx="0" cy="0"/>
+          <a:chOff x="0" y="0"/>
+          <a:chExt cx="0" cy="0"/>
+        </a:xfrm>
+      </p:grpSpPr>
+      <p:sp>
+        <p:nvSpPr>
+          <p:cNvPr id="2" name="Slide Image Placeholder 1"/>
+          <p:cNvSpPr>
+            <a:spLocks noGrp="1"/>
+          </p:cNvSpPr>
+          <p:nvPr>
+            <p:ph type="sldImg" idx="2"/>
+          </p:nvPr>
+        </p:nvSpPr>
+        <p:spPr/>
+      </p:sp>
+      <p:sp>
+        <p:nvSpPr>
+          <p:cNvPr id="3" name="Notes Placeholder 2"/>
+          <p:cNvSpPr>
+            <a:spLocks noGrp="1"/>
+          </p:cNvSpPr>
+          <p:nvPr>
+            <p:ph type="body" idx="3" sz="quarter"/>
+          </p:nvPr>
+        </p:nvSpPr>
+        <p:spPr/>
+        <p:txBody>
+          <a:bodyPr/>
+          <a:lstStyle/>
+          <a:p>
+            <a:r>
+              <a:t>2:05–2:35. The initial user is a fund research analyst or small research desk. Our value hypothesis is that an auditable shortlist reduces manual sorting and helps teams explain why a candidate deserves review. We have not interviewed customers or shown willingness to pay. The next commercial test is a supervised pilot with permissioned data, measuring analyst time, evidence traceability, and ranking lift. A team license is a hypothesis, not current revenue.</a:t>
+            </a:r>
+          </a:p>
+        </p:txBody>
+      </p:sp>
+      <p:sp>
+        <p:nvSpPr>
+          <p:cNvPr id="4" name="Slide Number Placeholder 3"/>
+          <p:cNvSpPr>
+            <a:spLocks noGrp="1"/>
+          </p:cNvSpPr>
+          <p:nvPr>
+            <p:ph type="sldNum" idx="5" sz="quarter"/>
+          </p:nvPr>
+        </p:nvSpPr>
+        <p:spPr/>
+      </p:sp>
+    </p:spTree>
+  </p:cSld>
+  <p:clrMapOvr>
+    <a:masterClrMapping/>
+  </p:clrMapOvr>
+</p:notes>
+</file>
+
+<file path=ppt/notesSlides/notesSlide6.xml><?xml version="1.0" encoding="utf-8"?>
+<p:notes xmlns:a="http://schemas.openxmlformats.org/drawingml/2006/main" xmlns:p="http://schemas.openxmlformats.org/presentationml/2006/main" xmlns:r="http://schemas.openxmlformats.org/officeDocument/2006/relationships">
+  <p:cSld>
+    <p:spTree>
+      <p:nvGrpSpPr>
+        <p:cNvPr id="1" name=""/>
+        <p:cNvGrpSpPr/>
+        <p:nvPr/>
+      </p:nvGrpSpPr>
+      <p:grpSpPr>
+        <a:xfrm>
+          <a:off x="0" y="0"/>
+          <a:ext cx="0" cy="0"/>
+          <a:chOff x="0" y="0"/>
+          <a:chExt cx="0" cy="0"/>
+        </a:xfrm>
+      </p:grpSpPr>
+      <p:sp>
+        <p:nvSpPr>
+          <p:cNvPr id="2" name="Slide Image Placeholder 1"/>
+          <p:cNvSpPr>
+            <a:spLocks noGrp="1"/>
+          </p:cNvSpPr>
+          <p:nvPr>
+            <p:ph type="sldImg" idx="2"/>
+          </p:nvPr>
+        </p:nvSpPr>
+        <p:spPr/>
+      </p:sp>
+      <p:sp>
+        <p:nvSpPr>
+          <p:cNvPr id="3" name="Notes Placeholder 2"/>
+          <p:cNvSpPr>
+            <a:spLocks noGrp="1"/>
+          </p:cNvSpPr>
+          <p:nvPr>
+            <p:ph type="body" idx="3" sz="quarter"/>
+          </p:nvPr>
+        </p:nvSpPr>
+        <p:spPr/>
+        <p:txBody>
+          <a:bodyPr/>
+          <a:lstStyle/>
+          <a:p>
+            <a:r>
+              <a:t>2:35–3:00. We have a working product and have checked the two supplied AMC workbooks against their normalized CSVs. Their exact public release dates are not verified, so Riskora labels them observed and excludes them from model training. The trained demo uses fictional data only. Next we need publication-verified history, real holdouts, and analyst pilots. Our ask is two research teams and permissioned historical data.</a:t>
+            </a:r>
+          </a:p>
+          <a:p/>
+          <a:p>
+            <a:r>
+              <a:t>Q&amp;A: Does it predict trades? No: the target is a new later disclosed position. Is the accuracy real? No: the saved run is synthetic. Why AI? The classifier orders candidates from dated signals; optional LLM extraction is separate. Who pays? A team license is a testable hypothesis. Prior work/surprise element: answer from the team's actual event record; do not imply any unverified eligibility.</a:t>
+            </a:r>
+          </a:p>
+          <a:p/>
+          <a:p>
+            <a:r>
+              <a:t>Source notes: code and data review in this repository; local UI captures on 24 Oct 2026; handbook timing and six-slide limit summarized in docs/event-submission/README.md. Keep the separate AI impact statement and a public demo/recording link for submission.</a:t>
+            </a:r>
+          </a:p>
+        </p:txBody>
+      </p:sp>
+      <p:sp>
+        <p:nvSpPr>
+          <p:cNvPr id="4" name="Slide Number Placeholder 3"/>
+          <p:cNvSpPr>
+            <a:spLocks noGrp="1"/>
+          </p:cNvSpPr>
+          <p:nvPr>
+            <p:ph type="sldNum" idx="5" sz="quarter"/>
+          </p:nvPr>
+        </p:nvSpPr>
+        <p:spPr/>
+      </p:sp>
+    </p:spTree>
+  </p:cSld>
+  <p:clrMapOvr>
+    <a:masterClrMapping/>
+  </p:clrMapOvr>
+</p:notes>
 </file>
 
 <file path=ppt/slideLayouts/slideLayout1.xml><?xml version="1.0" encoding="utf-8"?>
@@ -3089,7 +3871,7 @@
     <p:bg>
       <p:bgPr>
         <a:solidFill>
-          <a:srgbClr val="F8F8F6"/>
+          <a:srgbClr val="F7F9F7"/>
         </a:solidFill>
         <a:effectLst/>
       </p:bgPr>
@@ -3109,8 +3891,8 @@
         </p:nvSpPr>
         <p:spPr>
           <a:xfrm>
-            <a:off x="566928" y="338328"/>
-            <a:ext cx="5943600" cy="256032"/>
+            <a:off x="585216" y="228600"/>
+            <a:ext cx="7863840" cy="256032"/>
           </a:xfrm>
           <a:prstGeom prst="rect">
             <a:avLst/>
@@ -3118,7 +3900,7 @@
           <a:noFill/>
         </p:spPr>
         <p:txBody>
-          <a:bodyPr wrap="square" lIns="0" rIns="0" tIns="0" bIns="0">
+          <a:bodyPr wrap="square" lIns="0" rIns="0" tIns="0" bIns="0" anchor="ctr">
             <a:spAutoFit/>
           </a:bodyPr>
           <a:lstStyle/>
@@ -3126,13 +3908,13 @@
             <a:pPr>
               <a:defRPr sz="1000" b="1">
                 <a:solidFill>
-                  <a:srgbClr val="215E4E"/>
+                  <a:srgbClr val="13664E"/>
                 </a:solidFill>
                 <a:latin typeface="Aptos"/>
               </a:defRPr>
             </a:pPr>
             <a:r>
-              <a:t>RISKORA  /  AIBOOMI STARTUP WEEKEND</a:t>
+              <a:t>RISKORA  /  AIBOOMI STARTUP WEEKEND KOCHI</a:t>
             </a:r>
           </a:p>
         </p:txBody>
@@ -3145,8 +3927,8 @@
         </p:nvSpPr>
         <p:spPr>
           <a:xfrm>
-            <a:off x="9326880" y="338328"/>
-            <a:ext cx="2286000" cy="256032"/>
+            <a:off x="9326880" y="228600"/>
+            <a:ext cx="2258568" cy="256032"/>
           </a:xfrm>
           <a:prstGeom prst="rect">
             <a:avLst/>
@@ -3154,21 +3936,21 @@
           <a:noFill/>
         </p:spPr>
         <p:txBody>
-          <a:bodyPr wrap="square" lIns="0" rIns="0" tIns="0" bIns="0">
+          <a:bodyPr wrap="square" lIns="0" rIns="0" tIns="0" bIns="0" anchor="ctr">
             <a:spAutoFit/>
           </a:bodyPr>
           <a:lstStyle/>
           <a:p>
-            <a:pPr>
+            <a:pPr algn="r">
               <a:defRPr sz="1000" b="0">
                 <a:solidFill>
-                  <a:srgbClr val="565E5C"/>
+                  <a:srgbClr val="4E5C56"/>
                 </a:solidFill>
                 <a:latin typeface="Aptos"/>
               </a:defRPr>
             </a:pPr>
             <a:r>
-              <a:t>PROBLEM</a:t>
+              <a:t>WORKING MVP</a:t>
             </a:r>
           </a:p>
         </p:txBody>
@@ -3181,14 +3963,14 @@
         </p:nvSpPr>
         <p:spPr>
           <a:xfrm>
-            <a:off x="566928" y="758952"/>
-            <a:ext cx="11045952" cy="10972"/>
+            <a:off x="585216" y="667512"/>
+            <a:ext cx="11018520" cy="14630"/>
           </a:xfrm>
           <a:prstGeom prst="rect">
             <a:avLst/>
           </a:prstGeom>
           <a:solidFill>
-            <a:srgbClr val="D8DCD8"/>
+            <a:srgbClr val="CDD8D1"/>
           </a:solidFill>
           <a:ln>
             <a:noFill/>
@@ -3224,8 +4006,8 @@
         </p:nvSpPr>
         <p:spPr>
           <a:xfrm>
-            <a:off x="566928" y="1024128"/>
-            <a:ext cx="10972800" cy="749808"/>
+            <a:off x="585216" y="896112"/>
+            <a:ext cx="10972800" cy="640080"/>
           </a:xfrm>
           <a:prstGeom prst="rect">
             <a:avLst/>
@@ -3233,7 +4015,7 @@
           <a:noFill/>
         </p:spPr>
         <p:txBody>
-          <a:bodyPr wrap="square" anchor="ctr" lIns="0" rIns="0" tIns="0" bIns="0">
+          <a:bodyPr wrap="square" lIns="0" rIns="0" tIns="0" bIns="0" anchor="ctr">
             <a:spAutoFit/>
           </a:bodyPr>
           <a:lstStyle/>
@@ -3241,13 +4023,13 @@
             <a:pPr>
               <a:defRPr sz="3000" b="1">
                 <a:solidFill>
-                  <a:srgbClr val="181B1B"/>
+                  <a:srgbClr val="18221F"/>
                 </a:solidFill>
                 <a:latin typeface="Aptos Display"/>
               </a:defRPr>
             </a:pPr>
             <a:r>
-              <a:t>A fund statement shows positions after the fact.</a:t>
+              <a:t>From fund disclosures to a research shortlist.</a:t>
             </a:r>
           </a:p>
         </p:txBody>
@@ -3260,8 +4042,8 @@
         </p:nvSpPr>
         <p:spPr>
           <a:xfrm>
-            <a:off x="566928" y="1773936"/>
-            <a:ext cx="10927080" cy="411480"/>
+            <a:off x="585216" y="1600200"/>
+            <a:ext cx="10972800" cy="384048"/>
           </a:xfrm>
           <a:prstGeom prst="rect">
             <a:avLst/>
@@ -3269,35 +4051,78 @@
           <a:noFill/>
         </p:spPr>
         <p:txBody>
-          <a:bodyPr wrap="square" anchor="ctr" lIns="0" rIns="0" tIns="0" bIns="0">
+          <a:bodyPr wrap="square" lIns="0" rIns="0" tIns="0" bIns="0" anchor="ctr">
             <a:spAutoFit/>
           </a:bodyPr>
           <a:lstStyle/>
           <a:p>
             <a:pPr>
-              <a:defRPr sz="1500" b="0">
-                <a:solidFill>
-                  <a:srgbClr val="565E5C"/>
+              <a:defRPr sz="1400" b="0">
+                <a:solidFill>
+                  <a:srgbClr val="4E5C56"/>
                 </a:solidFill>
                 <a:latin typeface="Aptos"/>
               </a:defRPr>
             </a:pPr>
             <a:r>
-              <a:t>Researchers still need a disciplined way to ask what may appear next.</a:t>
-            </a:r>
-          </a:p>
-        </p:txBody>
-      </p:sp>
-      <p:sp>
-        <p:nvSpPr>
-          <p:cNvPr id="7" name="TextBox 6"/>
+              <a:t>Riskora helps analysts inspect what may newly appear in a later valid portfolio statement.</a:t>
+            </a:r>
+          </a:p>
+        </p:txBody>
+      </p:sp>
+      <p:sp>
+        <p:nvSpPr>
+          <p:cNvPr id="7" name="Rectangle 6"/>
+          <p:cNvSpPr/>
+          <p:nvPr/>
+        </p:nvSpPr>
+        <p:spPr>
+          <a:xfrm>
+            <a:off x="585216" y="6355080"/>
+            <a:ext cx="11018520" cy="14630"/>
+          </a:xfrm>
+          <a:prstGeom prst="rect">
+            <a:avLst/>
+          </a:prstGeom>
+          <a:solidFill>
+            <a:srgbClr val="CDD8D1"/>
+          </a:solidFill>
+          <a:ln>
+            <a:noFill/>
+          </a:ln>
+        </p:spPr>
+        <p:style>
+          <a:lnRef idx="1">
+            <a:schemeClr val="accent1"/>
+          </a:lnRef>
+          <a:fillRef idx="3">
+            <a:schemeClr val="accent1"/>
+          </a:fillRef>
+          <a:effectRef idx="2">
+            <a:schemeClr val="accent1"/>
+          </a:effectRef>
+          <a:fontRef idx="minor">
+            <a:schemeClr val="lt1"/>
+          </a:fontRef>
+        </p:style>
+        <p:txBody>
+          <a:bodyPr rtlCol="0" anchor="ctr"/>
+          <a:lstStyle/>
+          <a:p>
+            <a:pPr algn="ctr"/>
+          </a:p>
+        </p:txBody>
+      </p:sp>
+      <p:sp>
+        <p:nvSpPr>
+          <p:cNvPr id="8" name="TextBox 7"/>
           <p:cNvSpPr txBox="1"/>
           <p:nvPr/>
         </p:nvSpPr>
         <p:spPr>
           <a:xfrm>
-            <a:off x="10991088" y="6464808"/>
-            <a:ext cx="658368" cy="256032"/>
+            <a:off x="10972800" y="6419088"/>
+            <a:ext cx="621792" cy="201168"/>
           </a:xfrm>
           <a:prstGeom prst="rect">
             <a:avLst/>
@@ -3305,39 +4130,277 @@
           <a:noFill/>
         </p:spPr>
         <p:txBody>
-          <a:bodyPr wrap="square" lIns="0" rIns="0" tIns="0" bIns="0">
+          <a:bodyPr wrap="square" lIns="0" rIns="0" tIns="0" bIns="0" anchor="ctr">
             <a:spAutoFit/>
           </a:bodyPr>
           <a:lstStyle/>
           <a:p>
+            <a:pPr algn="r">
+              <a:defRPr sz="900" b="0">
+                <a:solidFill>
+                  <a:srgbClr val="4E5C56"/>
+                </a:solidFill>
+                <a:latin typeface="Aptos"/>
+              </a:defRPr>
+            </a:pPr>
+            <a:r>
+              <a:t>01 / 06</a:t>
+            </a:r>
+          </a:p>
+        </p:txBody>
+      </p:sp>
+      <p:sp>
+        <p:nvSpPr>
+          <p:cNvPr id="9" name="TextBox 8"/>
+          <p:cNvSpPr txBox="1"/>
+          <p:nvPr/>
+        </p:nvSpPr>
+        <p:spPr>
+          <a:xfrm>
+            <a:off x="585216" y="2340864"/>
+            <a:ext cx="4663440" cy="969264"/>
+          </a:xfrm>
+          <a:prstGeom prst="rect">
+            <a:avLst/>
+          </a:prstGeom>
+          <a:noFill/>
+        </p:spPr>
+        <p:txBody>
+          <a:bodyPr wrap="square" lIns="0" rIns="0" tIns="0" bIns="0" anchor="ctr">
+            <a:spAutoFit/>
+          </a:bodyPr>
+          <a:lstStyle/>
+          <a:p>
             <a:pPr>
-              <a:defRPr sz="900" b="0">
-                <a:solidFill>
-                  <a:srgbClr val="565E5C"/>
+              <a:defRPr sz="2900" b="1">
+                <a:solidFill>
+                  <a:srgbClr val="18221F"/>
+                </a:solidFill>
+                <a:latin typeface="Aptos Display"/>
+              </a:defRPr>
+            </a:pPr>
+            <a:r>
+              <a:t>Published holdings</a:t>
+            </a:r>
+            <a:br/>
+            <a:r>
+              <a:t>are retrospective.</a:t>
+            </a:r>
+          </a:p>
+        </p:txBody>
+      </p:sp>
+      <p:sp>
+        <p:nvSpPr>
+          <p:cNvPr id="10" name="TextBox 9"/>
+          <p:cNvSpPr txBox="1"/>
+          <p:nvPr/>
+        </p:nvSpPr>
+        <p:spPr>
+          <a:xfrm>
+            <a:off x="585216" y="3575304"/>
+            <a:ext cx="4663440" cy="978408"/>
+          </a:xfrm>
+          <a:prstGeom prst="rect">
+            <a:avLst/>
+          </a:prstGeom>
+          <a:noFill/>
+        </p:spPr>
+        <p:txBody>
+          <a:bodyPr wrap="square" lIns="0" rIns="0" tIns="0" bIns="0" anchor="ctr">
+            <a:spAutoFit/>
+          </a:bodyPr>
+          <a:lstStyle/>
+          <a:p>
+            <a:pPr>
+              <a:defRPr sz="1700" b="0">
+                <a:solidFill>
+                  <a:srgbClr val="4E5C56"/>
                 </a:solidFill>
                 <a:latin typeface="Aptos"/>
               </a:defRPr>
             </a:pPr>
             <a:r>
-              <a:t>01 / 06</a:t>
-            </a:r>
-          </a:p>
-        </p:txBody>
-      </p:sp>
-      <p:sp>
-        <p:nvSpPr>
-          <p:cNvPr id="8" name="Rounded Rectangle 7"/>
+              <a:t>We make the next research question traceable: which known stocks deserve a closer look, and what was knowable at the cutoff?</a:t>
+            </a:r>
+          </a:p>
+        </p:txBody>
+      </p:sp>
+      <p:sp>
+        <p:nvSpPr>
+          <p:cNvPr id="11" name="Rounded Rectangle 10"/>
           <p:cNvSpPr/>
           <p:nvPr/>
         </p:nvSpPr>
         <p:spPr>
           <a:xfrm>
-            <a:off x="566928" y="2523744"/>
-            <a:ext cx="3547872" cy="2944368"/>
+            <a:off x="585216" y="4855464"/>
+            <a:ext cx="1901952" cy="329184"/>
           </a:xfrm>
           <a:prstGeom prst="roundRect">
             <a:avLst>
-              <a:gd name="adj" fmla="val 8000"/>
+              <a:gd name="adj" fmla="val 6000"/>
+            </a:avLst>
+          </a:prstGeom>
+          <a:solidFill>
+            <a:srgbClr val="E5F2EB"/>
+          </a:solidFill>
+          <a:ln>
+            <a:noFill/>
+          </a:ln>
+        </p:spPr>
+        <p:style>
+          <a:lnRef idx="1">
+            <a:schemeClr val="accent1"/>
+          </a:lnRef>
+          <a:fillRef idx="3">
+            <a:schemeClr val="accent1"/>
+          </a:fillRef>
+          <a:effectRef idx="2">
+            <a:schemeClr val="accent1"/>
+          </a:effectRef>
+          <a:fontRef idx="minor">
+            <a:schemeClr val="lt1"/>
+          </a:fontRef>
+        </p:style>
+        <p:txBody>
+          <a:bodyPr rtlCol="0" anchor="ctr"/>
+          <a:lstStyle/>
+          <a:p>
+            <a:pPr algn="ctr"/>
+          </a:p>
+        </p:txBody>
+      </p:sp>
+      <p:sp>
+        <p:nvSpPr>
+          <p:cNvPr id="12" name="TextBox 11"/>
+          <p:cNvSpPr txBox="1"/>
+          <p:nvPr/>
+        </p:nvSpPr>
+        <p:spPr>
+          <a:xfrm>
+            <a:off x="694944" y="4869179"/>
+            <a:ext cx="1682496" cy="292608"/>
+          </a:xfrm>
+          <a:prstGeom prst="rect">
+            <a:avLst/>
+          </a:prstGeom>
+          <a:noFill/>
+        </p:spPr>
+        <p:txBody>
+          <a:bodyPr wrap="square" lIns="0" rIns="0" tIns="0" bIns="0" anchor="ctr">
+            <a:spAutoFit/>
+          </a:bodyPr>
+          <a:lstStyle/>
+          <a:p>
+            <a:pPr>
+              <a:defRPr sz="1000" b="1">
+                <a:solidFill>
+                  <a:srgbClr val="13664E"/>
+                </a:solidFill>
+                <a:latin typeface="Aptos"/>
+              </a:defRPr>
+            </a:pPr>
+            <a:r>
+              <a:t>RESEARCH WORKSPACE</a:t>
+            </a:r>
+          </a:p>
+        </p:txBody>
+      </p:sp>
+      <p:sp>
+        <p:nvSpPr>
+          <p:cNvPr id="13" name="Rounded Rectangle 12"/>
+          <p:cNvSpPr/>
+          <p:nvPr/>
+        </p:nvSpPr>
+        <p:spPr>
+          <a:xfrm>
+            <a:off x="2624328" y="4855464"/>
+            <a:ext cx="1874519" cy="329184"/>
+          </a:xfrm>
+          <a:prstGeom prst="roundRect">
+            <a:avLst>
+              <a:gd name="adj" fmla="val 6000"/>
+            </a:avLst>
+          </a:prstGeom>
+          <a:solidFill>
+            <a:srgbClr val="E5F2EB"/>
+          </a:solidFill>
+          <a:ln>
+            <a:noFill/>
+          </a:ln>
+        </p:spPr>
+        <p:style>
+          <a:lnRef idx="1">
+            <a:schemeClr val="accent1"/>
+          </a:lnRef>
+          <a:fillRef idx="3">
+            <a:schemeClr val="accent1"/>
+          </a:fillRef>
+          <a:effectRef idx="2">
+            <a:schemeClr val="accent1"/>
+          </a:effectRef>
+          <a:fontRef idx="minor">
+            <a:schemeClr val="lt1"/>
+          </a:fontRef>
+        </p:style>
+        <p:txBody>
+          <a:bodyPr rtlCol="0" anchor="ctr"/>
+          <a:lstStyle/>
+          <a:p>
+            <a:pPr algn="ctr"/>
+          </a:p>
+        </p:txBody>
+      </p:sp>
+      <p:sp>
+        <p:nvSpPr>
+          <p:cNvPr id="14" name="TextBox 13"/>
+          <p:cNvSpPr txBox="1"/>
+          <p:nvPr/>
+        </p:nvSpPr>
+        <p:spPr>
+          <a:xfrm>
+            <a:off x="2734056" y="4869179"/>
+            <a:ext cx="1655063" cy="292608"/>
+          </a:xfrm>
+          <a:prstGeom prst="rect">
+            <a:avLst/>
+          </a:prstGeom>
+          <a:noFill/>
+        </p:spPr>
+        <p:txBody>
+          <a:bodyPr wrap="square" lIns="0" rIns="0" tIns="0" bIns="0" anchor="ctr">
+            <a:spAutoFit/>
+          </a:bodyPr>
+          <a:lstStyle/>
+          <a:p>
+            <a:pPr>
+              <a:defRPr sz="1000" b="1">
+                <a:solidFill>
+                  <a:srgbClr val="13664E"/>
+                </a:solidFill>
+                <a:latin typeface="Aptos"/>
+              </a:defRPr>
+            </a:pPr>
+            <a:r>
+              <a:t>AUDITABLE RANKING</a:t>
+            </a:r>
+          </a:p>
+        </p:txBody>
+      </p:sp>
+      <p:sp>
+        <p:nvSpPr>
+          <p:cNvPr id="15" name="Rounded Rectangle 14"/>
+          <p:cNvSpPr/>
+          <p:nvPr/>
+        </p:nvSpPr>
+        <p:spPr>
+          <a:xfrm>
+            <a:off x="5605272" y="2130552"/>
+            <a:ext cx="6025896" cy="3995928"/>
+          </a:xfrm>
+          <a:prstGeom prst="roundRect">
+            <a:avLst>
+              <a:gd name="adj" fmla="val 6000"/>
             </a:avLst>
           </a:prstGeom>
           <a:solidFill>
@@ -3345,7 +4408,7 @@
           </a:solidFill>
           <a:ln w="10160">
             <a:solidFill>
-              <a:srgbClr val="D8DCD8"/>
+              <a:srgbClr val="CDD8D1"/>
             </a:solidFill>
           </a:ln>
         </p:spPr>
@@ -3371,16 +4434,40 @@
           </a:p>
         </p:txBody>
       </p:sp>
-      <p:sp>
-        <p:nvSpPr>
-          <p:cNvPr id="9" name="TextBox 8"/>
+      <p:pic>
+        <p:nvPicPr>
+          <p:cNvPr id="16" name="Riskora UI screenshot: fund-detail.png" descr="fund-detail.png"/>
+          <p:cNvPicPr>
+            <a:picLocks noChangeAspect="1"/>
+          </p:cNvPicPr>
+          <p:nvPr/>
+        </p:nvPicPr>
+        <p:blipFill>
+          <a:blip r:embed="rId2"/>
+          <a:stretch>
+            <a:fillRect/>
+          </a:stretch>
+        </p:blipFill>
+        <p:spPr>
+          <a:xfrm>
+            <a:off x="5641848" y="2167128"/>
+            <a:ext cx="5952744" cy="3922776"/>
+          </a:xfrm>
+          <a:prstGeom prst="rect">
+            <a:avLst/>
+          </a:prstGeom>
+        </p:spPr>
+      </p:pic>
+      <p:sp>
+        <p:nvSpPr>
+          <p:cNvPr id="17" name="TextBox 16"/>
           <p:cNvSpPr txBox="1"/>
           <p:nvPr/>
         </p:nvSpPr>
         <p:spPr>
           <a:xfrm>
-            <a:off x="786384" y="2752344"/>
-            <a:ext cx="3108960" cy="256032"/>
+            <a:off x="5669280" y="6117336"/>
+            <a:ext cx="5806440" cy="201168"/>
           </a:xfrm>
           <a:prstGeom prst="rect">
             <a:avLst/>
@@ -3388,35 +4475,35 @@
           <a:noFill/>
         </p:spPr>
         <p:txBody>
-          <a:bodyPr wrap="square" lIns="0" rIns="0" tIns="0" bIns="0">
+          <a:bodyPr wrap="square" lIns="0" rIns="0" tIns="0" bIns="0" anchor="ctr">
             <a:spAutoFit/>
           </a:bodyPr>
           <a:lstStyle/>
           <a:p>
             <a:pPr>
-              <a:defRPr sz="1000" b="1">
-                <a:solidFill>
-                  <a:srgbClr val="215E4E"/>
+              <a:defRPr sz="900" b="0">
+                <a:solidFill>
+                  <a:srgbClr val="4E5C56"/>
                 </a:solidFill>
                 <a:latin typeface="Aptos"/>
               </a:defRPr>
             </a:pPr>
             <a:r>
-              <a:t>USER</a:t>
-            </a:r>
-          </a:p>
-        </p:txBody>
-      </p:sp>
-      <p:sp>
-        <p:nvSpPr>
-          <p:cNvPr id="10" name="TextBox 9"/>
+              <a:t>Actual app · ABSL Flexi Cap · observed disclosure</a:t>
+            </a:r>
+          </a:p>
+        </p:txBody>
+      </p:sp>
+      <p:sp>
+        <p:nvSpPr>
+          <p:cNvPr id="18" name="TextBox 17"/>
           <p:cNvSpPr txBox="1"/>
           <p:nvPr/>
         </p:nvSpPr>
         <p:spPr>
           <a:xfrm>
-            <a:off x="786384" y="3099815"/>
-            <a:ext cx="3108960" cy="566928"/>
+            <a:off x="585216" y="6044184"/>
+            <a:ext cx="4800600" cy="228600"/>
           </a:xfrm>
           <a:prstGeom prst="rect">
             <a:avLst/>
@@ -3424,439 +4511,21 @@
           <a:noFill/>
         </p:spPr>
         <p:txBody>
-          <a:bodyPr wrap="square" anchor="ctr" lIns="0" rIns="0" tIns="0" bIns="0">
+          <a:bodyPr wrap="square" lIns="0" rIns="0" tIns="0" bIns="0" anchor="ctr">
             <a:spAutoFit/>
           </a:bodyPr>
           <a:lstStyle/>
           <a:p>
             <a:pPr>
-              <a:defRPr sz="1900" b="1">
-                <a:solidFill>
-                  <a:srgbClr val="181B1B"/>
+              <a:defRPr sz="1000" b="1">
+                <a:solidFill>
+                  <a:srgbClr val="13664E"/>
                 </a:solidFill>
                 <a:latin typeface="Aptos"/>
               </a:defRPr>
             </a:pPr>
             <a:r>
-              <a:t>Research analysts</a:t>
-            </a:r>
-          </a:p>
-        </p:txBody>
-      </p:sp>
-      <p:sp>
-        <p:nvSpPr>
-          <p:cNvPr id="11" name="TextBox 10"/>
-          <p:cNvSpPr txBox="1"/>
-          <p:nvPr/>
-        </p:nvSpPr>
-        <p:spPr>
-          <a:xfrm>
-            <a:off x="786384" y="3712463"/>
-            <a:ext cx="3108960" cy="1581912"/>
-          </a:xfrm>
-          <a:prstGeom prst="rect">
-            <a:avLst/>
-          </a:prstGeom>
-          <a:noFill/>
-        </p:spPr>
-        <p:txBody>
-          <a:bodyPr wrap="square" anchor="ctr" lIns="0" rIns="0" tIns="0" bIns="0">
-            <a:spAutoFit/>
-          </a:bodyPr>
-          <a:lstStyle/>
-          <a:p>
-            <a:pPr>
-              <a:defRPr sz="1400" b="0">
-                <a:solidFill>
-                  <a:srgbClr val="565E5C"/>
-                </a:solidFill>
-                <a:latin typeface="Aptos"/>
-              </a:defRPr>
-            </a:pPr>
-            <a:r>
-              <a:t>Initial audience: analysts and small teams studying Indian equity mutual-fund disclosures.</a:t>
-            </a:r>
-          </a:p>
-        </p:txBody>
-      </p:sp>
-      <p:sp>
-        <p:nvSpPr>
-          <p:cNvPr id="12" name="Rounded Rectangle 11"/>
-          <p:cNvSpPr/>
-          <p:nvPr/>
-        </p:nvSpPr>
-        <p:spPr>
-          <a:xfrm>
-            <a:off x="4315968" y="2523744"/>
-            <a:ext cx="3547872" cy="2944368"/>
-          </a:xfrm>
-          <a:prstGeom prst="roundRect">
-            <a:avLst>
-              <a:gd name="adj" fmla="val 8000"/>
-            </a:avLst>
-          </a:prstGeom>
-          <a:solidFill>
-            <a:srgbClr val="FFFFFF"/>
-          </a:solidFill>
-          <a:ln w="10160">
-            <a:solidFill>
-              <a:srgbClr val="D8DCD8"/>
-            </a:solidFill>
-          </a:ln>
-        </p:spPr>
-        <p:style>
-          <a:lnRef idx="1">
-            <a:schemeClr val="accent1"/>
-          </a:lnRef>
-          <a:fillRef idx="3">
-            <a:schemeClr val="accent1"/>
-          </a:fillRef>
-          <a:effectRef idx="2">
-            <a:schemeClr val="accent1"/>
-          </a:effectRef>
-          <a:fontRef idx="minor">
-            <a:schemeClr val="lt1"/>
-          </a:fontRef>
-        </p:style>
-        <p:txBody>
-          <a:bodyPr rtlCol="0" anchor="ctr"/>
-          <a:lstStyle/>
-          <a:p>
-            <a:pPr algn="ctr"/>
-          </a:p>
-        </p:txBody>
-      </p:sp>
-      <p:sp>
-        <p:nvSpPr>
-          <p:cNvPr id="13" name="TextBox 12"/>
-          <p:cNvSpPr txBox="1"/>
-          <p:nvPr/>
-        </p:nvSpPr>
-        <p:spPr>
-          <a:xfrm>
-            <a:off x="4535424" y="2752344"/>
-            <a:ext cx="3108960" cy="256032"/>
-          </a:xfrm>
-          <a:prstGeom prst="rect">
-            <a:avLst/>
-          </a:prstGeom>
-          <a:noFill/>
-        </p:spPr>
-        <p:txBody>
-          <a:bodyPr wrap="square" lIns="0" rIns="0" tIns="0" bIns="0">
-            <a:spAutoFit/>
-          </a:bodyPr>
-          <a:lstStyle/>
-          <a:p>
-            <a:pPr>
-              <a:defRPr sz="1000" b="1">
-                <a:solidFill>
-                  <a:srgbClr val="215E4E"/>
-                </a:solidFill>
-                <a:latin typeface="Aptos"/>
-              </a:defRPr>
-            </a:pPr>
-            <a:r>
-              <a:t>WORK</a:t>
-            </a:r>
-          </a:p>
-        </p:txBody>
-      </p:sp>
-      <p:sp>
-        <p:nvSpPr>
-          <p:cNvPr id="14" name="TextBox 13"/>
-          <p:cNvSpPr txBox="1"/>
-          <p:nvPr/>
-        </p:nvSpPr>
-        <p:spPr>
-          <a:xfrm>
-            <a:off x="4535424" y="3099815"/>
-            <a:ext cx="3108960" cy="566928"/>
-          </a:xfrm>
-          <a:prstGeom prst="rect">
-            <a:avLst/>
-          </a:prstGeom>
-          <a:noFill/>
-        </p:spPr>
-        <p:txBody>
-          <a:bodyPr wrap="square" anchor="ctr" lIns="0" rIns="0" tIns="0" bIns="0">
-            <a:spAutoFit/>
-          </a:bodyPr>
-          <a:lstStyle/>
-          <a:p>
-            <a:pPr>
-              <a:defRPr sz="1900" b="1">
-                <a:solidFill>
-                  <a:srgbClr val="181B1B"/>
-                </a:solidFill>
-                <a:latin typeface="Aptos"/>
-              </a:defRPr>
-            </a:pPr>
-            <a:r>
-              <a:t>Compare dated holdings</a:t>
-            </a:r>
-          </a:p>
-        </p:txBody>
-      </p:sp>
-      <p:sp>
-        <p:nvSpPr>
-          <p:cNvPr id="15" name="TextBox 14"/>
-          <p:cNvSpPr txBox="1"/>
-          <p:nvPr/>
-        </p:nvSpPr>
-        <p:spPr>
-          <a:xfrm>
-            <a:off x="4535424" y="3712463"/>
-            <a:ext cx="3108960" cy="1581912"/>
-          </a:xfrm>
-          <a:prstGeom prst="rect">
-            <a:avLst/>
-          </a:prstGeom>
-          <a:noFill/>
-        </p:spPr>
-        <p:txBody>
-          <a:bodyPr wrap="square" anchor="ctr" lIns="0" rIns="0" tIns="0" bIns="0">
-            <a:spAutoFit/>
-          </a:bodyPr>
-          <a:lstStyle/>
-          <a:p>
-            <a:pPr>
-              <a:defRPr sz="1400" b="0">
-                <a:solidFill>
-                  <a:srgbClr val="565E5C"/>
-                </a:solidFill>
-                <a:latin typeface="Aptos"/>
-              </a:defRPr>
-            </a:pPr>
-            <a:r>
-              <a:t>A new position must be separated from an existing holding, a missing row, or a late publication.</a:t>
-            </a:r>
-          </a:p>
-        </p:txBody>
-      </p:sp>
-      <p:sp>
-        <p:nvSpPr>
-          <p:cNvPr id="16" name="Rounded Rectangle 15"/>
-          <p:cNvSpPr/>
-          <p:nvPr/>
-        </p:nvSpPr>
-        <p:spPr>
-          <a:xfrm>
-            <a:off x="8065008" y="2523744"/>
-            <a:ext cx="3547872" cy="2944368"/>
-          </a:xfrm>
-          <a:prstGeom prst="roundRect">
-            <a:avLst>
-              <a:gd name="adj" fmla="val 8000"/>
-            </a:avLst>
-          </a:prstGeom>
-          <a:solidFill>
-            <a:srgbClr val="E9F1EC"/>
-          </a:solidFill>
-          <a:ln w="10160">
-            <a:solidFill>
-              <a:srgbClr val="D8DCD8"/>
-            </a:solidFill>
-          </a:ln>
-        </p:spPr>
-        <p:style>
-          <a:lnRef idx="1">
-            <a:schemeClr val="accent1"/>
-          </a:lnRef>
-          <a:fillRef idx="3">
-            <a:schemeClr val="accent1"/>
-          </a:fillRef>
-          <a:effectRef idx="2">
-            <a:schemeClr val="accent1"/>
-          </a:effectRef>
-          <a:fontRef idx="minor">
-            <a:schemeClr val="lt1"/>
-          </a:fontRef>
-        </p:style>
-        <p:txBody>
-          <a:bodyPr rtlCol="0" anchor="ctr"/>
-          <a:lstStyle/>
-          <a:p>
-            <a:pPr algn="ctr"/>
-          </a:p>
-        </p:txBody>
-      </p:sp>
-      <p:sp>
-        <p:nvSpPr>
-          <p:cNvPr id="17" name="TextBox 16"/>
-          <p:cNvSpPr txBox="1"/>
-          <p:nvPr/>
-        </p:nvSpPr>
-        <p:spPr>
-          <a:xfrm>
-            <a:off x="8284464" y="2752344"/>
-            <a:ext cx="3108960" cy="256032"/>
-          </a:xfrm>
-          <a:prstGeom prst="rect">
-            <a:avLst/>
-          </a:prstGeom>
-          <a:noFill/>
-        </p:spPr>
-        <p:txBody>
-          <a:bodyPr wrap="square" lIns="0" rIns="0" tIns="0" bIns="0">
-            <a:spAutoFit/>
-          </a:bodyPr>
-          <a:lstStyle/>
-          <a:p>
-            <a:pPr>
-              <a:defRPr sz="1000" b="1">
-                <a:solidFill>
-                  <a:srgbClr val="215E4E"/>
-                </a:solidFill>
-                <a:latin typeface="Aptos"/>
-              </a:defRPr>
-            </a:pPr>
-            <a:r>
-              <a:t>BOUNDARY</a:t>
-            </a:r>
-          </a:p>
-        </p:txBody>
-      </p:sp>
-      <p:sp>
-        <p:nvSpPr>
-          <p:cNvPr id="18" name="TextBox 17"/>
-          <p:cNvSpPr txBox="1"/>
-          <p:nvPr/>
-        </p:nvSpPr>
-        <p:spPr>
-          <a:xfrm>
-            <a:off x="8284464" y="3099815"/>
-            <a:ext cx="3108960" cy="566928"/>
-          </a:xfrm>
-          <a:prstGeom prst="rect">
-            <a:avLst/>
-          </a:prstGeom>
-          <a:noFill/>
-        </p:spPr>
-        <p:txBody>
-          <a:bodyPr wrap="square" anchor="ctr" lIns="0" rIns="0" tIns="0" bIns="0">
-            <a:spAutoFit/>
-          </a:bodyPr>
-          <a:lstStyle/>
-          <a:p>
-            <a:pPr>
-              <a:defRPr sz="1900" b="1">
-                <a:solidFill>
-                  <a:srgbClr val="181B1B"/>
-                </a:solidFill>
-                <a:latin typeface="Aptos"/>
-              </a:defRPr>
-            </a:pPr>
-            <a:r>
-              <a:t>Disclosure ≠ trade</a:t>
-            </a:r>
-          </a:p>
-        </p:txBody>
-      </p:sp>
-      <p:sp>
-        <p:nvSpPr>
-          <p:cNvPr id="19" name="TextBox 18"/>
-          <p:cNvSpPr txBox="1"/>
-          <p:nvPr/>
-        </p:nvSpPr>
-        <p:spPr>
-          <a:xfrm>
-            <a:off x="8284464" y="3712463"/>
-            <a:ext cx="3108960" cy="1581912"/>
-          </a:xfrm>
-          <a:prstGeom prst="rect">
-            <a:avLst/>
-          </a:prstGeom>
-          <a:noFill/>
-        </p:spPr>
-        <p:txBody>
-          <a:bodyPr wrap="square" anchor="ctr" lIns="0" rIns="0" tIns="0" bIns="0">
-            <a:spAutoFit/>
-          </a:bodyPr>
-          <a:lstStyle/>
-          <a:p>
-            <a:pPr>
-              <a:defRPr sz="1400" b="0">
-                <a:solidFill>
-                  <a:srgbClr val="565E5C"/>
-                </a:solidFill>
-                <a:latin typeface="Aptos"/>
-              </a:defRPr>
-            </a:pPr>
-            <a:r>
-              <a:t>A portfolio report cannot reveal the order, execution date, or manager intent.</a:t>
-            </a:r>
-          </a:p>
-        </p:txBody>
-      </p:sp>
-      <p:sp>
-        <p:nvSpPr>
-          <p:cNvPr id="20" name="TextBox 19"/>
-          <p:cNvSpPr txBox="1"/>
-          <p:nvPr/>
-        </p:nvSpPr>
-        <p:spPr>
-          <a:xfrm>
-            <a:off x="566928" y="5760720"/>
-            <a:ext cx="10698480" cy="347472"/>
-          </a:xfrm>
-          <a:prstGeom prst="rect">
-            <a:avLst/>
-          </a:prstGeom>
-          <a:noFill/>
-        </p:spPr>
-        <p:txBody>
-          <a:bodyPr wrap="square" anchor="ctr" lIns="0" rIns="0" tIns="0" bIns="0">
-            <a:spAutoFit/>
-          </a:bodyPr>
-          <a:lstStyle/>
-          <a:p>
-            <a:pPr>
-              <a:defRPr sz="1200" b="0">
-                <a:solidFill>
-                  <a:srgbClr val="565E5C"/>
-                </a:solidFill>
-                <a:latin typeface="Aptos"/>
-              </a:defRPr>
-            </a:pPr>
-            <a:r>
-              <a:t>Riskora is a research prototype; user need and willingness to pay are still hypotheses.</a:t>
-            </a:r>
-          </a:p>
-        </p:txBody>
-      </p:sp>
-      <p:sp>
-        <p:nvSpPr>
-          <p:cNvPr id="21" name="TextBox 20"/>
-          <p:cNvSpPr txBox="1"/>
-          <p:nvPr/>
-        </p:nvSpPr>
-        <p:spPr>
-          <a:xfrm>
-            <a:off x="566928" y="6181344"/>
-            <a:ext cx="8229600" cy="256032"/>
-          </a:xfrm>
-          <a:prstGeom prst="rect">
-            <a:avLst/>
-          </a:prstGeom>
-          <a:noFill/>
-        </p:spPr>
-        <p:txBody>
-          <a:bodyPr wrap="square" lIns="0" rIns="0" tIns="0" bIns="0">
-            <a:spAutoFit/>
-          </a:bodyPr>
-          <a:lstStyle/>
-          <a:p>
-            <a:pPr>
-              <a:defRPr sz="1000" b="1">
-                <a:solidFill>
-                  <a:srgbClr val="215E4E"/>
-                </a:solidFill>
-                <a:latin typeface="Aptos"/>
-              </a:defRPr>
-            </a:pPr>
-            <a:r>
-              <a:t>ANSIL MUHAMMED N S  ·  MUHAMMED IHSAN K I</a:t>
+              <a:t>Ansil Muhammed N S  ·  Muhammed Ihsan K I</a:t>
             </a:r>
           </a:p>
         </p:txBody>
@@ -3875,7 +4544,7 @@
     <p:bg>
       <p:bgPr>
         <a:solidFill>
-          <a:srgbClr val="F8F8F6"/>
+          <a:srgbClr val="F7F9F7"/>
         </a:solidFill>
         <a:effectLst/>
       </p:bgPr>
@@ -3895,8 +4564,8 @@
         </p:nvSpPr>
         <p:spPr>
           <a:xfrm>
-            <a:off x="566928" y="338328"/>
-            <a:ext cx="5943600" cy="256032"/>
+            <a:off x="585216" y="228600"/>
+            <a:ext cx="7863840" cy="256032"/>
           </a:xfrm>
           <a:prstGeom prst="rect">
             <a:avLst/>
@@ -3904,7 +4573,7 @@
           <a:noFill/>
         </p:spPr>
         <p:txBody>
-          <a:bodyPr wrap="square" lIns="0" rIns="0" tIns="0" bIns="0">
+          <a:bodyPr wrap="square" lIns="0" rIns="0" tIns="0" bIns="0" anchor="ctr">
             <a:spAutoFit/>
           </a:bodyPr>
           <a:lstStyle/>
@@ -3912,13 +4581,13 @@
             <a:pPr>
               <a:defRPr sz="1000" b="1">
                 <a:solidFill>
-                  <a:srgbClr val="215E4E"/>
+                  <a:srgbClr val="13664E"/>
                 </a:solidFill>
                 <a:latin typeface="Aptos"/>
               </a:defRPr>
             </a:pPr>
             <a:r>
-              <a:t>RISKORA  /  AIBOOMI STARTUP WEEKEND</a:t>
+              <a:t>RISKORA  /  AIBOOMI STARTUP WEEKEND KOCHI</a:t>
             </a:r>
           </a:p>
         </p:txBody>
@@ -3931,8 +4600,8 @@
         </p:nvSpPr>
         <p:spPr>
           <a:xfrm>
-            <a:off x="9326880" y="338328"/>
-            <a:ext cx="2286000" cy="256032"/>
+            <a:off x="9326880" y="228600"/>
+            <a:ext cx="2258568" cy="256032"/>
           </a:xfrm>
           <a:prstGeom prst="rect">
             <a:avLst/>
@@ -3940,21 +4609,21 @@
           <a:noFill/>
         </p:spPr>
         <p:txBody>
-          <a:bodyPr wrap="square" lIns="0" rIns="0" tIns="0" bIns="0">
+          <a:bodyPr wrap="square" lIns="0" rIns="0" tIns="0" bIns="0" anchor="ctr">
             <a:spAutoFit/>
           </a:bodyPr>
           <a:lstStyle/>
           <a:p>
-            <a:pPr>
+            <a:pPr algn="r">
               <a:defRPr sz="1000" b="0">
                 <a:solidFill>
-                  <a:srgbClr val="565E5C"/>
+                  <a:srgbClr val="4E5C56"/>
                 </a:solidFill>
                 <a:latin typeface="Aptos"/>
               </a:defRPr>
             </a:pPr>
             <a:r>
-              <a:t>INSIGHT</a:t>
+              <a:t>PROBLEM AND INSIGHT</a:t>
             </a:r>
           </a:p>
         </p:txBody>
@@ -3967,14 +4636,14 @@
         </p:nvSpPr>
         <p:spPr>
           <a:xfrm>
-            <a:off x="566928" y="758952"/>
-            <a:ext cx="11045952" cy="10972"/>
+            <a:off x="585216" y="667512"/>
+            <a:ext cx="11018520" cy="14630"/>
           </a:xfrm>
           <a:prstGeom prst="rect">
             <a:avLst/>
           </a:prstGeom>
           <a:solidFill>
-            <a:srgbClr val="D8DCD8"/>
+            <a:srgbClr val="CDD8D1"/>
           </a:solidFill>
           <a:ln>
             <a:noFill/>
@@ -4010,8 +4679,8 @@
         </p:nvSpPr>
         <p:spPr>
           <a:xfrm>
-            <a:off x="566928" y="1024128"/>
-            <a:ext cx="10972800" cy="749808"/>
+            <a:off x="585216" y="896112"/>
+            <a:ext cx="10972800" cy="640080"/>
           </a:xfrm>
           <a:prstGeom prst="rect">
             <a:avLst/>
@@ -4019,7 +4688,7 @@
           <a:noFill/>
         </p:spPr>
         <p:txBody>
-          <a:bodyPr wrap="square" anchor="ctr" lIns="0" rIns="0" tIns="0" bIns="0">
+          <a:bodyPr wrap="square" lIns="0" rIns="0" tIns="0" bIns="0" anchor="ctr">
             <a:spAutoFit/>
           </a:bodyPr>
           <a:lstStyle/>
@@ -4027,13 +4696,13 @@
             <a:pPr>
               <a:defRPr sz="3000" b="1">
                 <a:solidFill>
-                  <a:srgbClr val="181B1B"/>
+                  <a:srgbClr val="18221F"/>
                 </a:solidFill>
                 <a:latin typeface="Aptos Display"/>
               </a:defRPr>
             </a:pPr>
             <a:r>
-              <a:t>A trustworthy ranking starts with what was knowable.</a:t>
+              <a:t>The hard part is knowing what is comparable.</a:t>
             </a:r>
           </a:p>
         </p:txBody>
@@ -4046,8 +4715,8 @@
         </p:nvSpPr>
         <p:spPr>
           <a:xfrm>
-            <a:off x="566928" y="1773936"/>
-            <a:ext cx="10927080" cy="411480"/>
+            <a:off x="585216" y="1600200"/>
+            <a:ext cx="10972800" cy="384048"/>
           </a:xfrm>
           <a:prstGeom prst="rect">
             <a:avLst/>
@@ -4055,84 +4724,44 @@
           <a:noFill/>
         </p:spPr>
         <p:txBody>
-          <a:bodyPr wrap="square" anchor="ctr" lIns="0" rIns="0" tIns="0" bIns="0">
+          <a:bodyPr wrap="square" lIns="0" rIns="0" tIns="0" bIns="0" anchor="ctr">
             <a:spAutoFit/>
           </a:bodyPr>
           <a:lstStyle/>
           <a:p>
             <a:pPr>
-              <a:defRPr sz="1500" b="0">
-                <a:solidFill>
-                  <a:srgbClr val="565E5C"/>
+              <a:defRPr sz="1400" b="0">
+                <a:solidFill>
+                  <a:srgbClr val="4E5C56"/>
                 </a:solidFill>
                 <a:latin typeface="Aptos"/>
               </a:defRPr>
             </a:pPr>
             <a:r>
-              <a:t>The key object is a comparable pair of published snapshots and a strict information cutoff.</a:t>
-            </a:r>
-          </a:p>
-        </p:txBody>
-      </p:sp>
-      <p:sp>
-        <p:nvSpPr>
-          <p:cNvPr id="7" name="TextBox 6"/>
-          <p:cNvSpPr txBox="1"/>
-          <p:nvPr/>
-        </p:nvSpPr>
-        <p:spPr>
-          <a:xfrm>
-            <a:off x="10991088" y="6464808"/>
-            <a:ext cx="658368" cy="256032"/>
-          </a:xfrm>
-          <a:prstGeom prst="rect">
-            <a:avLst/>
-          </a:prstGeom>
-          <a:noFill/>
-        </p:spPr>
-        <p:txBody>
-          <a:bodyPr wrap="square" lIns="0" rIns="0" tIns="0" bIns="0">
-            <a:spAutoFit/>
-          </a:bodyPr>
-          <a:lstStyle/>
-          <a:p>
-            <a:pPr>
-              <a:defRPr sz="900" b="0">
-                <a:solidFill>
-                  <a:srgbClr val="565E5C"/>
-                </a:solidFill>
-                <a:latin typeface="Aptos"/>
-              </a:defRPr>
-            </a:pPr>
-            <a:r>
-              <a:t>02 / 06</a:t>
-            </a:r>
-          </a:p>
-        </p:txBody>
-      </p:sp>
-      <p:sp>
-        <p:nvSpPr>
-          <p:cNvPr id="8" name="Rounded Rectangle 7"/>
+              <a:t>A missing row, an existing holding, and a late publication are different research cases.</a:t>
+            </a:r>
+          </a:p>
+        </p:txBody>
+      </p:sp>
+      <p:sp>
+        <p:nvSpPr>
+          <p:cNvPr id="7" name="Rectangle 6"/>
           <p:cNvSpPr/>
           <p:nvPr/>
         </p:nvSpPr>
         <p:spPr>
           <a:xfrm>
-            <a:off x="566928" y="2478024"/>
-            <a:ext cx="5230368" cy="3328416"/>
-          </a:xfrm>
-          <a:prstGeom prst="roundRect">
-            <a:avLst>
-              <a:gd name="adj" fmla="val 8000"/>
-            </a:avLst>
+            <a:off x="585216" y="6355080"/>
+            <a:ext cx="11018520" cy="14630"/>
+          </a:xfrm>
+          <a:prstGeom prst="rect">
+            <a:avLst/>
           </a:prstGeom>
           <a:solidFill>
-            <a:srgbClr val="E9F1EC"/>
+            <a:srgbClr val="CDD8D1"/>
           </a:solidFill>
-          <a:ln w="10160">
-            <a:solidFill>
-              <a:srgbClr val="D8DCD8"/>
-            </a:solidFill>
+          <a:ln>
+            <a:noFill/>
           </a:ln>
         </p:spPr>
         <p:style>
@@ -4159,14 +4788,14 @@
       </p:sp>
       <p:sp>
         <p:nvSpPr>
-          <p:cNvPr id="9" name="TextBox 8"/>
+          <p:cNvPr id="8" name="TextBox 7"/>
           <p:cNvSpPr txBox="1"/>
           <p:nvPr/>
         </p:nvSpPr>
         <p:spPr>
           <a:xfrm>
-            <a:off x="786384" y="2706624"/>
-            <a:ext cx="4791456" cy="256032"/>
+            <a:off x="10972800" y="6419088"/>
+            <a:ext cx="621792" cy="201168"/>
           </a:xfrm>
           <a:prstGeom prst="rect">
             <a:avLst/>
@@ -4174,111 +4803,39 @@
           <a:noFill/>
         </p:spPr>
         <p:txBody>
-          <a:bodyPr wrap="square" lIns="0" rIns="0" tIns="0" bIns="0">
+          <a:bodyPr wrap="square" lIns="0" rIns="0" tIns="0" bIns="0" anchor="ctr">
             <a:spAutoFit/>
           </a:bodyPr>
           <a:lstStyle/>
           <a:p>
-            <a:pPr>
-              <a:defRPr sz="1000" b="1">
-                <a:solidFill>
-                  <a:srgbClr val="215E4E"/>
+            <a:pPr algn="r">
+              <a:defRPr sz="900" b="0">
+                <a:solidFill>
+                  <a:srgbClr val="4E5C56"/>
                 </a:solidFill>
                 <a:latin typeface="Aptos"/>
               </a:defRPr>
             </a:pPr>
             <a:r>
-              <a:t>INSIGHT</a:t>
-            </a:r>
-          </a:p>
-        </p:txBody>
-      </p:sp>
-      <p:sp>
-        <p:nvSpPr>
-          <p:cNvPr id="10" name="TextBox 9"/>
-          <p:cNvSpPr txBox="1"/>
-          <p:nvPr/>
-        </p:nvSpPr>
-        <p:spPr>
-          <a:xfrm>
-            <a:off x="786384" y="3054096"/>
-            <a:ext cx="4791456" cy="566928"/>
-          </a:xfrm>
-          <a:prstGeom prst="rect">
-            <a:avLst/>
-          </a:prstGeom>
-          <a:noFill/>
-        </p:spPr>
-        <p:txBody>
-          <a:bodyPr wrap="square" anchor="ctr" lIns="0" rIns="0" tIns="0" bIns="0">
-            <a:spAutoFit/>
-          </a:bodyPr>
-          <a:lstStyle/>
-          <a:p>
-            <a:pPr>
-              <a:defRPr sz="1900" b="1">
-                <a:solidFill>
-                  <a:srgbClr val="181B1B"/>
-                </a:solidFill>
-                <a:latin typeface="Aptos"/>
-              </a:defRPr>
-            </a:pPr>
-            <a:r>
-              <a:t>Turn disclosures into testable labels</a:t>
-            </a:r>
-          </a:p>
-        </p:txBody>
-      </p:sp>
-      <p:sp>
-        <p:nvSpPr>
-          <p:cNvPr id="11" name="TextBox 10"/>
-          <p:cNvSpPr txBox="1"/>
-          <p:nvPr/>
-        </p:nvSpPr>
-        <p:spPr>
-          <a:xfrm>
-            <a:off x="786384" y="3666744"/>
-            <a:ext cx="4791456" cy="1965960"/>
-          </a:xfrm>
-          <a:prstGeom prst="rect">
-            <a:avLst/>
-          </a:prstGeom>
-          <a:noFill/>
-        </p:spPr>
-        <p:txBody>
-          <a:bodyPr wrap="square" anchor="ctr" lIns="0" rIns="0" tIns="0" bIns="0">
-            <a:spAutoFit/>
-          </a:bodyPr>
-          <a:lstStyle/>
-          <a:p>
-            <a:pPr>
-              <a:defRPr sz="1400" b="0">
-                <a:solidFill>
-                  <a:srgbClr val="565E5C"/>
-                </a:solidFill>
-                <a:latin typeface="Aptos"/>
-              </a:defRPr>
-            </a:pPr>
-            <a:r>
-              <a:t>Only complete, comparable statements can establish absence. Unknown cases stay unknown. Candidate signals must exist by the earlier publication cutoff.</a:t>
-            </a:r>
-          </a:p>
-        </p:txBody>
-      </p:sp>
-      <p:sp>
-        <p:nvSpPr>
-          <p:cNvPr id="12" name="Rounded Rectangle 11"/>
+              <a:t>02 / 06</a:t>
+            </a:r>
+          </a:p>
+        </p:txBody>
+      </p:sp>
+      <p:sp>
+        <p:nvSpPr>
+          <p:cNvPr id="9" name="Rounded Rectangle 8"/>
           <p:cNvSpPr/>
           <p:nvPr/>
         </p:nvSpPr>
         <p:spPr>
           <a:xfrm>
-            <a:off x="6007608" y="2478024"/>
-            <a:ext cx="5605272" cy="3328416"/>
+            <a:off x="585216" y="2267712"/>
+            <a:ext cx="6492240" cy="859536"/>
           </a:xfrm>
           <a:prstGeom prst="roundRect">
             <a:avLst>
-              <a:gd name="adj" fmla="val 8000"/>
+              <a:gd name="adj" fmla="val 6000"/>
             </a:avLst>
           </a:prstGeom>
           <a:solidFill>
@@ -4286,7 +4843,7 @@
           </a:solidFill>
           <a:ln w="10160">
             <a:solidFill>
-              <a:srgbClr val="D8DCD8"/>
+              <a:srgbClr val="CDD8D1"/>
             </a:solidFill>
           </a:ln>
         </p:spPr>
@@ -4314,14 +4871,131 @@
       </p:sp>
       <p:sp>
         <p:nvSpPr>
+          <p:cNvPr id="10" name="Rounded Rectangle 9"/>
+          <p:cNvSpPr/>
+          <p:nvPr/>
+        </p:nvSpPr>
+        <p:spPr>
+          <a:xfrm>
+            <a:off x="740664" y="2487168"/>
+            <a:ext cx="420624" cy="329184"/>
+          </a:xfrm>
+          <a:prstGeom prst="roundRect">
+            <a:avLst>
+              <a:gd name="adj" fmla="val 6000"/>
+            </a:avLst>
+          </a:prstGeom>
+          <a:solidFill>
+            <a:srgbClr val="E5F2EB"/>
+          </a:solidFill>
+          <a:ln>
+            <a:noFill/>
+          </a:ln>
+        </p:spPr>
+        <p:style>
+          <a:lnRef idx="1">
+            <a:schemeClr val="accent1"/>
+          </a:lnRef>
+          <a:fillRef idx="3">
+            <a:schemeClr val="accent1"/>
+          </a:fillRef>
+          <a:effectRef idx="2">
+            <a:schemeClr val="accent1"/>
+          </a:effectRef>
+          <a:fontRef idx="minor">
+            <a:schemeClr val="lt1"/>
+          </a:fontRef>
+        </p:style>
+        <p:txBody>
+          <a:bodyPr rtlCol="0" anchor="ctr"/>
+          <a:lstStyle/>
+          <a:p>
+            <a:pPr algn="ctr"/>
+          </a:p>
+        </p:txBody>
+      </p:sp>
+      <p:sp>
+        <p:nvSpPr>
+          <p:cNvPr id="11" name="TextBox 10"/>
+          <p:cNvSpPr txBox="1"/>
+          <p:nvPr/>
+        </p:nvSpPr>
+        <p:spPr>
+          <a:xfrm>
+            <a:off x="850392" y="2500884"/>
+            <a:ext cx="201168" cy="292608"/>
+          </a:xfrm>
+          <a:prstGeom prst="rect">
+            <a:avLst/>
+          </a:prstGeom>
+          <a:noFill/>
+        </p:spPr>
+        <p:txBody>
+          <a:bodyPr wrap="square" lIns="0" rIns="0" tIns="0" bIns="0" anchor="ctr">
+            <a:spAutoFit/>
+          </a:bodyPr>
+          <a:lstStyle/>
+          <a:p>
+            <a:pPr>
+              <a:defRPr sz="1000" b="1">
+                <a:solidFill>
+                  <a:srgbClr val="13664E"/>
+                </a:solidFill>
+                <a:latin typeface="Aptos"/>
+              </a:defRPr>
+            </a:pPr>
+            <a:r>
+              <a:t>01</a:t>
+            </a:r>
+          </a:p>
+        </p:txBody>
+      </p:sp>
+      <p:sp>
+        <p:nvSpPr>
+          <p:cNvPr id="12" name="TextBox 11"/>
+          <p:cNvSpPr txBox="1"/>
+          <p:nvPr/>
+        </p:nvSpPr>
+        <p:spPr>
+          <a:xfrm>
+            <a:off x="1298448" y="2414016"/>
+            <a:ext cx="5559552" cy="246888"/>
+          </a:xfrm>
+          <a:prstGeom prst="rect">
+            <a:avLst/>
+          </a:prstGeom>
+          <a:noFill/>
+        </p:spPr>
+        <p:txBody>
+          <a:bodyPr wrap="square" lIns="0" rIns="0" tIns="0" bIns="0" anchor="ctr">
+            <a:spAutoFit/>
+          </a:bodyPr>
+          <a:lstStyle/>
+          <a:p>
+            <a:pPr>
+              <a:defRPr sz="1500" b="1">
+                <a:solidFill>
+                  <a:srgbClr val="18221F"/>
+                </a:solidFill>
+                <a:latin typeface="Aptos"/>
+              </a:defRPr>
+            </a:pPr>
+            <a:r>
+              <a:t>Reports arrive after the fact</a:t>
+            </a:r>
+          </a:p>
+        </p:txBody>
+      </p:sp>
+      <p:sp>
+        <p:nvSpPr>
           <p:cNvPr id="13" name="TextBox 12"/>
           <p:cNvSpPr txBox="1"/>
           <p:nvPr/>
         </p:nvSpPr>
         <p:spPr>
           <a:xfrm>
-            <a:off x="6227064" y="2706624"/>
-            <a:ext cx="5166360" cy="256032"/>
+            <a:off x="1298448" y="2706624"/>
+            <a:ext cx="5559552" cy="283464"/>
           </a:xfrm>
           <a:prstGeom prst="rect">
             <a:avLst/>
@@ -4329,35 +5003,127 @@
           <a:noFill/>
         </p:spPr>
         <p:txBody>
-          <a:bodyPr wrap="square" lIns="0" rIns="0" tIns="0" bIns="0">
+          <a:bodyPr wrap="square" lIns="0" rIns="0" tIns="0" bIns="0" anchor="ctr">
             <a:spAutoFit/>
           </a:bodyPr>
           <a:lstStyle/>
           <a:p>
             <a:pPr>
-              <a:defRPr sz="1000" b="1">
-                <a:solidFill>
-                  <a:srgbClr val="215E4E"/>
+              <a:defRPr sz="1100" b="0">
+                <a:solidFill>
+                  <a:srgbClr val="4E5C56"/>
                 </a:solidFill>
                 <a:latin typeface="Aptos"/>
               </a:defRPr>
             </a:pPr>
             <a:r>
-              <a:t>WHY THIS APPROACH</a:t>
-            </a:r>
-          </a:p>
-        </p:txBody>
-      </p:sp>
-      <p:sp>
-        <p:nvSpPr>
-          <p:cNvPr id="14" name="TextBox 13"/>
+              <a:t>Report date and first public availability are different dates.</a:t>
+            </a:r>
+          </a:p>
+        </p:txBody>
+      </p:sp>
+      <p:sp>
+        <p:nvSpPr>
+          <p:cNvPr id="14" name="Rounded Rectangle 13"/>
+          <p:cNvSpPr/>
+          <p:nvPr/>
+        </p:nvSpPr>
+        <p:spPr>
+          <a:xfrm>
+            <a:off x="585216" y="3264408"/>
+            <a:ext cx="6492240" cy="859536"/>
+          </a:xfrm>
+          <a:prstGeom prst="roundRect">
+            <a:avLst>
+              <a:gd name="adj" fmla="val 6000"/>
+            </a:avLst>
+          </a:prstGeom>
+          <a:solidFill>
+            <a:srgbClr val="FFFFFF"/>
+          </a:solidFill>
+          <a:ln w="10160">
+            <a:solidFill>
+              <a:srgbClr val="CDD8D1"/>
+            </a:solidFill>
+          </a:ln>
+        </p:spPr>
+        <p:style>
+          <a:lnRef idx="1">
+            <a:schemeClr val="accent1"/>
+          </a:lnRef>
+          <a:fillRef idx="3">
+            <a:schemeClr val="accent1"/>
+          </a:fillRef>
+          <a:effectRef idx="2">
+            <a:schemeClr val="accent1"/>
+          </a:effectRef>
+          <a:fontRef idx="minor">
+            <a:schemeClr val="lt1"/>
+          </a:fontRef>
+        </p:style>
+        <p:txBody>
+          <a:bodyPr rtlCol="0" anchor="ctr"/>
+          <a:lstStyle/>
+          <a:p>
+            <a:pPr algn="ctr"/>
+          </a:p>
+        </p:txBody>
+      </p:sp>
+      <p:sp>
+        <p:nvSpPr>
+          <p:cNvPr id="15" name="Rounded Rectangle 14"/>
+          <p:cNvSpPr/>
+          <p:nvPr/>
+        </p:nvSpPr>
+        <p:spPr>
+          <a:xfrm>
+            <a:off x="740664" y="3483863"/>
+            <a:ext cx="420624" cy="329184"/>
+          </a:xfrm>
+          <a:prstGeom prst="roundRect">
+            <a:avLst>
+              <a:gd name="adj" fmla="val 6000"/>
+            </a:avLst>
+          </a:prstGeom>
+          <a:solidFill>
+            <a:srgbClr val="E5F2EB"/>
+          </a:solidFill>
+          <a:ln>
+            <a:noFill/>
+          </a:ln>
+        </p:spPr>
+        <p:style>
+          <a:lnRef idx="1">
+            <a:schemeClr val="accent1"/>
+          </a:lnRef>
+          <a:fillRef idx="3">
+            <a:schemeClr val="accent1"/>
+          </a:fillRef>
+          <a:effectRef idx="2">
+            <a:schemeClr val="accent1"/>
+          </a:effectRef>
+          <a:fontRef idx="minor">
+            <a:schemeClr val="lt1"/>
+          </a:fontRef>
+        </p:style>
+        <p:txBody>
+          <a:bodyPr rtlCol="0" anchor="ctr"/>
+          <a:lstStyle/>
+          <a:p>
+            <a:pPr algn="ctr"/>
+          </a:p>
+        </p:txBody>
+      </p:sp>
+      <p:sp>
+        <p:nvSpPr>
+          <p:cNvPr id="16" name="TextBox 15"/>
           <p:cNvSpPr txBox="1"/>
           <p:nvPr/>
         </p:nvSpPr>
         <p:spPr>
           <a:xfrm>
-            <a:off x="6227064" y="3054096"/>
-            <a:ext cx="5166360" cy="566928"/>
+            <a:off x="850392" y="3497579"/>
+            <a:ext cx="201168" cy="292608"/>
           </a:xfrm>
           <a:prstGeom prst="rect">
             <a:avLst/>
@@ -4365,35 +5131,35 @@
           <a:noFill/>
         </p:spPr>
         <p:txBody>
-          <a:bodyPr wrap="square" anchor="ctr" lIns="0" rIns="0" tIns="0" bIns="0">
+          <a:bodyPr wrap="square" lIns="0" rIns="0" tIns="0" bIns="0" anchor="ctr">
             <a:spAutoFit/>
           </a:bodyPr>
           <a:lstStyle/>
           <a:p>
             <a:pPr>
-              <a:defRPr sz="1900" b="1">
-                <a:solidFill>
-                  <a:srgbClr val="181B1B"/>
+              <a:defRPr sz="1000" b="1">
+                <a:solidFill>
+                  <a:srgbClr val="13664E"/>
                 </a:solidFill>
                 <a:latin typeface="Aptos"/>
               </a:defRPr>
             </a:pPr>
             <a:r>
-              <a:t>Auditable over opaque</a:t>
-            </a:r>
-          </a:p>
-        </p:txBody>
-      </p:sp>
-      <p:sp>
-        <p:nvSpPr>
-          <p:cNvPr id="15" name="TextBox 14"/>
+              <a:t>02</a:t>
+            </a:r>
+          </a:p>
+        </p:txBody>
+      </p:sp>
+      <p:sp>
+        <p:nvSpPr>
+          <p:cNvPr id="17" name="TextBox 16"/>
           <p:cNvSpPr txBox="1"/>
           <p:nvPr/>
         </p:nvSpPr>
         <p:spPr>
           <a:xfrm>
-            <a:off x="6227064" y="3666744"/>
-            <a:ext cx="5166360" cy="1965960"/>
+            <a:off x="1298448" y="3410712"/>
+            <a:ext cx="5559552" cy="246888"/>
           </a:xfrm>
           <a:prstGeom prst="rect">
             <a:avLst/>
@@ -4401,35 +5167,35 @@
           <a:noFill/>
         </p:spPr>
         <p:txBody>
-          <a:bodyPr wrap="square" anchor="ctr" lIns="0" rIns="0" tIns="0" bIns="0">
+          <a:bodyPr wrap="square" lIns="0" rIns="0" tIns="0" bIns="0" anchor="ctr">
             <a:spAutoFit/>
           </a:bodyPr>
           <a:lstStyle/>
           <a:p>
             <a:pPr>
-              <a:defRPr sz="1400" b="0">
-                <a:solidFill>
-                  <a:srgbClr val="565E5C"/>
+              <a:defRPr sz="1500" b="1">
+                <a:solidFill>
+                  <a:srgbClr val="18221F"/>
                 </a:solidFill>
                 <a:latin typeface="Aptos"/>
               </a:defRPr>
             </a:pPr>
             <a:r>
-              <a:t>The app links a ranked candidate to dated holdings and market inputs, then shows later-period evaluation against simpler baselines.</a:t>
-            </a:r>
-          </a:p>
-        </p:txBody>
-      </p:sp>
-      <p:sp>
-        <p:nvSpPr>
-          <p:cNvPr id="16" name="TextBox 15"/>
+              <a:t>Absence can be misleading</a:t>
+            </a:r>
+          </a:p>
+        </p:txBody>
+      </p:sp>
+      <p:sp>
+        <p:nvSpPr>
+          <p:cNvPr id="18" name="TextBox 17"/>
           <p:cNvSpPr txBox="1"/>
           <p:nvPr/>
         </p:nvSpPr>
         <p:spPr>
           <a:xfrm>
-            <a:off x="566928" y="6035040"/>
-            <a:ext cx="10972800" cy="274320"/>
+            <a:off x="1298448" y="3703320"/>
+            <a:ext cx="5559552" cy="283464"/>
           </a:xfrm>
           <a:prstGeom prst="rect">
             <a:avLst/>
@@ -4437,7 +5203,7 @@
           <a:noFill/>
         </p:spPr>
         <p:txBody>
-          <a:bodyPr wrap="square" anchor="ctr" lIns="0" rIns="0" tIns="0" bIns="0">
+          <a:bodyPr wrap="square" lIns="0" rIns="0" tIns="0" bIns="0" anchor="ctr">
             <a:spAutoFit/>
           </a:bodyPr>
           <a:lstStyle/>
@@ -4445,13 +5211,451 @@
             <a:pPr>
               <a:defRPr sz="1100" b="0">
                 <a:solidFill>
-                  <a:srgbClr val="565E5C"/>
+                  <a:srgbClr val="4E5C56"/>
                 </a:solidFill>
                 <a:latin typeface="Aptos"/>
               </a:defRPr>
             </a:pPr>
             <a:r>
-              <a:t>Public disclosure routes exist; this prototype still requires user-normalized imports. No automatic historical feed is verified.</a:t>
+              <a:t>Only a full comparable statement can establish a verified negative.</a:t>
+            </a:r>
+          </a:p>
+        </p:txBody>
+      </p:sp>
+      <p:sp>
+        <p:nvSpPr>
+          <p:cNvPr id="19" name="Rounded Rectangle 18"/>
+          <p:cNvSpPr/>
+          <p:nvPr/>
+        </p:nvSpPr>
+        <p:spPr>
+          <a:xfrm>
+            <a:off x="585216" y="4261104"/>
+            <a:ext cx="6492240" cy="859536"/>
+          </a:xfrm>
+          <a:prstGeom prst="roundRect">
+            <a:avLst>
+              <a:gd name="adj" fmla="val 6000"/>
+            </a:avLst>
+          </a:prstGeom>
+          <a:solidFill>
+            <a:srgbClr val="FFFFFF"/>
+          </a:solidFill>
+          <a:ln w="10160">
+            <a:solidFill>
+              <a:srgbClr val="CDD8D1"/>
+            </a:solidFill>
+          </a:ln>
+        </p:spPr>
+        <p:style>
+          <a:lnRef idx="1">
+            <a:schemeClr val="accent1"/>
+          </a:lnRef>
+          <a:fillRef idx="3">
+            <a:schemeClr val="accent1"/>
+          </a:fillRef>
+          <a:effectRef idx="2">
+            <a:schemeClr val="accent1"/>
+          </a:effectRef>
+          <a:fontRef idx="minor">
+            <a:schemeClr val="lt1"/>
+          </a:fontRef>
+        </p:style>
+        <p:txBody>
+          <a:bodyPr rtlCol="0" anchor="ctr"/>
+          <a:lstStyle/>
+          <a:p>
+            <a:pPr algn="ctr"/>
+          </a:p>
+        </p:txBody>
+      </p:sp>
+      <p:sp>
+        <p:nvSpPr>
+          <p:cNvPr id="20" name="Rounded Rectangle 19"/>
+          <p:cNvSpPr/>
+          <p:nvPr/>
+        </p:nvSpPr>
+        <p:spPr>
+          <a:xfrm>
+            <a:off x="740664" y="4480560"/>
+            <a:ext cx="420624" cy="329184"/>
+          </a:xfrm>
+          <a:prstGeom prst="roundRect">
+            <a:avLst>
+              <a:gd name="adj" fmla="val 6000"/>
+            </a:avLst>
+          </a:prstGeom>
+          <a:solidFill>
+            <a:srgbClr val="E5F2EB"/>
+          </a:solidFill>
+          <a:ln>
+            <a:noFill/>
+          </a:ln>
+        </p:spPr>
+        <p:style>
+          <a:lnRef idx="1">
+            <a:schemeClr val="accent1"/>
+          </a:lnRef>
+          <a:fillRef idx="3">
+            <a:schemeClr val="accent1"/>
+          </a:fillRef>
+          <a:effectRef idx="2">
+            <a:schemeClr val="accent1"/>
+          </a:effectRef>
+          <a:fontRef idx="minor">
+            <a:schemeClr val="lt1"/>
+          </a:fontRef>
+        </p:style>
+        <p:txBody>
+          <a:bodyPr rtlCol="0" anchor="ctr"/>
+          <a:lstStyle/>
+          <a:p>
+            <a:pPr algn="ctr"/>
+          </a:p>
+        </p:txBody>
+      </p:sp>
+      <p:sp>
+        <p:nvSpPr>
+          <p:cNvPr id="21" name="TextBox 20"/>
+          <p:cNvSpPr txBox="1"/>
+          <p:nvPr/>
+        </p:nvSpPr>
+        <p:spPr>
+          <a:xfrm>
+            <a:off x="850392" y="4494276"/>
+            <a:ext cx="201168" cy="292608"/>
+          </a:xfrm>
+          <a:prstGeom prst="rect">
+            <a:avLst/>
+          </a:prstGeom>
+          <a:noFill/>
+        </p:spPr>
+        <p:txBody>
+          <a:bodyPr wrap="square" lIns="0" rIns="0" tIns="0" bIns="0" anchor="ctr">
+            <a:spAutoFit/>
+          </a:bodyPr>
+          <a:lstStyle/>
+          <a:p>
+            <a:pPr>
+              <a:defRPr sz="1000" b="1">
+                <a:solidFill>
+                  <a:srgbClr val="13664E"/>
+                </a:solidFill>
+                <a:latin typeface="Aptos"/>
+              </a:defRPr>
+            </a:pPr>
+            <a:r>
+              <a:t>03</a:t>
+            </a:r>
+          </a:p>
+        </p:txBody>
+      </p:sp>
+      <p:sp>
+        <p:nvSpPr>
+          <p:cNvPr id="22" name="TextBox 21"/>
+          <p:cNvSpPr txBox="1"/>
+          <p:nvPr/>
+        </p:nvSpPr>
+        <p:spPr>
+          <a:xfrm>
+            <a:off x="1298448" y="4407408"/>
+            <a:ext cx="5559552" cy="246888"/>
+          </a:xfrm>
+          <a:prstGeom prst="rect">
+            <a:avLst/>
+          </a:prstGeom>
+          <a:noFill/>
+        </p:spPr>
+        <p:txBody>
+          <a:bodyPr wrap="square" lIns="0" rIns="0" tIns="0" bIns="0" anchor="ctr">
+            <a:spAutoFit/>
+          </a:bodyPr>
+          <a:lstStyle/>
+          <a:p>
+            <a:pPr>
+              <a:defRPr sz="1500" b="1">
+                <a:solidFill>
+                  <a:srgbClr val="18221F"/>
+                </a:solidFill>
+                <a:latin typeface="Aptos"/>
+              </a:defRPr>
+            </a:pPr>
+            <a:r>
+              <a:t>Manual review is hard to audit</a:t>
+            </a:r>
+          </a:p>
+        </p:txBody>
+      </p:sp>
+      <p:sp>
+        <p:nvSpPr>
+          <p:cNvPr id="23" name="TextBox 22"/>
+          <p:cNvSpPr txBox="1"/>
+          <p:nvPr/>
+        </p:nvSpPr>
+        <p:spPr>
+          <a:xfrm>
+            <a:off x="1298448" y="4700016"/>
+            <a:ext cx="5559552" cy="283464"/>
+          </a:xfrm>
+          <a:prstGeom prst="rect">
+            <a:avLst/>
+          </a:prstGeom>
+          <a:noFill/>
+        </p:spPr>
+        <p:txBody>
+          <a:bodyPr wrap="square" lIns="0" rIns="0" tIns="0" bIns="0" anchor="ctr">
+            <a:spAutoFit/>
+          </a:bodyPr>
+          <a:lstStyle/>
+          <a:p>
+            <a:pPr>
+              <a:defRPr sz="1100" b="0">
+                <a:solidFill>
+                  <a:srgbClr val="4E5C56"/>
+                </a:solidFill>
+                <a:latin typeface="Aptos"/>
+              </a:defRPr>
+            </a:pPr>
+            <a:r>
+              <a:t>A shortlist needs a visible cutoff, sources, and later-period checks.</a:t>
+            </a:r>
+          </a:p>
+        </p:txBody>
+      </p:sp>
+      <p:sp>
+        <p:nvSpPr>
+          <p:cNvPr id="24" name="Rounded Rectangle 23"/>
+          <p:cNvSpPr/>
+          <p:nvPr/>
+        </p:nvSpPr>
+        <p:spPr>
+          <a:xfrm>
+            <a:off x="7351775" y="2267712"/>
+            <a:ext cx="4242816" cy="2862072"/>
+          </a:xfrm>
+          <a:prstGeom prst="roundRect">
+            <a:avLst>
+              <a:gd name="adj" fmla="val 6000"/>
+            </a:avLst>
+          </a:prstGeom>
+          <a:solidFill>
+            <a:srgbClr val="13664E"/>
+          </a:solidFill>
+          <a:ln>
+            <a:noFill/>
+          </a:ln>
+        </p:spPr>
+        <p:style>
+          <a:lnRef idx="1">
+            <a:schemeClr val="accent1"/>
+          </a:lnRef>
+          <a:fillRef idx="3">
+            <a:schemeClr val="accent1"/>
+          </a:fillRef>
+          <a:effectRef idx="2">
+            <a:schemeClr val="accent1"/>
+          </a:effectRef>
+          <a:fontRef idx="minor">
+            <a:schemeClr val="lt1"/>
+          </a:fontRef>
+        </p:style>
+        <p:txBody>
+          <a:bodyPr rtlCol="0" anchor="ctr"/>
+          <a:lstStyle/>
+          <a:p>
+            <a:pPr algn="ctr"/>
+          </a:p>
+        </p:txBody>
+      </p:sp>
+      <p:sp>
+        <p:nvSpPr>
+          <p:cNvPr id="25" name="TextBox 24"/>
+          <p:cNvSpPr txBox="1"/>
+          <p:nvPr/>
+        </p:nvSpPr>
+        <p:spPr>
+          <a:xfrm>
+            <a:off x="7607808" y="2551176"/>
+            <a:ext cx="3611880" cy="237744"/>
+          </a:xfrm>
+          <a:prstGeom prst="rect">
+            <a:avLst/>
+          </a:prstGeom>
+          <a:noFill/>
+        </p:spPr>
+        <p:txBody>
+          <a:bodyPr wrap="square" lIns="0" rIns="0" tIns="0" bIns="0" anchor="ctr">
+            <a:spAutoFit/>
+          </a:bodyPr>
+          <a:lstStyle/>
+          <a:p>
+            <a:pPr>
+              <a:defRPr sz="1000" b="1">
+                <a:solidFill>
+                  <a:srgbClr val="E5F2EB"/>
+                </a:solidFill>
+                <a:latin typeface="Aptos"/>
+              </a:defRPr>
+            </a:pPr>
+            <a:r>
+              <a:t>THE RISKORA RULE</a:t>
+            </a:r>
+          </a:p>
+        </p:txBody>
+      </p:sp>
+      <p:sp>
+        <p:nvSpPr>
+          <p:cNvPr id="26" name="TextBox 25"/>
+          <p:cNvSpPr txBox="1"/>
+          <p:nvPr/>
+        </p:nvSpPr>
+        <p:spPr>
+          <a:xfrm>
+            <a:off x="7607808" y="2926080"/>
+            <a:ext cx="3611880" cy="877824"/>
+          </a:xfrm>
+          <a:prstGeom prst="rect">
+            <a:avLst/>
+          </a:prstGeom>
+          <a:noFill/>
+        </p:spPr>
+        <p:txBody>
+          <a:bodyPr wrap="square" lIns="0" rIns="0" tIns="0" bIns="0" anchor="ctr">
+            <a:spAutoFit/>
+          </a:bodyPr>
+          <a:lstStyle/>
+          <a:p>
+            <a:pPr>
+              <a:defRPr sz="2800" b="1">
+                <a:solidFill>
+                  <a:srgbClr val="FFFFFF"/>
+                </a:solidFill>
+                <a:latin typeface="Aptos Display"/>
+              </a:defRPr>
+            </a:pPr>
+            <a:r>
+              <a:t>Unknown stays</a:t>
+            </a:r>
+            <a:br/>
+            <a:r>
+              <a:t>unknown.</a:t>
+            </a:r>
+          </a:p>
+        </p:txBody>
+      </p:sp>
+      <p:sp>
+        <p:nvSpPr>
+          <p:cNvPr id="27" name="TextBox 26"/>
+          <p:cNvSpPr txBox="1"/>
+          <p:nvPr/>
+        </p:nvSpPr>
+        <p:spPr>
+          <a:xfrm>
+            <a:off x="7607808" y="3977639"/>
+            <a:ext cx="3639312" cy="804672"/>
+          </a:xfrm>
+          <a:prstGeom prst="rect">
+            <a:avLst/>
+          </a:prstGeom>
+          <a:noFill/>
+        </p:spPr>
+        <p:txBody>
+          <a:bodyPr wrap="square" lIns="0" rIns="0" tIns="0" bIns="0" anchor="ctr">
+            <a:spAutoFit/>
+          </a:bodyPr>
+          <a:lstStyle/>
+          <a:p>
+            <a:pPr>
+              <a:defRPr sz="1300" b="0">
+                <a:solidFill>
+                  <a:srgbClr val="FFFFFF"/>
+                </a:solidFill>
+                <a:latin typeface="Aptos"/>
+              </a:defRPr>
+            </a:pPr>
+            <a:r>
+              <a:t>Candidate inputs and labels must have been available by their cutoff. A disclosure is a position, not proof of a trade.</a:t>
+            </a:r>
+          </a:p>
+        </p:txBody>
+      </p:sp>
+      <p:sp>
+        <p:nvSpPr>
+          <p:cNvPr id="28" name="Rounded Rectangle 27"/>
+          <p:cNvSpPr/>
+          <p:nvPr/>
+        </p:nvSpPr>
+        <p:spPr>
+          <a:xfrm>
+            <a:off x="585216" y="5431536"/>
+            <a:ext cx="11009376" cy="539496"/>
+          </a:xfrm>
+          <a:prstGeom prst="roundRect">
+            <a:avLst>
+              <a:gd name="adj" fmla="val 6000"/>
+            </a:avLst>
+          </a:prstGeom>
+          <a:solidFill>
+            <a:srgbClr val="F1F5F1"/>
+          </a:solidFill>
+          <a:ln>
+            <a:noFill/>
+          </a:ln>
+        </p:spPr>
+        <p:style>
+          <a:lnRef idx="1">
+            <a:schemeClr val="accent1"/>
+          </a:lnRef>
+          <a:fillRef idx="3">
+            <a:schemeClr val="accent1"/>
+          </a:fillRef>
+          <a:effectRef idx="2">
+            <a:schemeClr val="accent1"/>
+          </a:effectRef>
+          <a:fontRef idx="minor">
+            <a:schemeClr val="lt1"/>
+          </a:fontRef>
+        </p:style>
+        <p:txBody>
+          <a:bodyPr rtlCol="0" anchor="ctr"/>
+          <a:lstStyle/>
+          <a:p>
+            <a:pPr algn="ctr"/>
+          </a:p>
+        </p:txBody>
+      </p:sp>
+      <p:sp>
+        <p:nvSpPr>
+          <p:cNvPr id="29" name="TextBox 28"/>
+          <p:cNvSpPr txBox="1"/>
+          <p:nvPr/>
+        </p:nvSpPr>
+        <p:spPr>
+          <a:xfrm>
+            <a:off x="832104" y="5568696"/>
+            <a:ext cx="10497312" cy="265176"/>
+          </a:xfrm>
+          <a:prstGeom prst="rect">
+            <a:avLst/>
+          </a:prstGeom>
+          <a:noFill/>
+        </p:spPr>
+        <p:txBody>
+          <a:bodyPr wrap="square" lIns="0" rIns="0" tIns="0" bIns="0" anchor="ctr">
+            <a:spAutoFit/>
+          </a:bodyPr>
+          <a:lstStyle/>
+          <a:p>
+            <a:pPr>
+              <a:defRPr sz="1300" b="0">
+                <a:solidFill>
+                  <a:srgbClr val="18221F"/>
+                </a:solidFill>
+                <a:latin typeface="Aptos"/>
+              </a:defRPr>
+            </a:pPr>
+            <a:r>
+              <a:t>Initial user: fund research analysts and small desks comparing dated Indian equity mutual-fund holdings.</a:t>
             </a:r>
           </a:p>
         </p:txBody>
@@ -4470,7 +5674,7 @@
     <p:bg>
       <p:bgPr>
         <a:solidFill>
-          <a:srgbClr val="F8F8F6"/>
+          <a:srgbClr val="F7F9F7"/>
         </a:solidFill>
         <a:effectLst/>
       </p:bgPr>
@@ -4490,8 +5694,8 @@
         </p:nvSpPr>
         <p:spPr>
           <a:xfrm>
-            <a:off x="566928" y="338328"/>
-            <a:ext cx="5943600" cy="256032"/>
+            <a:off x="585216" y="228600"/>
+            <a:ext cx="7863840" cy="256032"/>
           </a:xfrm>
           <a:prstGeom prst="rect">
             <a:avLst/>
@@ -4499,7 +5703,7 @@
           <a:noFill/>
         </p:spPr>
         <p:txBody>
-          <a:bodyPr wrap="square" lIns="0" rIns="0" tIns="0" bIns="0">
+          <a:bodyPr wrap="square" lIns="0" rIns="0" tIns="0" bIns="0" anchor="ctr">
             <a:spAutoFit/>
           </a:bodyPr>
           <a:lstStyle/>
@@ -4507,13 +5711,13 @@
             <a:pPr>
               <a:defRPr sz="1000" b="1">
                 <a:solidFill>
-                  <a:srgbClr val="215E4E"/>
+                  <a:srgbClr val="13664E"/>
                 </a:solidFill>
                 <a:latin typeface="Aptos"/>
               </a:defRPr>
             </a:pPr>
             <a:r>
-              <a:t>RISKORA  /  AIBOOMI STARTUP WEEKEND</a:t>
+              <a:t>RISKORA  /  AIBOOMI STARTUP WEEKEND KOCHI</a:t>
             </a:r>
           </a:p>
         </p:txBody>
@@ -4526,8 +5730,8 @@
         </p:nvSpPr>
         <p:spPr>
           <a:xfrm>
-            <a:off x="9326880" y="338328"/>
-            <a:ext cx="2286000" cy="256032"/>
+            <a:off x="9326880" y="228600"/>
+            <a:ext cx="2258568" cy="256032"/>
           </a:xfrm>
           <a:prstGeom prst="rect">
             <a:avLst/>
@@ -4535,21 +5739,21 @@
           <a:noFill/>
         </p:spPr>
         <p:txBody>
-          <a:bodyPr wrap="square" lIns="0" rIns="0" tIns="0" bIns="0">
+          <a:bodyPr wrap="square" lIns="0" rIns="0" tIns="0" bIns="0" anchor="ctr">
             <a:spAutoFit/>
           </a:bodyPr>
           <a:lstStyle/>
           <a:p>
-            <a:pPr>
+            <a:pPr algn="r">
               <a:defRPr sz="1000" b="0">
                 <a:solidFill>
-                  <a:srgbClr val="565E5C"/>
+                  <a:srgbClr val="4E5C56"/>
                 </a:solidFill>
                 <a:latin typeface="Aptos"/>
               </a:defRPr>
             </a:pPr>
             <a:r>
-              <a:t>SOLUTION DEMO</a:t>
+              <a:t>PRODUCT DEMONSTRATION</a:t>
             </a:r>
           </a:p>
         </p:txBody>
@@ -4562,14 +5766,14 @@
         </p:nvSpPr>
         <p:spPr>
           <a:xfrm>
-            <a:off x="566928" y="758952"/>
-            <a:ext cx="11045952" cy="10972"/>
+            <a:off x="585216" y="667512"/>
+            <a:ext cx="11018520" cy="14630"/>
           </a:xfrm>
           <a:prstGeom prst="rect">
             <a:avLst/>
           </a:prstGeom>
           <a:solidFill>
-            <a:srgbClr val="D8DCD8"/>
+            <a:srgbClr val="CDD8D1"/>
           </a:solidFill>
           <a:ln>
             <a:noFill/>
@@ -4605,8 +5809,8 @@
         </p:nvSpPr>
         <p:spPr>
           <a:xfrm>
-            <a:off x="566928" y="1024128"/>
-            <a:ext cx="10972800" cy="749808"/>
+            <a:off x="585216" y="896112"/>
+            <a:ext cx="10972800" cy="640080"/>
           </a:xfrm>
           <a:prstGeom prst="rect">
             <a:avLst/>
@@ -4614,7 +5818,7 @@
           <a:noFill/>
         </p:spPr>
         <p:txBody>
-          <a:bodyPr wrap="square" anchor="ctr" lIns="0" rIns="0" tIns="0" bIns="0">
+          <a:bodyPr wrap="square" lIns="0" rIns="0" tIns="0" bIns="0" anchor="ctr">
             <a:spAutoFit/>
           </a:bodyPr>
           <a:lstStyle/>
@@ -4622,13 +5826,13 @@
             <a:pPr>
               <a:defRPr sz="3000" b="1">
                 <a:solidFill>
-                  <a:srgbClr val="181B1B"/>
+                  <a:srgbClr val="18221F"/>
                 </a:solidFill>
                 <a:latin typeface="Aptos Display"/>
               </a:defRPr>
             </a:pPr>
             <a:r>
-              <a:t>Four steps from statement to shortlist.</a:t>
+              <a:t>A working loop from data to candidate evidence.</a:t>
             </a:r>
           </a:p>
         </p:txBody>
@@ -4641,8 +5845,8 @@
         </p:nvSpPr>
         <p:spPr>
           <a:xfrm>
-            <a:off x="566928" y="1773936"/>
-            <a:ext cx="10927080" cy="411480"/>
+            <a:off x="585216" y="1600200"/>
+            <a:ext cx="10972800" cy="384048"/>
           </a:xfrm>
           <a:prstGeom prst="rect">
             <a:avLst/>
@@ -4650,35 +5854,78 @@
           <a:noFill/>
         </p:spPr>
         <p:txBody>
-          <a:bodyPr wrap="square" anchor="ctr" lIns="0" rIns="0" tIns="0" bIns="0">
+          <a:bodyPr wrap="square" lIns="0" rIns="0" tIns="0" bIns="0" anchor="ctr">
             <a:spAutoFit/>
           </a:bodyPr>
           <a:lstStyle/>
           <a:p>
             <a:pPr>
-              <a:defRPr sz="1500" b="0">
-                <a:solidFill>
-                  <a:srgbClr val="565E5C"/>
+              <a:defRPr sz="1400" b="0">
+                <a:solidFill>
+                  <a:srgbClr val="4E5C56"/>
                 </a:solidFill>
                 <a:latin typeface="Aptos"/>
               </a:defRPr>
             </a:pPr>
             <a:r>
-              <a:t>Show the actual application live. This slide is a flow schematic, not a product screenshot.</a:t>
-            </a:r>
-          </a:p>
-        </p:txBody>
-      </p:sp>
-      <p:sp>
-        <p:nvSpPr>
-          <p:cNvPr id="7" name="TextBox 6"/>
+              <a:t>The live app lets a researcher inspect disclosures, evaluate a model, rank, and open the inputs.</a:t>
+            </a:r>
+          </a:p>
+        </p:txBody>
+      </p:sp>
+      <p:sp>
+        <p:nvSpPr>
+          <p:cNvPr id="7" name="Rectangle 6"/>
+          <p:cNvSpPr/>
+          <p:nvPr/>
+        </p:nvSpPr>
+        <p:spPr>
+          <a:xfrm>
+            <a:off x="585216" y="6355080"/>
+            <a:ext cx="11018520" cy="14630"/>
+          </a:xfrm>
+          <a:prstGeom prst="rect">
+            <a:avLst/>
+          </a:prstGeom>
+          <a:solidFill>
+            <a:srgbClr val="CDD8D1"/>
+          </a:solidFill>
+          <a:ln>
+            <a:noFill/>
+          </a:ln>
+        </p:spPr>
+        <p:style>
+          <a:lnRef idx="1">
+            <a:schemeClr val="accent1"/>
+          </a:lnRef>
+          <a:fillRef idx="3">
+            <a:schemeClr val="accent1"/>
+          </a:fillRef>
+          <a:effectRef idx="2">
+            <a:schemeClr val="accent1"/>
+          </a:effectRef>
+          <a:fontRef idx="minor">
+            <a:schemeClr val="lt1"/>
+          </a:fontRef>
+        </p:style>
+        <p:txBody>
+          <a:bodyPr rtlCol="0" anchor="ctr"/>
+          <a:lstStyle/>
+          <a:p>
+            <a:pPr algn="ctr"/>
+          </a:p>
+        </p:txBody>
+      </p:sp>
+      <p:sp>
+        <p:nvSpPr>
+          <p:cNvPr id="8" name="TextBox 7"/>
           <p:cNvSpPr txBox="1"/>
           <p:nvPr/>
         </p:nvSpPr>
         <p:spPr>
           <a:xfrm>
-            <a:off x="10991088" y="6464808"/>
-            <a:ext cx="658368" cy="256032"/>
+            <a:off x="10972800" y="6419088"/>
+            <a:ext cx="621792" cy="201168"/>
           </a:xfrm>
           <a:prstGeom prst="rect">
             <a:avLst/>
@@ -4686,15 +5933,15 @@
           <a:noFill/>
         </p:spPr>
         <p:txBody>
-          <a:bodyPr wrap="square" lIns="0" rIns="0" tIns="0" bIns="0">
+          <a:bodyPr wrap="square" lIns="0" rIns="0" tIns="0" bIns="0" anchor="ctr">
             <a:spAutoFit/>
           </a:bodyPr>
           <a:lstStyle/>
           <a:p>
-            <a:pPr>
+            <a:pPr algn="r">
               <a:defRPr sz="900" b="0">
                 <a:solidFill>
-                  <a:srgbClr val="565E5C"/>
+                  <a:srgbClr val="4E5C56"/>
                 </a:solidFill>
                 <a:latin typeface="Aptos"/>
               </a:defRPr>
@@ -4707,18 +5954,18 @@
       </p:sp>
       <p:sp>
         <p:nvSpPr>
-          <p:cNvPr id="8" name="Rounded Rectangle 7"/>
+          <p:cNvPr id="9" name="Rounded Rectangle 8"/>
           <p:cNvSpPr/>
           <p:nvPr/>
         </p:nvSpPr>
         <p:spPr>
           <a:xfrm>
-            <a:off x="566928" y="2770632"/>
-            <a:ext cx="2596896" cy="2606040"/>
+            <a:off x="548640" y="2286000"/>
+            <a:ext cx="7653527" cy="3822191"/>
           </a:xfrm>
           <a:prstGeom prst="roundRect">
             <a:avLst>
-              <a:gd name="adj" fmla="val 8000"/>
+              <a:gd name="adj" fmla="val 6000"/>
             </a:avLst>
           </a:prstGeom>
           <a:solidFill>
@@ -4726,7 +5973,7 @@
           </a:solidFill>
           <a:ln w="10160">
             <a:solidFill>
-              <a:srgbClr val="D8DCD8"/>
+              <a:srgbClr val="CDD8D1"/>
             </a:solidFill>
           </a:ln>
         </p:spPr>
@@ -4752,173 +5999,51 @@
           </a:p>
         </p:txBody>
       </p:sp>
-      <p:sp>
-        <p:nvSpPr>
-          <p:cNvPr id="9" name="TextBox 8"/>
-          <p:cNvSpPr txBox="1"/>
-          <p:nvPr/>
-        </p:nvSpPr>
-        <p:spPr>
-          <a:xfrm>
-            <a:off x="777240" y="2990088"/>
-            <a:ext cx="594360" cy="411480"/>
-          </a:xfrm>
-          <a:prstGeom prst="rect">
-            <a:avLst/>
-          </a:prstGeom>
-          <a:noFill/>
-        </p:spPr>
-        <p:txBody>
-          <a:bodyPr wrap="square" anchor="ctr" lIns="0" rIns="0" tIns="0" bIns="0">
-            <a:spAutoFit/>
-          </a:bodyPr>
-          <a:lstStyle/>
-          <a:p>
-            <a:pPr>
-              <a:defRPr sz="2300" b="1">
-                <a:solidFill>
-                  <a:srgbClr val="215E4E"/>
-                </a:solidFill>
-                <a:latin typeface="Aptos"/>
-              </a:defRPr>
-            </a:pPr>
-            <a:r>
-              <a:t>01</a:t>
-            </a:r>
-          </a:p>
-        </p:txBody>
-      </p:sp>
-      <p:sp>
-        <p:nvSpPr>
-          <p:cNvPr id="10" name="TextBox 9"/>
-          <p:cNvSpPr txBox="1"/>
-          <p:nvPr/>
-        </p:nvSpPr>
-        <p:spPr>
-          <a:xfrm>
-            <a:off x="777240" y="3547872"/>
-            <a:ext cx="2176272" cy="384048"/>
-          </a:xfrm>
-          <a:prstGeom prst="rect">
-            <a:avLst/>
-          </a:prstGeom>
-          <a:noFill/>
-        </p:spPr>
-        <p:txBody>
-          <a:bodyPr wrap="square" anchor="ctr" lIns="0" rIns="0" tIns="0" bIns="0">
-            <a:spAutoFit/>
-          </a:bodyPr>
-          <a:lstStyle/>
-          <a:p>
-            <a:pPr>
-              <a:defRPr sz="1800" b="1">
-                <a:solidFill>
-                  <a:srgbClr val="181B1B"/>
-                </a:solidFill>
-                <a:latin typeface="Aptos"/>
-              </a:defRPr>
-            </a:pPr>
-            <a:r>
-              <a:t>Load data</a:t>
-            </a:r>
-          </a:p>
-        </p:txBody>
-      </p:sp>
-      <p:sp>
-        <p:nvSpPr>
-          <p:cNvPr id="11" name="TextBox 10"/>
-          <p:cNvSpPr txBox="1"/>
-          <p:nvPr/>
-        </p:nvSpPr>
-        <p:spPr>
-          <a:xfrm>
-            <a:off x="777240" y="4142232"/>
-            <a:ext cx="2176272" cy="822960"/>
-          </a:xfrm>
-          <a:prstGeom prst="rect">
-            <a:avLst/>
-          </a:prstGeom>
-          <a:noFill/>
-        </p:spPr>
-        <p:txBody>
-          <a:bodyPr wrap="square" anchor="ctr" lIns="0" rIns="0" tIns="0" bIns="0">
-            <a:spAutoFit/>
-          </a:bodyPr>
-          <a:lstStyle/>
-          <a:p>
-            <a:pPr>
-              <a:defRPr sz="1300" b="0">
-                <a:solidFill>
-                  <a:srgbClr val="565E5C"/>
-                </a:solidFill>
-                <a:latin typeface="Aptos"/>
-              </a:defRPr>
-            </a:pPr>
-            <a:r>
-              <a:t>Labelled synthetic sample or attributed CSV</a:t>
-            </a:r>
-          </a:p>
-        </p:txBody>
-      </p:sp>
-      <p:sp>
-        <p:nvSpPr>
-          <p:cNvPr id="12" name="TextBox 11"/>
-          <p:cNvSpPr txBox="1"/>
-          <p:nvPr/>
-        </p:nvSpPr>
-        <p:spPr>
-          <a:xfrm>
-            <a:off x="3200400" y="3694176"/>
-            <a:ext cx="182880" cy="320040"/>
-          </a:xfrm>
-          <a:prstGeom prst="rect">
-            <a:avLst/>
-          </a:prstGeom>
-          <a:noFill/>
-        </p:spPr>
-        <p:txBody>
-          <a:bodyPr wrap="square" anchor="ctr" lIns="0" rIns="0" tIns="0" bIns="0">
-            <a:spAutoFit/>
-          </a:bodyPr>
-          <a:lstStyle/>
-          <a:p>
-            <a:pPr algn="ctr">
-              <a:defRPr sz="1700" b="0">
-                <a:solidFill>
-                  <a:srgbClr val="215E4E"/>
-                </a:solidFill>
-                <a:latin typeface="Aptos"/>
-              </a:defRPr>
-            </a:pPr>
-            <a:r>
-              <a:t>→</a:t>
-            </a:r>
-          </a:p>
-        </p:txBody>
-      </p:sp>
-      <p:sp>
-        <p:nvSpPr>
-          <p:cNvPr id="13" name="Rounded Rectangle 12"/>
+      <p:pic>
+        <p:nvPicPr>
+          <p:cNvPr id="10" name="Riskora UI screenshot: ranking-table.png" descr="ranking-table.png"/>
+          <p:cNvPicPr>
+            <a:picLocks noChangeAspect="1"/>
+          </p:cNvPicPr>
+          <p:nvPr/>
+        </p:nvPicPr>
+        <p:blipFill>
+          <a:blip r:embed="rId2"/>
+          <a:stretch>
+            <a:fillRect/>
+          </a:stretch>
+        </p:blipFill>
+        <p:spPr>
+          <a:xfrm>
+            <a:off x="585216" y="2322576"/>
+            <a:ext cx="7580375" cy="3749039"/>
+          </a:xfrm>
+          <a:prstGeom prst="rect">
+            <a:avLst/>
+          </a:prstGeom>
+        </p:spPr>
+      </p:pic>
+      <p:sp>
+        <p:nvSpPr>
+          <p:cNvPr id="11" name="Rounded Rectangle 10"/>
           <p:cNvSpPr/>
           <p:nvPr/>
         </p:nvSpPr>
         <p:spPr>
           <a:xfrm>
-            <a:off x="3374136" y="2770632"/>
-            <a:ext cx="2596896" cy="2606040"/>
+            <a:off x="8449056" y="2322576"/>
+            <a:ext cx="3145536" cy="3749039"/>
           </a:xfrm>
           <a:prstGeom prst="roundRect">
             <a:avLst>
-              <a:gd name="adj" fmla="val 8000"/>
+              <a:gd name="adj" fmla="val 6000"/>
             </a:avLst>
           </a:prstGeom>
           <a:solidFill>
-            <a:srgbClr val="FFFFFF"/>
+            <a:srgbClr val="E5F2EB"/>
           </a:solidFill>
-          <a:ln w="10160">
-            <a:solidFill>
-              <a:srgbClr val="D8DCD8"/>
-            </a:solidFill>
+          <a:ln>
+            <a:noFill/>
           </a:ln>
         </p:spPr>
         <p:style>
@@ -4945,171 +6070,25 @@
       </p:sp>
       <p:sp>
         <p:nvSpPr>
-          <p:cNvPr id="14" name="TextBox 13"/>
-          <p:cNvSpPr txBox="1"/>
-          <p:nvPr/>
-        </p:nvSpPr>
-        <p:spPr>
-          <a:xfrm>
-            <a:off x="3584448" y="2990088"/>
-            <a:ext cx="594360" cy="411480"/>
-          </a:xfrm>
-          <a:prstGeom prst="rect">
-            <a:avLst/>
-          </a:prstGeom>
-          <a:noFill/>
-        </p:spPr>
-        <p:txBody>
-          <a:bodyPr wrap="square" anchor="ctr" lIns="0" rIns="0" tIns="0" bIns="0">
-            <a:spAutoFit/>
-          </a:bodyPr>
-          <a:lstStyle/>
-          <a:p>
-            <a:pPr>
-              <a:defRPr sz="2300" b="1">
-                <a:solidFill>
-                  <a:srgbClr val="215E4E"/>
-                </a:solidFill>
-                <a:latin typeface="Aptos"/>
-              </a:defRPr>
-            </a:pPr>
-            <a:r>
-              <a:t>02</a:t>
-            </a:r>
-          </a:p>
-        </p:txBody>
-      </p:sp>
-      <p:sp>
-        <p:nvSpPr>
-          <p:cNvPr id="15" name="TextBox 14"/>
-          <p:cNvSpPr txBox="1"/>
-          <p:nvPr/>
-        </p:nvSpPr>
-        <p:spPr>
-          <a:xfrm>
-            <a:off x="3584448" y="3547872"/>
-            <a:ext cx="2176272" cy="384048"/>
-          </a:xfrm>
-          <a:prstGeom prst="rect">
-            <a:avLst/>
-          </a:prstGeom>
-          <a:noFill/>
-        </p:spPr>
-        <p:txBody>
-          <a:bodyPr wrap="square" anchor="ctr" lIns="0" rIns="0" tIns="0" bIns="0">
-            <a:spAutoFit/>
-          </a:bodyPr>
-          <a:lstStyle/>
-          <a:p>
-            <a:pPr>
-              <a:defRPr sz="1800" b="1">
-                <a:solidFill>
-                  <a:srgbClr val="181B1B"/>
-                </a:solidFill>
-                <a:latin typeface="Aptos"/>
-              </a:defRPr>
-            </a:pPr>
-            <a:r>
-              <a:t>Inspect</a:t>
-            </a:r>
-          </a:p>
-        </p:txBody>
-      </p:sp>
-      <p:sp>
-        <p:nvSpPr>
-          <p:cNvPr id="16" name="TextBox 15"/>
-          <p:cNvSpPr txBox="1"/>
-          <p:nvPr/>
-        </p:nvSpPr>
-        <p:spPr>
-          <a:xfrm>
-            <a:off x="3584448" y="4142232"/>
-            <a:ext cx="2176272" cy="822960"/>
-          </a:xfrm>
-          <a:prstGeom prst="rect">
-            <a:avLst/>
-          </a:prstGeom>
-          <a:noFill/>
-        </p:spPr>
-        <p:txBody>
-          <a:bodyPr wrap="square" anchor="ctr" lIns="0" rIns="0" tIns="0" bIns="0">
-            <a:spAutoFit/>
-          </a:bodyPr>
-          <a:lstStyle/>
-          <a:p>
-            <a:pPr>
-              <a:defRPr sz="1300" b="0">
-                <a:solidFill>
-                  <a:srgbClr val="565E5C"/>
-                </a:solidFill>
-                <a:latin typeface="Aptos"/>
-              </a:defRPr>
-            </a:pPr>
-            <a:r>
-              <a:t>Dated fund holdings and changes</a:t>
-            </a:r>
-          </a:p>
-        </p:txBody>
-      </p:sp>
-      <p:sp>
-        <p:nvSpPr>
-          <p:cNvPr id="17" name="TextBox 16"/>
-          <p:cNvSpPr txBox="1"/>
-          <p:nvPr/>
-        </p:nvSpPr>
-        <p:spPr>
-          <a:xfrm>
-            <a:off x="6007608" y="3694176"/>
-            <a:ext cx="182880" cy="320040"/>
-          </a:xfrm>
-          <a:prstGeom prst="rect">
-            <a:avLst/>
-          </a:prstGeom>
-          <a:noFill/>
-        </p:spPr>
-        <p:txBody>
-          <a:bodyPr wrap="square" anchor="ctr" lIns="0" rIns="0" tIns="0" bIns="0">
-            <a:spAutoFit/>
-          </a:bodyPr>
-          <a:lstStyle/>
-          <a:p>
-            <a:pPr algn="ctr">
-              <a:defRPr sz="1700" b="0">
-                <a:solidFill>
-                  <a:srgbClr val="215E4E"/>
-                </a:solidFill>
-                <a:latin typeface="Aptos"/>
-              </a:defRPr>
-            </a:pPr>
-            <a:r>
-              <a:t>→</a:t>
-            </a:r>
-          </a:p>
-        </p:txBody>
-      </p:sp>
-      <p:sp>
-        <p:nvSpPr>
-          <p:cNvPr id="18" name="Rounded Rectangle 17"/>
+          <p:cNvPr id="12" name="Rounded Rectangle 11"/>
           <p:cNvSpPr/>
           <p:nvPr/>
         </p:nvSpPr>
         <p:spPr>
           <a:xfrm>
-            <a:off x="6181344" y="2770632"/>
-            <a:ext cx="2596896" cy="2606040"/>
+            <a:off x="8705088" y="2569464"/>
+            <a:ext cx="1755648" cy="329184"/>
           </a:xfrm>
           <a:prstGeom prst="roundRect">
             <a:avLst>
-              <a:gd name="adj" fmla="val 8000"/>
+              <a:gd name="adj" fmla="val 6000"/>
             </a:avLst>
           </a:prstGeom>
           <a:solidFill>
-            <a:srgbClr val="FFFFFF"/>
+            <a:srgbClr val="13664E"/>
           </a:solidFill>
-          <a:ln w="10160">
-            <a:solidFill>
-              <a:srgbClr val="D8DCD8"/>
-            </a:solidFill>
+          <a:ln>
+            <a:noFill/>
           </a:ln>
         </p:spPr>
         <p:style>
@@ -5136,14 +6115,14 @@
       </p:sp>
       <p:sp>
         <p:nvSpPr>
-          <p:cNvPr id="19" name="TextBox 18"/>
+          <p:cNvPr id="13" name="TextBox 12"/>
           <p:cNvSpPr txBox="1"/>
           <p:nvPr/>
         </p:nvSpPr>
         <p:spPr>
           <a:xfrm>
-            <a:off x="6391656" y="2990088"/>
-            <a:ext cx="594360" cy="411480"/>
+            <a:off x="8814815" y="2583180"/>
+            <a:ext cx="1536192" cy="292608"/>
           </a:xfrm>
           <a:prstGeom prst="rect">
             <a:avLst/>
@@ -5151,35 +6130,35 @@
           <a:noFill/>
         </p:spPr>
         <p:txBody>
-          <a:bodyPr wrap="square" anchor="ctr" lIns="0" rIns="0" tIns="0" bIns="0">
+          <a:bodyPr wrap="square" lIns="0" rIns="0" tIns="0" bIns="0" anchor="ctr">
             <a:spAutoFit/>
           </a:bodyPr>
           <a:lstStyle/>
           <a:p>
             <a:pPr>
-              <a:defRPr sz="2300" b="1">
-                <a:solidFill>
-                  <a:srgbClr val="215E4E"/>
+              <a:defRPr sz="1000" b="1">
+                <a:solidFill>
+                  <a:srgbClr val="FFFFFF"/>
                 </a:solidFill>
                 <a:latin typeface="Aptos"/>
               </a:defRPr>
             </a:pPr>
             <a:r>
-              <a:t>03</a:t>
-            </a:r>
-          </a:p>
-        </p:txBody>
-      </p:sp>
-      <p:sp>
-        <p:nvSpPr>
-          <p:cNvPr id="20" name="TextBox 19"/>
+              <a:t>FICTIONAL SAMPLE</a:t>
+            </a:r>
+          </a:p>
+        </p:txBody>
+      </p:sp>
+      <p:sp>
+        <p:nvSpPr>
+          <p:cNvPr id="14" name="TextBox 13"/>
           <p:cNvSpPr txBox="1"/>
           <p:nvPr/>
         </p:nvSpPr>
         <p:spPr>
           <a:xfrm>
-            <a:off x="6391656" y="3547872"/>
-            <a:ext cx="2176272" cy="384048"/>
+            <a:off x="8705088" y="3090672"/>
+            <a:ext cx="2670048" cy="365760"/>
           </a:xfrm>
           <a:prstGeom prst="rect">
             <a:avLst/>
@@ -5187,35 +6166,35 @@
           <a:noFill/>
         </p:spPr>
         <p:txBody>
-          <a:bodyPr wrap="square" anchor="ctr" lIns="0" rIns="0" tIns="0" bIns="0">
+          <a:bodyPr wrap="square" lIns="0" rIns="0" tIns="0" bIns="0" anchor="ctr">
             <a:spAutoFit/>
           </a:bodyPr>
           <a:lstStyle/>
           <a:p>
             <a:pPr>
-              <a:defRPr sz="1800" b="1">
-                <a:solidFill>
-                  <a:srgbClr val="181B1B"/>
+              <a:defRPr sz="1500" b="1">
+                <a:solidFill>
+                  <a:srgbClr val="18221F"/>
                 </a:solidFill>
                 <a:latin typeface="Aptos"/>
               </a:defRPr>
             </a:pPr>
             <a:r>
-              <a:t>Evaluate</a:t>
-            </a:r>
-          </a:p>
-        </p:txBody>
-      </p:sp>
-      <p:sp>
-        <p:nvSpPr>
-          <p:cNvPr id="21" name="TextBox 20"/>
+              <a:t>01  Inspect dated holdings</a:t>
+            </a:r>
+          </a:p>
+        </p:txBody>
+      </p:sp>
+      <p:sp>
+        <p:nvSpPr>
+          <p:cNvPr id="15" name="TextBox 14"/>
           <p:cNvSpPr txBox="1"/>
           <p:nvPr/>
         </p:nvSpPr>
         <p:spPr>
           <a:xfrm>
-            <a:off x="6391656" y="4142232"/>
-            <a:ext cx="2176272" cy="822960"/>
+            <a:off x="8705088" y="3803904"/>
+            <a:ext cx="2670048" cy="457200"/>
           </a:xfrm>
           <a:prstGeom prst="rect">
             <a:avLst/>
@@ -5223,35 +6202,35 @@
           <a:noFill/>
         </p:spPr>
         <p:txBody>
-          <a:bodyPr wrap="square" anchor="ctr" lIns="0" rIns="0" tIns="0" bIns="0">
+          <a:bodyPr wrap="square" lIns="0" rIns="0" tIns="0" bIns="0" anchor="ctr">
             <a:spAutoFit/>
           </a:bodyPr>
           <a:lstStyle/>
           <a:p>
             <a:pPr>
-              <a:defRPr sz="1300" b="0">
-                <a:solidFill>
-                  <a:srgbClr val="565E5C"/>
+              <a:defRPr sz="1500" b="1">
+                <a:solidFill>
+                  <a:srgbClr val="18221F"/>
                 </a:solidFill>
                 <a:latin typeface="Aptos"/>
               </a:defRPr>
             </a:pPr>
             <a:r>
-              <a:t>Later-period holdout and baselines</a:t>
-            </a:r>
-          </a:p>
-        </p:txBody>
-      </p:sp>
-      <p:sp>
-        <p:nvSpPr>
-          <p:cNvPr id="22" name="TextBox 21"/>
+              <a:t>02  Check later-period evaluation</a:t>
+            </a:r>
+          </a:p>
+        </p:txBody>
+      </p:sp>
+      <p:sp>
+        <p:nvSpPr>
+          <p:cNvPr id="16" name="TextBox 15"/>
           <p:cNvSpPr txBox="1"/>
           <p:nvPr/>
         </p:nvSpPr>
         <p:spPr>
           <a:xfrm>
-            <a:off x="8814816" y="3694176"/>
-            <a:ext cx="182880" cy="320040"/>
+            <a:off x="8705088" y="4608576"/>
+            <a:ext cx="2670048" cy="429768"/>
           </a:xfrm>
           <a:prstGeom prst="rect">
             <a:avLst/>
@@ -5259,82 +6238,35 @@
           <a:noFill/>
         </p:spPr>
         <p:txBody>
-          <a:bodyPr wrap="square" anchor="ctr" lIns="0" rIns="0" tIns="0" bIns="0">
+          <a:bodyPr wrap="square" lIns="0" rIns="0" tIns="0" bIns="0" anchor="ctr">
             <a:spAutoFit/>
           </a:bodyPr>
           <a:lstStyle/>
           <a:p>
-            <a:pPr algn="ctr">
-              <a:defRPr sz="1700" b="0">
-                <a:solidFill>
-                  <a:srgbClr val="215E4E"/>
+            <a:pPr>
+              <a:defRPr sz="1500" b="1">
+                <a:solidFill>
+                  <a:srgbClr val="18221F"/>
                 </a:solidFill>
                 <a:latin typeface="Aptos"/>
               </a:defRPr>
             </a:pPr>
             <a:r>
-              <a:t>→</a:t>
-            </a:r>
-          </a:p>
-        </p:txBody>
-      </p:sp>
-      <p:sp>
-        <p:nvSpPr>
-          <p:cNvPr id="23" name="Rounded Rectangle 22"/>
-          <p:cNvSpPr/>
-          <p:nvPr/>
-        </p:nvSpPr>
-        <p:spPr>
-          <a:xfrm>
-            <a:off x="8988551" y="2770632"/>
-            <a:ext cx="2596896" cy="2606040"/>
-          </a:xfrm>
-          <a:prstGeom prst="roundRect">
-            <a:avLst>
-              <a:gd name="adj" fmla="val 8000"/>
-            </a:avLst>
-          </a:prstGeom>
-          <a:solidFill>
-            <a:srgbClr val="E9F1EC"/>
-          </a:solidFill>
-          <a:ln w="10160">
-            <a:solidFill>
-              <a:srgbClr val="D8DCD8"/>
-            </a:solidFill>
-          </a:ln>
-        </p:spPr>
-        <p:style>
-          <a:lnRef idx="1">
-            <a:schemeClr val="accent1"/>
-          </a:lnRef>
-          <a:fillRef idx="3">
-            <a:schemeClr val="accent1"/>
-          </a:fillRef>
-          <a:effectRef idx="2">
-            <a:schemeClr val="accent1"/>
-          </a:effectRef>
-          <a:fontRef idx="minor">
-            <a:schemeClr val="lt1"/>
-          </a:fontRef>
-        </p:style>
-        <p:txBody>
-          <a:bodyPr rtlCol="0" anchor="ctr"/>
-          <a:lstStyle/>
-          <a:p>
-            <a:pPr algn="ctr"/>
-          </a:p>
-        </p:txBody>
-      </p:sp>
-      <p:sp>
-        <p:nvSpPr>
-          <p:cNvPr id="24" name="TextBox 23"/>
+              <a:t>03  Rank and open evidence</a:t>
+            </a:r>
+          </a:p>
+        </p:txBody>
+      </p:sp>
+      <p:sp>
+        <p:nvSpPr>
+          <p:cNvPr id="17" name="TextBox 16"/>
           <p:cNvSpPr txBox="1"/>
           <p:nvPr/>
         </p:nvSpPr>
         <p:spPr>
           <a:xfrm>
-            <a:off x="9198863" y="2990088"/>
-            <a:ext cx="594360" cy="411480"/>
+            <a:off x="8705088" y="5367528"/>
+            <a:ext cx="2670048" cy="320040"/>
           </a:xfrm>
           <a:prstGeom prst="rect">
             <a:avLst/>
@@ -5342,129 +6274,21 @@
           <a:noFill/>
         </p:spPr>
         <p:txBody>
-          <a:bodyPr wrap="square" anchor="ctr" lIns="0" rIns="0" tIns="0" bIns="0">
+          <a:bodyPr wrap="square" lIns="0" rIns="0" tIns="0" bIns="0" anchor="ctr">
             <a:spAutoFit/>
           </a:bodyPr>
           <a:lstStyle/>
           <a:p>
             <a:pPr>
-              <a:defRPr sz="2300" b="1">
-                <a:solidFill>
-                  <a:srgbClr val="215E4E"/>
+              <a:defRPr sz="1100" b="0">
+                <a:solidFill>
+                  <a:srgbClr val="4E5C56"/>
                 </a:solidFill>
                 <a:latin typeface="Aptos"/>
               </a:defRPr>
             </a:pPr>
             <a:r>
-              <a:t>04</a:t>
-            </a:r>
-          </a:p>
-        </p:txBody>
-      </p:sp>
-      <p:sp>
-        <p:nvSpPr>
-          <p:cNvPr id="25" name="TextBox 24"/>
-          <p:cNvSpPr txBox="1"/>
-          <p:nvPr/>
-        </p:nvSpPr>
-        <p:spPr>
-          <a:xfrm>
-            <a:off x="9198863" y="3547872"/>
-            <a:ext cx="2176272" cy="384048"/>
-          </a:xfrm>
-          <a:prstGeom prst="rect">
-            <a:avLst/>
-          </a:prstGeom>
-          <a:noFill/>
-        </p:spPr>
-        <p:txBody>
-          <a:bodyPr wrap="square" anchor="ctr" lIns="0" rIns="0" tIns="0" bIns="0">
-            <a:spAutoFit/>
-          </a:bodyPr>
-          <a:lstStyle/>
-          <a:p>
-            <a:pPr>
-              <a:defRPr sz="1800" b="1">
-                <a:solidFill>
-                  <a:srgbClr val="181B1B"/>
-                </a:solidFill>
-                <a:latin typeface="Aptos"/>
-              </a:defRPr>
-            </a:pPr>
-            <a:r>
-              <a:t>Review</a:t>
-            </a:r>
-          </a:p>
-        </p:txBody>
-      </p:sp>
-      <p:sp>
-        <p:nvSpPr>
-          <p:cNvPr id="26" name="TextBox 25"/>
-          <p:cNvSpPr txBox="1"/>
-          <p:nvPr/>
-        </p:nvSpPr>
-        <p:spPr>
-          <a:xfrm>
-            <a:off x="9198863" y="4142232"/>
-            <a:ext cx="2176272" cy="822960"/>
-          </a:xfrm>
-          <a:prstGeom prst="rect">
-            <a:avLst/>
-          </a:prstGeom>
-          <a:noFill/>
-        </p:spPr>
-        <p:txBody>
-          <a:bodyPr wrap="square" anchor="ctr" lIns="0" rIns="0" tIns="0" bIns="0">
-            <a:spAutoFit/>
-          </a:bodyPr>
-          <a:lstStyle/>
-          <a:p>
-            <a:pPr>
-              <a:defRPr sz="1300" b="0">
-                <a:solidFill>
-                  <a:srgbClr val="565E5C"/>
-                </a:solidFill>
-                <a:latin typeface="Aptos"/>
-              </a:defRPr>
-            </a:pPr>
-            <a:r>
-              <a:t>Candidate ranking and supporting signals</a:t>
-            </a:r>
-          </a:p>
-        </p:txBody>
-      </p:sp>
-      <p:sp>
-        <p:nvSpPr>
-          <p:cNvPr id="27" name="TextBox 26"/>
-          <p:cNvSpPr txBox="1"/>
-          <p:nvPr/>
-        </p:nvSpPr>
-        <p:spPr>
-          <a:xfrm>
-            <a:off x="566928" y="5769864"/>
-            <a:ext cx="10972800" cy="457200"/>
-          </a:xfrm>
-          <a:prstGeom prst="rect">
-            <a:avLst/>
-          </a:prstGeom>
-          <a:noFill/>
-        </p:spPr>
-        <p:txBody>
-          <a:bodyPr wrap="square" anchor="ctr" lIns="0" rIns="0" tIns="0" bIns="0">
-            <a:spAutoFit/>
-          </a:bodyPr>
-          <a:lstStyle/>
-          <a:p>
-            <a:pPr>
-              <a:defRPr sz="1200" b="0">
-                <a:solidFill>
-                  <a:srgbClr val="565E5C"/>
-                </a:solidFill>
-                <a:latin typeface="Aptos"/>
-              </a:defRPr>
-            </a:pPr>
-            <a:r>
-              <a:t>Bundled sample = fictional funds and market observations. It checks the workflow, not Indian-market accuracy.</a:t>
+              <a:t>7 candidates in the local synthetic demo</a:t>
             </a:r>
           </a:p>
         </p:txBody>
@@ -5483,7 +6307,7 @@
     <p:bg>
       <p:bgPr>
         <a:solidFill>
-          <a:srgbClr val="F8F8F6"/>
+          <a:srgbClr val="F7F9F7"/>
         </a:solidFill>
         <a:effectLst/>
       </p:bgPr>
@@ -5503,8 +6327,8 @@
         </p:nvSpPr>
         <p:spPr>
           <a:xfrm>
-            <a:off x="566928" y="338328"/>
-            <a:ext cx="5943600" cy="256032"/>
+            <a:off x="585216" y="228600"/>
+            <a:ext cx="7863840" cy="256032"/>
           </a:xfrm>
           <a:prstGeom prst="rect">
             <a:avLst/>
@@ -5512,7 +6336,7 @@
           <a:noFill/>
         </p:spPr>
         <p:txBody>
-          <a:bodyPr wrap="square" lIns="0" rIns="0" tIns="0" bIns="0">
+          <a:bodyPr wrap="square" lIns="0" rIns="0" tIns="0" bIns="0" anchor="ctr">
             <a:spAutoFit/>
           </a:bodyPr>
           <a:lstStyle/>
@@ -5520,13 +6344,13 @@
             <a:pPr>
               <a:defRPr sz="1000" b="1">
                 <a:solidFill>
-                  <a:srgbClr val="215E4E"/>
+                  <a:srgbClr val="13664E"/>
                 </a:solidFill>
                 <a:latin typeface="Aptos"/>
               </a:defRPr>
             </a:pPr>
             <a:r>
-              <a:t>RISKORA  /  AIBOOMI STARTUP WEEKEND</a:t>
+              <a:t>RISKORA  /  AIBOOMI STARTUP WEEKEND KOCHI</a:t>
             </a:r>
           </a:p>
         </p:txBody>
@@ -5539,8 +6363,8 @@
         </p:nvSpPr>
         <p:spPr>
           <a:xfrm>
-            <a:off x="9326880" y="338328"/>
-            <a:ext cx="2286000" cy="256032"/>
+            <a:off x="9326880" y="228600"/>
+            <a:ext cx="2258568" cy="256032"/>
           </a:xfrm>
           <a:prstGeom prst="rect">
             <a:avLst/>
@@ -5548,21 +6372,21 @@
           <a:noFill/>
         </p:spPr>
         <p:txBody>
-          <a:bodyPr wrap="square" lIns="0" rIns="0" tIns="0" bIns="0">
+          <a:bodyPr wrap="square" lIns="0" rIns="0" tIns="0" bIns="0" anchor="ctr">
             <a:spAutoFit/>
           </a:bodyPr>
           <a:lstStyle/>
           <a:p>
-            <a:pPr>
+            <a:pPr algn="r">
               <a:defRPr sz="1000" b="0">
                 <a:solidFill>
-                  <a:srgbClr val="565E5C"/>
+                  <a:srgbClr val="4E5C56"/>
                 </a:solidFill>
                 <a:latin typeface="Aptos"/>
               </a:defRPr>
             </a:pPr>
             <a:r>
-              <a:t>TECHNICAL APPROACH</a:t>
+              <a:t>AI AND TECHNICAL EXECUTION</a:t>
             </a:r>
           </a:p>
         </p:txBody>
@@ -5575,14 +6399,14 @@
         </p:nvSpPr>
         <p:spPr>
           <a:xfrm>
-            <a:off x="566928" y="758952"/>
-            <a:ext cx="11045952" cy="10972"/>
+            <a:off x="585216" y="667512"/>
+            <a:ext cx="11018520" cy="14630"/>
           </a:xfrm>
           <a:prstGeom prst="rect">
             <a:avLst/>
           </a:prstGeom>
           <a:solidFill>
-            <a:srgbClr val="D8DCD8"/>
+            <a:srgbClr val="CDD8D1"/>
           </a:solidFill>
           <a:ln>
             <a:noFill/>
@@ -5618,8 +6442,8 @@
         </p:nvSpPr>
         <p:spPr>
           <a:xfrm>
-            <a:off x="566928" y="1024128"/>
-            <a:ext cx="10972800" cy="749808"/>
+            <a:off x="585216" y="896112"/>
+            <a:ext cx="10972800" cy="640080"/>
           </a:xfrm>
           <a:prstGeom prst="rect">
             <a:avLst/>
@@ -5627,7 +6451,7 @@
           <a:noFill/>
         </p:spPr>
         <p:txBody>
-          <a:bodyPr wrap="square" anchor="ctr" lIns="0" rIns="0" tIns="0" bIns="0">
+          <a:bodyPr wrap="square" lIns="0" rIns="0" tIns="0" bIns="0" anchor="ctr">
             <a:spAutoFit/>
           </a:bodyPr>
           <a:lstStyle/>
@@ -5635,13 +6459,13 @@
             <a:pPr>
               <a:defRPr sz="3000" b="1">
                 <a:solidFill>
-                  <a:srgbClr val="181B1B"/>
+                  <a:srgbClr val="18221F"/>
                 </a:solidFill>
                 <a:latin typeface="Aptos Display"/>
               </a:defRPr>
             </a:pPr>
             <a:r>
-              <a:t>Point-in-time data in; inspectable rankings out.</a:t>
+              <a:t>The model is testable because time is enforced.</a:t>
             </a:r>
           </a:p>
         </p:txBody>
@@ -5654,8 +6478,8 @@
         </p:nvSpPr>
         <p:spPr>
           <a:xfrm>
-            <a:off x="566928" y="1773936"/>
-            <a:ext cx="10927080" cy="411480"/>
+            <a:off x="585216" y="1600200"/>
+            <a:ext cx="10972800" cy="384048"/>
           </a:xfrm>
           <a:prstGeom prst="rect">
             <a:avLst/>
@@ -5663,35 +6487,78 @@
           <a:noFill/>
         </p:spPr>
         <p:txBody>
-          <a:bodyPr wrap="square" anchor="ctr" lIns="0" rIns="0" tIns="0" bIns="0">
+          <a:bodyPr wrap="square" lIns="0" rIns="0" tIns="0" bIns="0" anchor="ctr">
             <a:spAutoFit/>
           </a:bodyPr>
           <a:lstStyle/>
           <a:p>
             <a:pPr>
-              <a:defRPr sz="1500" b="0">
-                <a:solidFill>
-                  <a:srgbClr val="565E5C"/>
+              <a:defRPr sz="1400" b="0">
+                <a:solidFill>
+                  <a:srgbClr val="4E5C56"/>
                 </a:solidFill>
                 <a:latin typeface="Aptos"/>
               </a:defRPr>
             </a:pPr>
             <a:r>
-              <a:t>FastAPI + SQLite + React/Vite + scikit-learn</a:t>
-            </a:r>
-          </a:p>
-        </p:txBody>
-      </p:sp>
-      <p:sp>
-        <p:nvSpPr>
-          <p:cNvPr id="7" name="TextBox 6"/>
+              <a:t>Validated inputs → cutoff-dated features → baseline comparison → a separate final holdout.</a:t>
+            </a:r>
+          </a:p>
+        </p:txBody>
+      </p:sp>
+      <p:sp>
+        <p:nvSpPr>
+          <p:cNvPr id="7" name="Rectangle 6"/>
+          <p:cNvSpPr/>
+          <p:nvPr/>
+        </p:nvSpPr>
+        <p:spPr>
+          <a:xfrm>
+            <a:off x="585216" y="6355080"/>
+            <a:ext cx="11018520" cy="14630"/>
+          </a:xfrm>
+          <a:prstGeom prst="rect">
+            <a:avLst/>
+          </a:prstGeom>
+          <a:solidFill>
+            <a:srgbClr val="CDD8D1"/>
+          </a:solidFill>
+          <a:ln>
+            <a:noFill/>
+          </a:ln>
+        </p:spPr>
+        <p:style>
+          <a:lnRef idx="1">
+            <a:schemeClr val="accent1"/>
+          </a:lnRef>
+          <a:fillRef idx="3">
+            <a:schemeClr val="accent1"/>
+          </a:fillRef>
+          <a:effectRef idx="2">
+            <a:schemeClr val="accent1"/>
+          </a:effectRef>
+          <a:fontRef idx="minor">
+            <a:schemeClr val="lt1"/>
+          </a:fontRef>
+        </p:style>
+        <p:txBody>
+          <a:bodyPr rtlCol="0" anchor="ctr"/>
+          <a:lstStyle/>
+          <a:p>
+            <a:pPr algn="ctr"/>
+          </a:p>
+        </p:txBody>
+      </p:sp>
+      <p:sp>
+        <p:nvSpPr>
+          <p:cNvPr id="8" name="TextBox 7"/>
           <p:cNvSpPr txBox="1"/>
           <p:nvPr/>
         </p:nvSpPr>
         <p:spPr>
           <a:xfrm>
-            <a:off x="10991088" y="6464808"/>
-            <a:ext cx="658368" cy="256032"/>
+            <a:off x="10972800" y="6419088"/>
+            <a:ext cx="621792" cy="201168"/>
           </a:xfrm>
           <a:prstGeom prst="rect">
             <a:avLst/>
@@ -5699,15 +6566,15 @@
           <a:noFill/>
         </p:spPr>
         <p:txBody>
-          <a:bodyPr wrap="square" lIns="0" rIns="0" tIns="0" bIns="0">
+          <a:bodyPr wrap="square" lIns="0" rIns="0" tIns="0" bIns="0" anchor="ctr">
             <a:spAutoFit/>
           </a:bodyPr>
           <a:lstStyle/>
           <a:p>
-            <a:pPr>
+            <a:pPr algn="r">
               <a:defRPr sz="900" b="0">
                 <a:solidFill>
-                  <a:srgbClr val="565E5C"/>
+                  <a:srgbClr val="4E5C56"/>
                 </a:solidFill>
                 <a:latin typeface="Aptos"/>
               </a:defRPr>
@@ -5720,18 +6587,18 @@
       </p:sp>
       <p:sp>
         <p:nvSpPr>
-          <p:cNvPr id="8" name="Rounded Rectangle 7"/>
+          <p:cNvPr id="9" name="Rounded Rectangle 8"/>
           <p:cNvSpPr/>
           <p:nvPr/>
         </p:nvSpPr>
         <p:spPr>
           <a:xfrm>
-            <a:off x="566928" y="2359152"/>
-            <a:ext cx="7360920" cy="658368"/>
+            <a:off x="585216" y="2276856"/>
+            <a:ext cx="4718304" cy="859536"/>
           </a:xfrm>
           <a:prstGeom prst="roundRect">
             <a:avLst>
-              <a:gd name="adj" fmla="val 8000"/>
+              <a:gd name="adj" fmla="val 6000"/>
             </a:avLst>
           </a:prstGeom>
           <a:solidFill>
@@ -5739,7 +6606,7 @@
           </a:solidFill>
           <a:ln w="10160">
             <a:solidFill>
-              <a:srgbClr val="D8DCD8"/>
+              <a:srgbClr val="CDD8D1"/>
             </a:solidFill>
           </a:ln>
         </p:spPr>
@@ -5767,135 +6634,25 @@
       </p:sp>
       <p:sp>
         <p:nvSpPr>
-          <p:cNvPr id="9" name="TextBox 8"/>
-          <p:cNvSpPr txBox="1"/>
-          <p:nvPr/>
-        </p:nvSpPr>
-        <p:spPr>
-          <a:xfrm>
-            <a:off x="749808" y="2468880"/>
-            <a:ext cx="512064" cy="384048"/>
-          </a:xfrm>
-          <a:prstGeom prst="rect">
-            <a:avLst/>
-          </a:prstGeom>
-          <a:noFill/>
-        </p:spPr>
-        <p:txBody>
-          <a:bodyPr wrap="square" anchor="ctr" lIns="0" rIns="0" tIns="0" bIns="0">
-            <a:spAutoFit/>
-          </a:bodyPr>
-          <a:lstStyle/>
-          <a:p>
-            <a:pPr>
-              <a:defRPr sz="1800" b="1">
-                <a:solidFill>
-                  <a:srgbClr val="215E4E"/>
-                </a:solidFill>
-                <a:latin typeface="Aptos"/>
-              </a:defRPr>
-            </a:pPr>
-            <a:r>
-              <a:t>01</a:t>
-            </a:r>
-          </a:p>
-        </p:txBody>
-      </p:sp>
-      <p:sp>
-        <p:nvSpPr>
-          <p:cNvPr id="10" name="TextBox 9"/>
-          <p:cNvSpPr txBox="1"/>
-          <p:nvPr/>
-        </p:nvSpPr>
-        <p:spPr>
-          <a:xfrm>
-            <a:off x="1417320" y="2478024"/>
-            <a:ext cx="1965960" cy="365760"/>
-          </a:xfrm>
-          <a:prstGeom prst="rect">
-            <a:avLst/>
-          </a:prstGeom>
-          <a:noFill/>
-        </p:spPr>
-        <p:txBody>
-          <a:bodyPr wrap="square" anchor="ctr" lIns="0" rIns="0" tIns="0" bIns="0">
-            <a:spAutoFit/>
-          </a:bodyPr>
-          <a:lstStyle/>
-          <a:p>
-            <a:pPr>
-              <a:defRPr sz="1500" b="1">
-                <a:solidFill>
-                  <a:srgbClr val="181B1B"/>
-                </a:solidFill>
-                <a:latin typeface="Aptos"/>
-              </a:defRPr>
-            </a:pPr>
-            <a:r>
-              <a:t>Validate &amp; store</a:t>
-            </a:r>
-          </a:p>
-        </p:txBody>
-      </p:sp>
-      <p:sp>
-        <p:nvSpPr>
-          <p:cNvPr id="11" name="TextBox 10"/>
-          <p:cNvSpPr txBox="1"/>
-          <p:nvPr/>
-        </p:nvSpPr>
-        <p:spPr>
-          <a:xfrm>
-            <a:off x="3364992" y="2487168"/>
-            <a:ext cx="4206240" cy="338328"/>
-          </a:xfrm>
-          <a:prstGeom prst="rect">
-            <a:avLst/>
-          </a:prstGeom>
-          <a:noFill/>
-        </p:spPr>
-        <p:txBody>
-          <a:bodyPr wrap="square" anchor="ctr" lIns="0" rIns="0" tIns="0" bIns="0">
-            <a:spAutoFit/>
-          </a:bodyPr>
-          <a:lstStyle/>
-          <a:p>
-            <a:pPr>
-              <a:defRPr sz="1200" b="0">
-                <a:solidFill>
-                  <a:srgbClr val="565E5C"/>
-                </a:solidFill>
-                <a:latin typeface="Aptos"/>
-              </a:defRPr>
-            </a:pPr>
-            <a:r>
-              <a:t>Source URL, dates, completeness, identifiers</a:t>
-            </a:r>
-          </a:p>
-        </p:txBody>
-      </p:sp>
-      <p:sp>
-        <p:nvSpPr>
-          <p:cNvPr id="12" name="Rounded Rectangle 11"/>
+          <p:cNvPr id="10" name="Rounded Rectangle 9"/>
           <p:cNvSpPr/>
           <p:nvPr/>
         </p:nvSpPr>
         <p:spPr>
           <a:xfrm>
-            <a:off x="566928" y="3182112"/>
-            <a:ext cx="7360920" cy="658368"/>
+            <a:off x="740664" y="2496312"/>
+            <a:ext cx="420624" cy="329184"/>
           </a:xfrm>
           <a:prstGeom prst="roundRect">
             <a:avLst>
-              <a:gd name="adj" fmla="val 8000"/>
+              <a:gd name="adj" fmla="val 6000"/>
             </a:avLst>
           </a:prstGeom>
           <a:solidFill>
-            <a:srgbClr val="E9F1EC"/>
+            <a:srgbClr val="E5F2EB"/>
           </a:solidFill>
-          <a:ln w="10160">
-            <a:solidFill>
-              <a:srgbClr val="D8DCD8"/>
-            </a:solidFill>
+          <a:ln>
+            <a:noFill/>
           </a:ln>
         </p:spPr>
         <p:style>
@@ -5922,14 +6679,86 @@
       </p:sp>
       <p:sp>
         <p:nvSpPr>
+          <p:cNvPr id="11" name="TextBox 10"/>
+          <p:cNvSpPr txBox="1"/>
+          <p:nvPr/>
+        </p:nvSpPr>
+        <p:spPr>
+          <a:xfrm>
+            <a:off x="850392" y="2510028"/>
+            <a:ext cx="201168" cy="292608"/>
+          </a:xfrm>
+          <a:prstGeom prst="rect">
+            <a:avLst/>
+          </a:prstGeom>
+          <a:noFill/>
+        </p:spPr>
+        <p:txBody>
+          <a:bodyPr wrap="square" lIns="0" rIns="0" tIns="0" bIns="0" anchor="ctr">
+            <a:spAutoFit/>
+          </a:bodyPr>
+          <a:lstStyle/>
+          <a:p>
+            <a:pPr>
+              <a:defRPr sz="1000" b="1">
+                <a:solidFill>
+                  <a:srgbClr val="13664E"/>
+                </a:solidFill>
+                <a:latin typeface="Aptos"/>
+              </a:defRPr>
+            </a:pPr>
+            <a:r>
+              <a:t>01</a:t>
+            </a:r>
+          </a:p>
+        </p:txBody>
+      </p:sp>
+      <p:sp>
+        <p:nvSpPr>
+          <p:cNvPr id="12" name="TextBox 11"/>
+          <p:cNvSpPr txBox="1"/>
+          <p:nvPr/>
+        </p:nvSpPr>
+        <p:spPr>
+          <a:xfrm>
+            <a:off x="1298448" y="2423160"/>
+            <a:ext cx="3785616" cy="246888"/>
+          </a:xfrm>
+          <a:prstGeom prst="rect">
+            <a:avLst/>
+          </a:prstGeom>
+          <a:noFill/>
+        </p:spPr>
+        <p:txBody>
+          <a:bodyPr wrap="square" lIns="0" rIns="0" tIns="0" bIns="0" anchor="ctr">
+            <a:spAutoFit/>
+          </a:bodyPr>
+          <a:lstStyle/>
+          <a:p>
+            <a:pPr>
+              <a:defRPr sz="1500" b="1">
+                <a:solidFill>
+                  <a:srgbClr val="18221F"/>
+                </a:solidFill>
+                <a:latin typeface="Aptos"/>
+              </a:defRPr>
+            </a:pPr>
+            <a:r>
+              <a:t>Validate before labelling</a:t>
+            </a:r>
+          </a:p>
+        </p:txBody>
+      </p:sp>
+      <p:sp>
+        <p:nvSpPr>
           <p:cNvPr id="13" name="TextBox 12"/>
           <p:cNvSpPr txBox="1"/>
           <p:nvPr/>
         </p:nvSpPr>
         <p:spPr>
           <a:xfrm>
-            <a:off x="749808" y="3291840"/>
-            <a:ext cx="512064" cy="384048"/>
+            <a:off x="1298448" y="2715768"/>
+            <a:ext cx="3785616" cy="283464"/>
           </a:xfrm>
           <a:prstGeom prst="rect">
             <a:avLst/>
@@ -5937,111 +6766,39 @@
           <a:noFill/>
         </p:spPr>
         <p:txBody>
-          <a:bodyPr wrap="square" anchor="ctr" lIns="0" rIns="0" tIns="0" bIns="0">
+          <a:bodyPr wrap="square" lIns="0" rIns="0" tIns="0" bIns="0" anchor="ctr">
             <a:spAutoFit/>
           </a:bodyPr>
           <a:lstStyle/>
           <a:p>
             <a:pPr>
-              <a:defRPr sz="1800" b="1">
-                <a:solidFill>
-                  <a:srgbClr val="215E4E"/>
+              <a:defRPr sz="1100" b="0">
+                <a:solidFill>
+                  <a:srgbClr val="4E5C56"/>
                 </a:solidFill>
                 <a:latin typeface="Aptos"/>
               </a:defRPr>
             </a:pPr>
             <a:r>
-              <a:t>02</a:t>
-            </a:r>
-          </a:p>
-        </p:txBody>
-      </p:sp>
-      <p:sp>
-        <p:nvSpPr>
-          <p:cNvPr id="14" name="TextBox 13"/>
-          <p:cNvSpPr txBox="1"/>
-          <p:nvPr/>
-        </p:nvSpPr>
-        <p:spPr>
-          <a:xfrm>
-            <a:off x="1417320" y="3300984"/>
-            <a:ext cx="1965960" cy="365760"/>
-          </a:xfrm>
-          <a:prstGeom prst="rect">
-            <a:avLst/>
-          </a:prstGeom>
-          <a:noFill/>
-        </p:spPr>
-        <p:txBody>
-          <a:bodyPr wrap="square" anchor="ctr" lIns="0" rIns="0" tIns="0" bIns="0">
-            <a:spAutoFit/>
-          </a:bodyPr>
-          <a:lstStyle/>
-          <a:p>
-            <a:pPr>
-              <a:defRPr sz="1500" b="1">
-                <a:solidFill>
-                  <a:srgbClr val="181B1B"/>
-                </a:solidFill>
-                <a:latin typeface="Aptos"/>
-              </a:defRPr>
-            </a:pPr>
-            <a:r>
-              <a:t>Label &amp; featurize</a:t>
-            </a:r>
-          </a:p>
-        </p:txBody>
-      </p:sp>
-      <p:sp>
-        <p:nvSpPr>
-          <p:cNvPr id="15" name="TextBox 14"/>
-          <p:cNvSpPr txBox="1"/>
-          <p:nvPr/>
-        </p:nvSpPr>
-        <p:spPr>
-          <a:xfrm>
-            <a:off x="3364992" y="3310128"/>
-            <a:ext cx="4206240" cy="338328"/>
-          </a:xfrm>
-          <a:prstGeom prst="rect">
-            <a:avLst/>
-          </a:prstGeom>
-          <a:noFill/>
-        </p:spPr>
-        <p:txBody>
-          <a:bodyPr wrap="square" anchor="ctr" lIns="0" rIns="0" tIns="0" bIns="0">
-            <a:spAutoFit/>
-          </a:bodyPr>
-          <a:lstStyle/>
-          <a:p>
-            <a:pPr>
-              <a:defRPr sz="1200" b="0">
-                <a:solidFill>
-                  <a:srgbClr val="565E5C"/>
-                </a:solidFill>
-                <a:latin typeface="Aptos"/>
-              </a:defRPr>
-            </a:pPr>
-            <a:r>
-              <a:t>Comparable statements and cutoff-dated signals</a:t>
-            </a:r>
-          </a:p>
-        </p:txBody>
-      </p:sp>
-      <p:sp>
-        <p:nvSpPr>
-          <p:cNvPr id="16" name="Rounded Rectangle 15"/>
+              <a:t>Check source URL, publication date, completeness, and ISIN.</a:t>
+            </a:r>
+          </a:p>
+        </p:txBody>
+      </p:sp>
+      <p:sp>
+        <p:nvSpPr>
+          <p:cNvPr id="14" name="Rounded Rectangle 13"/>
           <p:cNvSpPr/>
           <p:nvPr/>
         </p:nvSpPr>
         <p:spPr>
           <a:xfrm>
-            <a:off x="566928" y="4005072"/>
-            <a:ext cx="7360920" cy="658368"/>
+            <a:off x="585216" y="3264408"/>
+            <a:ext cx="4718304" cy="859536"/>
           </a:xfrm>
           <a:prstGeom prst="roundRect">
             <a:avLst>
-              <a:gd name="adj" fmla="val 8000"/>
+              <a:gd name="adj" fmla="val 6000"/>
             </a:avLst>
           </a:prstGeom>
           <a:solidFill>
@@ -6049,7 +6806,7 @@
           </a:solidFill>
           <a:ln w="10160">
             <a:solidFill>
-              <a:srgbClr val="D8DCD8"/>
+              <a:srgbClr val="CDD8D1"/>
             </a:solidFill>
           </a:ln>
         </p:spPr>
@@ -6077,135 +6834,25 @@
       </p:sp>
       <p:sp>
         <p:nvSpPr>
-          <p:cNvPr id="17" name="TextBox 16"/>
-          <p:cNvSpPr txBox="1"/>
-          <p:nvPr/>
-        </p:nvSpPr>
-        <p:spPr>
-          <a:xfrm>
-            <a:off x="749808" y="4114800"/>
-            <a:ext cx="512064" cy="384048"/>
-          </a:xfrm>
-          <a:prstGeom prst="rect">
-            <a:avLst/>
-          </a:prstGeom>
-          <a:noFill/>
-        </p:spPr>
-        <p:txBody>
-          <a:bodyPr wrap="square" anchor="ctr" lIns="0" rIns="0" tIns="0" bIns="0">
-            <a:spAutoFit/>
-          </a:bodyPr>
-          <a:lstStyle/>
-          <a:p>
-            <a:pPr>
-              <a:defRPr sz="1800" b="1">
-                <a:solidFill>
-                  <a:srgbClr val="215E4E"/>
-                </a:solidFill>
-                <a:latin typeface="Aptos"/>
-              </a:defRPr>
-            </a:pPr>
-            <a:r>
-              <a:t>03</a:t>
-            </a:r>
-          </a:p>
-        </p:txBody>
-      </p:sp>
-      <p:sp>
-        <p:nvSpPr>
-          <p:cNvPr id="18" name="TextBox 17"/>
-          <p:cNvSpPr txBox="1"/>
-          <p:nvPr/>
-        </p:nvSpPr>
-        <p:spPr>
-          <a:xfrm>
-            <a:off x="1417320" y="4123944"/>
-            <a:ext cx="1965960" cy="365760"/>
-          </a:xfrm>
-          <a:prstGeom prst="rect">
-            <a:avLst/>
-          </a:prstGeom>
-          <a:noFill/>
-        </p:spPr>
-        <p:txBody>
-          <a:bodyPr wrap="square" anchor="ctr" lIns="0" rIns="0" tIns="0" bIns="0">
-            <a:spAutoFit/>
-          </a:bodyPr>
-          <a:lstStyle/>
-          <a:p>
-            <a:pPr>
-              <a:defRPr sz="1500" b="1">
-                <a:solidFill>
-                  <a:srgbClr val="181B1B"/>
-                </a:solidFill>
-                <a:latin typeface="Aptos"/>
-              </a:defRPr>
-            </a:pPr>
-            <a:r>
-              <a:t>Train &amp; compare</a:t>
-            </a:r>
-          </a:p>
-        </p:txBody>
-      </p:sp>
-      <p:sp>
-        <p:nvSpPr>
-          <p:cNvPr id="19" name="TextBox 18"/>
-          <p:cNvSpPr txBox="1"/>
-          <p:nvPr/>
-        </p:nvSpPr>
-        <p:spPr>
-          <a:xfrm>
-            <a:off x="3364992" y="4133087"/>
-            <a:ext cx="4206240" cy="338328"/>
-          </a:xfrm>
-          <a:prstGeom prst="rect">
-            <a:avLst/>
-          </a:prstGeom>
-          <a:noFill/>
-        </p:spPr>
-        <p:txBody>
-          <a:bodyPr wrap="square" anchor="ctr" lIns="0" rIns="0" tIns="0" bIns="0">
-            <a:spAutoFit/>
-          </a:bodyPr>
-          <a:lstStyle/>
-          <a:p>
-            <a:pPr>
-              <a:defRPr sz="1200" b="0">
-                <a:solidFill>
-                  <a:srgbClr val="565E5C"/>
-                </a:solidFill>
-                <a:latin typeface="Aptos"/>
-              </a:defRPr>
-            </a:pPr>
-            <a:r>
-              <a:t>Logistic model; frequency and sector baselines</a:t>
-            </a:r>
-          </a:p>
-        </p:txBody>
-      </p:sp>
-      <p:sp>
-        <p:nvSpPr>
-          <p:cNvPr id="20" name="Rounded Rectangle 19"/>
+          <p:cNvPr id="15" name="Rounded Rectangle 14"/>
           <p:cNvSpPr/>
           <p:nvPr/>
         </p:nvSpPr>
         <p:spPr>
           <a:xfrm>
-            <a:off x="566928" y="4828032"/>
-            <a:ext cx="7360920" cy="658368"/>
+            <a:off x="740664" y="3483863"/>
+            <a:ext cx="420624" cy="329184"/>
           </a:xfrm>
           <a:prstGeom prst="roundRect">
             <a:avLst>
-              <a:gd name="adj" fmla="val 8000"/>
+              <a:gd name="adj" fmla="val 6000"/>
             </a:avLst>
           </a:prstGeom>
           <a:solidFill>
-            <a:srgbClr val="E9F1EC"/>
+            <a:srgbClr val="E5F2EB"/>
           </a:solidFill>
-          <a:ln w="10160">
-            <a:solidFill>
-              <a:srgbClr val="D8DCD8"/>
-            </a:solidFill>
+          <a:ln>
+            <a:noFill/>
           </a:ln>
         </p:spPr>
         <p:style>
@@ -6232,14 +6879,14 @@
       </p:sp>
       <p:sp>
         <p:nvSpPr>
-          <p:cNvPr id="21" name="TextBox 20"/>
+          <p:cNvPr id="16" name="TextBox 15"/>
           <p:cNvSpPr txBox="1"/>
           <p:nvPr/>
         </p:nvSpPr>
         <p:spPr>
           <a:xfrm>
-            <a:off x="749808" y="4937760"/>
-            <a:ext cx="512064" cy="384048"/>
+            <a:off x="850392" y="3497579"/>
+            <a:ext cx="201168" cy="292608"/>
           </a:xfrm>
           <a:prstGeom prst="rect">
             <a:avLst/>
@@ -6247,35 +6894,35 @@
           <a:noFill/>
         </p:spPr>
         <p:txBody>
-          <a:bodyPr wrap="square" anchor="ctr" lIns="0" rIns="0" tIns="0" bIns="0">
+          <a:bodyPr wrap="square" lIns="0" rIns="0" tIns="0" bIns="0" anchor="ctr">
             <a:spAutoFit/>
           </a:bodyPr>
           <a:lstStyle/>
           <a:p>
             <a:pPr>
-              <a:defRPr sz="1800" b="1">
-                <a:solidFill>
-                  <a:srgbClr val="215E4E"/>
+              <a:defRPr sz="1000" b="1">
+                <a:solidFill>
+                  <a:srgbClr val="13664E"/>
                 </a:solidFill>
                 <a:latin typeface="Aptos"/>
               </a:defRPr>
             </a:pPr>
             <a:r>
-              <a:t>04</a:t>
-            </a:r>
-          </a:p>
-        </p:txBody>
-      </p:sp>
-      <p:sp>
-        <p:nvSpPr>
-          <p:cNvPr id="22" name="TextBox 21"/>
+              <a:t>02</a:t>
+            </a:r>
+          </a:p>
+        </p:txBody>
+      </p:sp>
+      <p:sp>
+        <p:nvSpPr>
+          <p:cNvPr id="17" name="TextBox 16"/>
           <p:cNvSpPr txBox="1"/>
           <p:nvPr/>
         </p:nvSpPr>
         <p:spPr>
           <a:xfrm>
-            <a:off x="1417320" y="4946904"/>
-            <a:ext cx="1965960" cy="365760"/>
+            <a:off x="1298448" y="3410712"/>
+            <a:ext cx="3785616" cy="246888"/>
           </a:xfrm>
           <a:prstGeom prst="rect">
             <a:avLst/>
@@ -6283,7 +6930,7 @@
           <a:noFill/>
         </p:spPr>
         <p:txBody>
-          <a:bodyPr wrap="square" anchor="ctr" lIns="0" rIns="0" tIns="0" bIns="0">
+          <a:bodyPr wrap="square" lIns="0" rIns="0" tIns="0" bIns="0" anchor="ctr">
             <a:spAutoFit/>
           </a:bodyPr>
           <a:lstStyle/>
@@ -6291,27 +6938,27 @@
             <a:pPr>
               <a:defRPr sz="1500" b="1">
                 <a:solidFill>
-                  <a:srgbClr val="181B1B"/>
+                  <a:srgbClr val="18221F"/>
                 </a:solidFill>
                 <a:latin typeface="Aptos"/>
               </a:defRPr>
             </a:pPr>
             <a:r>
-              <a:t>Explain &amp; review</a:t>
-            </a:r>
-          </a:p>
-        </p:txBody>
-      </p:sp>
-      <p:sp>
-        <p:nvSpPr>
-          <p:cNvPr id="23" name="TextBox 22"/>
+              <a:t>Rank with an inspectable model</a:t>
+            </a:r>
+          </a:p>
+        </p:txBody>
+      </p:sp>
+      <p:sp>
+        <p:nvSpPr>
+          <p:cNvPr id="18" name="TextBox 17"/>
           <p:cNvSpPr txBox="1"/>
           <p:nvPr/>
         </p:nvSpPr>
         <p:spPr>
           <a:xfrm>
-            <a:off x="3364992" y="4956048"/>
-            <a:ext cx="4206240" cy="338328"/>
+            <a:off x="1298448" y="3703320"/>
+            <a:ext cx="3785616" cy="283464"/>
           </a:xfrm>
           <a:prstGeom prst="rect">
             <a:avLst/>
@@ -6319,47 +6966,47 @@
           <a:noFill/>
         </p:spPr>
         <p:txBody>
-          <a:bodyPr wrap="square" anchor="ctr" lIns="0" rIns="0" tIns="0" bIns="0">
+          <a:bodyPr wrap="square" lIns="0" rIns="0" tIns="0" bIns="0" anchor="ctr">
             <a:spAutoFit/>
           </a:bodyPr>
           <a:lstStyle/>
           <a:p>
             <a:pPr>
-              <a:defRPr sz="1200" b="0">
-                <a:solidFill>
-                  <a:srgbClr val="565E5C"/>
+              <a:defRPr sz="1100" b="0">
+                <a:solidFill>
+                  <a:srgbClr val="4E5C56"/>
                 </a:solidFill>
                 <a:latin typeface="Aptos"/>
               </a:defRPr>
             </a:pPr>
             <a:r>
-              <a:t>Ranked candidates, evidence, walk-forward and holdout</a:t>
-            </a:r>
-          </a:p>
-        </p:txBody>
-      </p:sp>
-      <p:sp>
-        <p:nvSpPr>
-          <p:cNvPr id="24" name="Rounded Rectangle 23"/>
+              <a:t>Logistic classifier uses prior holdings and market signals.</a:t>
+            </a:r>
+          </a:p>
+        </p:txBody>
+      </p:sp>
+      <p:sp>
+        <p:nvSpPr>
+          <p:cNvPr id="19" name="Rounded Rectangle 18"/>
           <p:cNvSpPr/>
           <p:nvPr/>
         </p:nvSpPr>
         <p:spPr>
           <a:xfrm>
-            <a:off x="8165592" y="2359152"/>
-            <a:ext cx="3447288" cy="3145536"/>
+            <a:off x="585216" y="4251960"/>
+            <a:ext cx="4718304" cy="859536"/>
           </a:xfrm>
           <a:prstGeom prst="roundRect">
             <a:avLst>
-              <a:gd name="adj" fmla="val 8000"/>
+              <a:gd name="adj" fmla="val 6000"/>
             </a:avLst>
           </a:prstGeom>
           <a:solidFill>
-            <a:srgbClr val="E9F1EC"/>
+            <a:srgbClr val="FFFFFF"/>
           </a:solidFill>
           <a:ln w="10160">
             <a:solidFill>
-              <a:srgbClr val="D8DCD8"/>
+              <a:srgbClr val="CDD8D1"/>
             </a:solidFill>
           </a:ln>
         </p:spPr>
@@ -6387,14 +7034,212 @@
       </p:sp>
       <p:sp>
         <p:nvSpPr>
+          <p:cNvPr id="20" name="Rounded Rectangle 19"/>
+          <p:cNvSpPr/>
+          <p:nvPr/>
+        </p:nvSpPr>
+        <p:spPr>
+          <a:xfrm>
+            <a:off x="740664" y="4471416"/>
+            <a:ext cx="420624" cy="329184"/>
+          </a:xfrm>
+          <a:prstGeom prst="roundRect">
+            <a:avLst>
+              <a:gd name="adj" fmla="val 6000"/>
+            </a:avLst>
+          </a:prstGeom>
+          <a:solidFill>
+            <a:srgbClr val="E5F2EB"/>
+          </a:solidFill>
+          <a:ln>
+            <a:noFill/>
+          </a:ln>
+        </p:spPr>
+        <p:style>
+          <a:lnRef idx="1">
+            <a:schemeClr val="accent1"/>
+          </a:lnRef>
+          <a:fillRef idx="3">
+            <a:schemeClr val="accent1"/>
+          </a:fillRef>
+          <a:effectRef idx="2">
+            <a:schemeClr val="accent1"/>
+          </a:effectRef>
+          <a:fontRef idx="minor">
+            <a:schemeClr val="lt1"/>
+          </a:fontRef>
+        </p:style>
+        <p:txBody>
+          <a:bodyPr rtlCol="0" anchor="ctr"/>
+          <a:lstStyle/>
+          <a:p>
+            <a:pPr algn="ctr"/>
+          </a:p>
+        </p:txBody>
+      </p:sp>
+      <p:sp>
+        <p:nvSpPr>
+          <p:cNvPr id="21" name="TextBox 20"/>
+          <p:cNvSpPr txBox="1"/>
+          <p:nvPr/>
+        </p:nvSpPr>
+        <p:spPr>
+          <a:xfrm>
+            <a:off x="850392" y="4485132"/>
+            <a:ext cx="201168" cy="292608"/>
+          </a:xfrm>
+          <a:prstGeom prst="rect">
+            <a:avLst/>
+          </a:prstGeom>
+          <a:noFill/>
+        </p:spPr>
+        <p:txBody>
+          <a:bodyPr wrap="square" lIns="0" rIns="0" tIns="0" bIns="0" anchor="ctr">
+            <a:spAutoFit/>
+          </a:bodyPr>
+          <a:lstStyle/>
+          <a:p>
+            <a:pPr>
+              <a:defRPr sz="1000" b="1">
+                <a:solidFill>
+                  <a:srgbClr val="13664E"/>
+                </a:solidFill>
+                <a:latin typeface="Aptos"/>
+              </a:defRPr>
+            </a:pPr>
+            <a:r>
+              <a:t>03</a:t>
+            </a:r>
+          </a:p>
+        </p:txBody>
+      </p:sp>
+      <p:sp>
+        <p:nvSpPr>
+          <p:cNvPr id="22" name="TextBox 21"/>
+          <p:cNvSpPr txBox="1"/>
+          <p:nvPr/>
+        </p:nvSpPr>
+        <p:spPr>
+          <a:xfrm>
+            <a:off x="1298448" y="4398264"/>
+            <a:ext cx="3785616" cy="246888"/>
+          </a:xfrm>
+          <a:prstGeom prst="rect">
+            <a:avLst/>
+          </a:prstGeom>
+          <a:noFill/>
+        </p:spPr>
+        <p:txBody>
+          <a:bodyPr wrap="square" lIns="0" rIns="0" tIns="0" bIns="0" anchor="ctr">
+            <a:spAutoFit/>
+          </a:bodyPr>
+          <a:lstStyle/>
+          <a:p>
+            <a:pPr>
+              <a:defRPr sz="1500" b="1">
+                <a:solidFill>
+                  <a:srgbClr val="18221F"/>
+                </a:solidFill>
+                <a:latin typeface="Aptos"/>
+              </a:defRPr>
+            </a:pPr>
+            <a:r>
+              <a:t>Evaluate on later periods</a:t>
+            </a:r>
+          </a:p>
+        </p:txBody>
+      </p:sp>
+      <p:sp>
+        <p:nvSpPr>
+          <p:cNvPr id="23" name="TextBox 22"/>
+          <p:cNvSpPr txBox="1"/>
+          <p:nvPr/>
+        </p:nvSpPr>
+        <p:spPr>
+          <a:xfrm>
+            <a:off x="1298448" y="4690872"/>
+            <a:ext cx="3785616" cy="283464"/>
+          </a:xfrm>
+          <a:prstGeom prst="rect">
+            <a:avLst/>
+          </a:prstGeom>
+          <a:noFill/>
+        </p:spPr>
+        <p:txBody>
+          <a:bodyPr wrap="square" lIns="0" rIns="0" tIns="0" bIns="0" anchor="ctr">
+            <a:spAutoFit/>
+          </a:bodyPr>
+          <a:lstStyle/>
+          <a:p>
+            <a:pPr>
+              <a:defRPr sz="1100" b="0">
+                <a:solidFill>
+                  <a:srgbClr val="4E5C56"/>
+                </a:solidFill>
+                <a:latin typeface="Aptos"/>
+              </a:defRPr>
+            </a:pPr>
+            <a:r>
+              <a:t>Walk-forward checks and final holdout versus simple baselines.</a:t>
+            </a:r>
+          </a:p>
+        </p:txBody>
+      </p:sp>
+      <p:sp>
+        <p:nvSpPr>
+          <p:cNvPr id="24" name="Rounded Rectangle 23"/>
+          <p:cNvSpPr/>
+          <p:nvPr/>
+        </p:nvSpPr>
+        <p:spPr>
+          <a:xfrm>
+            <a:off x="585216" y="5294376"/>
+            <a:ext cx="4718304" cy="658368"/>
+          </a:xfrm>
+          <a:prstGeom prst="roundRect">
+            <a:avLst>
+              <a:gd name="adj" fmla="val 6000"/>
+            </a:avLst>
+          </a:prstGeom>
+          <a:solidFill>
+            <a:srgbClr val="E5F2EB"/>
+          </a:solidFill>
+          <a:ln>
+            <a:noFill/>
+          </a:ln>
+        </p:spPr>
+        <p:style>
+          <a:lnRef idx="1">
+            <a:schemeClr val="accent1"/>
+          </a:lnRef>
+          <a:fillRef idx="3">
+            <a:schemeClr val="accent1"/>
+          </a:fillRef>
+          <a:effectRef idx="2">
+            <a:schemeClr val="accent1"/>
+          </a:effectRef>
+          <a:fontRef idx="minor">
+            <a:schemeClr val="lt1"/>
+          </a:fontRef>
+        </p:style>
+        <p:txBody>
+          <a:bodyPr rtlCol="0" anchor="ctr"/>
+          <a:lstStyle/>
+          <a:p>
+            <a:pPr algn="ctr"/>
+          </a:p>
+        </p:txBody>
+      </p:sp>
+      <p:sp>
+        <p:nvSpPr>
           <p:cNvPr id="25" name="TextBox 24"/>
           <p:cNvSpPr txBox="1"/>
           <p:nvPr/>
         </p:nvSpPr>
         <p:spPr>
           <a:xfrm>
-            <a:off x="8385048" y="2606040"/>
-            <a:ext cx="3017520" cy="256032"/>
+            <a:off x="758952" y="5413248"/>
+            <a:ext cx="4343400" cy="438912"/>
           </a:xfrm>
           <a:prstGeom prst="rect">
             <a:avLst/>
@@ -6402,35 +7247,151 @@
           <a:noFill/>
         </p:spPr>
         <p:txBody>
-          <a:bodyPr wrap="square" lIns="0" rIns="0" tIns="0" bIns="0">
+          <a:bodyPr wrap="square" lIns="0" rIns="0" tIns="0" bIns="0" anchor="ctr">
             <a:spAutoFit/>
           </a:bodyPr>
           <a:lstStyle/>
           <a:p>
             <a:pPr>
-              <a:defRPr sz="1000" b="1">
-                <a:solidFill>
-                  <a:srgbClr val="215E4E"/>
+              <a:defRPr sz="1100" b="0">
+                <a:solidFill>
+                  <a:srgbClr val="13664E"/>
                 </a:solidFill>
                 <a:latin typeface="Aptos"/>
               </a:defRPr>
             </a:pPr>
             <a:r>
-              <a:t>OPTIONAL AI EXTRACTION</a:t>
-            </a:r>
-          </a:p>
-        </p:txBody>
-      </p:sp>
-      <p:sp>
-        <p:nvSpPr>
-          <p:cNvPr id="26" name="TextBox 25"/>
+              <a:t>Optional LLM: grounded facts from supplied excerpts; not configured in this demo.</a:t>
+            </a:r>
+          </a:p>
+        </p:txBody>
+      </p:sp>
+      <p:sp>
+        <p:nvSpPr>
+          <p:cNvPr id="26" name="Rounded Rectangle 25"/>
+          <p:cNvSpPr/>
+          <p:nvPr/>
+        </p:nvSpPr>
+        <p:spPr>
+          <a:xfrm>
+            <a:off x="5559552" y="2249424"/>
+            <a:ext cx="6071616" cy="3081528"/>
+          </a:xfrm>
+          <a:prstGeom prst="roundRect">
+            <a:avLst>
+              <a:gd name="adj" fmla="val 6000"/>
+            </a:avLst>
+          </a:prstGeom>
+          <a:solidFill>
+            <a:srgbClr val="FFFFFF"/>
+          </a:solidFill>
+          <a:ln w="10160">
+            <a:solidFill>
+              <a:srgbClr val="CDD8D1"/>
+            </a:solidFill>
+          </a:ln>
+        </p:spPr>
+        <p:style>
+          <a:lnRef idx="1">
+            <a:schemeClr val="accent1"/>
+          </a:lnRef>
+          <a:fillRef idx="3">
+            <a:schemeClr val="accent1"/>
+          </a:fillRef>
+          <a:effectRef idx="2">
+            <a:schemeClr val="accent1"/>
+          </a:effectRef>
+          <a:fontRef idx="minor">
+            <a:schemeClr val="lt1"/>
+          </a:fontRef>
+        </p:style>
+        <p:txBody>
+          <a:bodyPr rtlCol="0" anchor="ctr"/>
+          <a:lstStyle/>
+          <a:p>
+            <a:pPr algn="ctr"/>
+          </a:p>
+        </p:txBody>
+      </p:sp>
+      <p:pic>
+        <p:nvPicPr>
+          <p:cNvPr id="27" name="Riskora UI screenshot: holdout-table.png" descr="holdout-table.png"/>
+          <p:cNvPicPr>
+            <a:picLocks noChangeAspect="1"/>
+          </p:cNvPicPr>
+          <p:nvPr/>
+        </p:nvPicPr>
+        <p:blipFill>
+          <a:blip r:embed="rId2"/>
+          <a:stretch>
+            <a:fillRect/>
+          </a:stretch>
+        </p:blipFill>
+        <p:spPr>
+          <a:xfrm>
+            <a:off x="5596128" y="2286000"/>
+            <a:ext cx="5998464" cy="3008376"/>
+          </a:xfrm>
+          <a:prstGeom prst="rect">
+            <a:avLst/>
+          </a:prstGeom>
+        </p:spPr>
+      </p:pic>
+      <p:sp>
+        <p:nvSpPr>
+          <p:cNvPr id="28" name="Rounded Rectangle 27"/>
+          <p:cNvSpPr/>
+          <p:nvPr/>
+        </p:nvSpPr>
+        <p:spPr>
+          <a:xfrm>
+            <a:off x="5596128" y="5431536"/>
+            <a:ext cx="5998464" cy="521207"/>
+          </a:xfrm>
+          <a:prstGeom prst="roundRect">
+            <a:avLst>
+              <a:gd name="adj" fmla="val 6000"/>
+            </a:avLst>
+          </a:prstGeom>
+          <a:solidFill>
+            <a:srgbClr val="F1F5F1"/>
+          </a:solidFill>
+          <a:ln>
+            <a:noFill/>
+          </a:ln>
+        </p:spPr>
+        <p:style>
+          <a:lnRef idx="1">
+            <a:schemeClr val="accent1"/>
+          </a:lnRef>
+          <a:fillRef idx="3">
+            <a:schemeClr val="accent1"/>
+          </a:fillRef>
+          <a:effectRef idx="2">
+            <a:schemeClr val="accent1"/>
+          </a:effectRef>
+          <a:fontRef idx="minor">
+            <a:schemeClr val="lt1"/>
+          </a:fontRef>
+        </p:style>
+        <p:txBody>
+          <a:bodyPr rtlCol="0" anchor="ctr"/>
+          <a:lstStyle/>
+          <a:p>
+            <a:pPr algn="ctr"/>
+          </a:p>
+        </p:txBody>
+      </p:sp>
+      <p:sp>
+        <p:nvSpPr>
+          <p:cNvPr id="29" name="TextBox 28"/>
           <p:cNvSpPr txBox="1"/>
           <p:nvPr/>
         </p:nvSpPr>
         <p:spPr>
           <a:xfrm>
-            <a:off x="8385048" y="3081528"/>
-            <a:ext cx="2980944" cy="914400"/>
+            <a:off x="5779008" y="5541264"/>
+            <a:ext cx="5660136" cy="301752"/>
           </a:xfrm>
           <a:prstGeom prst="rect">
             <a:avLst/>
@@ -6438,93 +7399,21 @@
           <a:noFill/>
         </p:spPr>
         <p:txBody>
-          <a:bodyPr wrap="square" anchor="ctr" lIns="0" rIns="0" tIns="0" bIns="0">
+          <a:bodyPr wrap="square" lIns="0" rIns="0" tIns="0" bIns="0" anchor="ctr">
             <a:spAutoFit/>
           </a:bodyPr>
           <a:lstStyle/>
           <a:p>
             <a:pPr>
-              <a:defRPr sz="1800" b="1">
-                <a:solidFill>
-                  <a:srgbClr val="181B1B"/>
+              <a:defRPr sz="1100" b="1">
+                <a:solidFill>
+                  <a:srgbClr val="18221F"/>
                 </a:solidFill>
                 <a:latin typeface="Aptos"/>
               </a:defRPr>
             </a:pPr>
             <a:r>
-              <a:t>User-supplied event excerpt → verbatim checked facts</a:t>
-            </a:r>
-          </a:p>
-        </p:txBody>
-      </p:sp>
-      <p:sp>
-        <p:nvSpPr>
-          <p:cNvPr id="27" name="TextBox 26"/>
-          <p:cNvSpPr txBox="1"/>
-          <p:nvPr/>
-        </p:nvSpPr>
-        <p:spPr>
-          <a:xfrm>
-            <a:off x="8385048" y="4416552"/>
-            <a:ext cx="2907792" cy="685800"/>
-          </a:xfrm>
-          <a:prstGeom prst="rect">
-            <a:avLst/>
-          </a:prstGeom>
-          <a:noFill/>
-        </p:spPr>
-        <p:txBody>
-          <a:bodyPr wrap="square" anchor="ctr" lIns="0" rIns="0" tIns="0" bIns="0">
-            <a:spAutoFit/>
-          </a:bodyPr>
-          <a:lstStyle/>
-          <a:p>
-            <a:pPr>
-              <a:defRPr sz="1300" b="0">
-                <a:solidFill>
-                  <a:srgbClr val="565E5C"/>
-                </a:solidFill>
-                <a:latin typeface="Aptos"/>
-              </a:defRPr>
-            </a:pPr>
-            <a:r>
-              <a:t>No hosted LLM is required or configured by default.</a:t>
-            </a:r>
-          </a:p>
-        </p:txBody>
-      </p:sp>
-      <p:sp>
-        <p:nvSpPr>
-          <p:cNvPr id="28" name="TextBox 27"/>
-          <p:cNvSpPr txBox="1"/>
-          <p:nvPr/>
-        </p:nvSpPr>
-        <p:spPr>
-          <a:xfrm>
-            <a:off x="566928" y="5852160"/>
-            <a:ext cx="10972800" cy="384048"/>
-          </a:xfrm>
-          <a:prstGeom prst="rect">
-            <a:avLst/>
-          </a:prstGeom>
-          <a:noFill/>
-        </p:spPr>
-        <p:txBody>
-          <a:bodyPr wrap="square" anchor="ctr" lIns="0" rIns="0" tIns="0" bIns="0">
-            <a:spAutoFit/>
-          </a:bodyPr>
-          <a:lstStyle/>
-          <a:p>
-            <a:pPr>
-              <a:defRPr sz="1200" b="0">
-                <a:solidFill>
-                  <a:srgbClr val="565E5C"/>
-                </a:solidFill>
-                <a:latin typeface="Aptos"/>
-              </a:defRPr>
-            </a:pPr>
-            <a:r>
-              <a:t>Synthetic and imported data are kept in separate source classes. Ranking scores are uncalibrated.</a:t>
+              <a:t>Synthetic holdout only · 14 cases, 2 additions · not real-market accuracy</a:t>
             </a:r>
           </a:p>
         </p:txBody>
@@ -6543,7 +7432,7 @@
     <p:bg>
       <p:bgPr>
         <a:solidFill>
-          <a:srgbClr val="F8F8F6"/>
+          <a:srgbClr val="F7F9F7"/>
         </a:solidFill>
         <a:effectLst/>
       </p:bgPr>
@@ -6563,8 +7452,8 @@
         </p:nvSpPr>
         <p:spPr>
           <a:xfrm>
-            <a:off x="566928" y="338328"/>
-            <a:ext cx="5943600" cy="256032"/>
+            <a:off x="585216" y="228600"/>
+            <a:ext cx="7863840" cy="256032"/>
           </a:xfrm>
           <a:prstGeom prst="rect">
             <a:avLst/>
@@ -6572,7 +7461,7 @@
           <a:noFill/>
         </p:spPr>
         <p:txBody>
-          <a:bodyPr wrap="square" lIns="0" rIns="0" tIns="0" bIns="0">
+          <a:bodyPr wrap="square" lIns="0" rIns="0" tIns="0" bIns="0" anchor="ctr">
             <a:spAutoFit/>
           </a:bodyPr>
           <a:lstStyle/>
@@ -6580,13 +7469,13 @@
             <a:pPr>
               <a:defRPr sz="1000" b="1">
                 <a:solidFill>
-                  <a:srgbClr val="215E4E"/>
+                  <a:srgbClr val="13664E"/>
                 </a:solidFill>
                 <a:latin typeface="Aptos"/>
               </a:defRPr>
             </a:pPr>
             <a:r>
-              <a:t>RISKORA  /  AIBOOMI STARTUP WEEKEND</a:t>
+              <a:t>RISKORA  /  AIBOOMI STARTUP WEEKEND KOCHI</a:t>
             </a:r>
           </a:p>
         </p:txBody>
@@ -6599,8 +7488,8 @@
         </p:nvSpPr>
         <p:spPr>
           <a:xfrm>
-            <a:off x="9326880" y="338328"/>
-            <a:ext cx="2286000" cy="256032"/>
+            <a:off x="9326880" y="228600"/>
+            <a:ext cx="2258568" cy="256032"/>
           </a:xfrm>
           <a:prstGeom prst="rect">
             <a:avLst/>
@@ -6608,21 +7497,21 @@
           <a:noFill/>
         </p:spPr>
         <p:txBody>
-          <a:bodyPr wrap="square" lIns="0" rIns="0" tIns="0" bIns="0">
+          <a:bodyPr wrap="square" lIns="0" rIns="0" tIns="0" bIns="0" anchor="ctr">
             <a:spAutoFit/>
           </a:bodyPr>
           <a:lstStyle/>
           <a:p>
-            <a:pPr>
+            <a:pPr algn="r">
               <a:defRPr sz="1000" b="0">
                 <a:solidFill>
-                  <a:srgbClr val="565E5C"/>
+                  <a:srgbClr val="4E5C56"/>
                 </a:solidFill>
                 <a:latin typeface="Aptos"/>
               </a:defRPr>
             </a:pPr>
             <a:r>
-              <a:t>VALUE &amp; GTM</a:t>
+              <a:t>VALUE AND VIABILITY</a:t>
             </a:r>
           </a:p>
         </p:txBody>
@@ -6635,14 +7524,14 @@
         </p:nvSpPr>
         <p:spPr>
           <a:xfrm>
-            <a:off x="566928" y="758952"/>
-            <a:ext cx="11045952" cy="10972"/>
+            <a:off x="585216" y="667512"/>
+            <a:ext cx="11018520" cy="14630"/>
           </a:xfrm>
           <a:prstGeom prst="rect">
             <a:avLst/>
           </a:prstGeom>
           <a:solidFill>
-            <a:srgbClr val="D8DCD8"/>
+            <a:srgbClr val="CDD8D1"/>
           </a:solidFill>
           <a:ln>
             <a:noFill/>
@@ -6678,8 +7567,8 @@
         </p:nvSpPr>
         <p:spPr>
           <a:xfrm>
-            <a:off x="566928" y="1024128"/>
-            <a:ext cx="10972800" cy="749808"/>
+            <a:off x="585216" y="896112"/>
+            <a:ext cx="10972800" cy="640080"/>
           </a:xfrm>
           <a:prstGeom prst="rect">
             <a:avLst/>
@@ -6687,7 +7576,7 @@
           <a:noFill/>
         </p:spPr>
         <p:txBody>
-          <a:bodyPr wrap="square" anchor="ctr" lIns="0" rIns="0" tIns="0" bIns="0">
+          <a:bodyPr wrap="square" lIns="0" rIns="0" tIns="0" bIns="0" anchor="ctr">
             <a:spAutoFit/>
           </a:bodyPr>
           <a:lstStyle/>
@@ -6695,13 +7584,13 @@
             <a:pPr>
               <a:defRPr sz="3000" b="1">
                 <a:solidFill>
-                  <a:srgbClr val="181B1B"/>
+                  <a:srgbClr val="18221F"/>
                 </a:solidFill>
                 <a:latin typeface="Aptos Display"/>
               </a:defRPr>
             </a:pPr>
             <a:r>
-              <a:t>A research workflow hypothesis to test with users.</a:t>
+              <a:t>Test an analyst workflow before setting a price.</a:t>
             </a:r>
           </a:p>
         </p:txBody>
@@ -6714,8 +7603,8 @@
         </p:nvSpPr>
         <p:spPr>
           <a:xfrm>
-            <a:off x="566928" y="1773936"/>
-            <a:ext cx="10927080" cy="411480"/>
+            <a:off x="585216" y="1600200"/>
+            <a:ext cx="10972800" cy="384048"/>
           </a:xfrm>
           <a:prstGeom prst="rect">
             <a:avLst/>
@@ -6723,35 +7612,78 @@
           <a:noFill/>
         </p:spPr>
         <p:txBody>
-          <a:bodyPr wrap="square" anchor="ctr" lIns="0" rIns="0" tIns="0" bIns="0">
+          <a:bodyPr wrap="square" lIns="0" rIns="0" tIns="0" bIns="0" anchor="ctr">
             <a:spAutoFit/>
           </a:bodyPr>
           <a:lstStyle/>
           <a:p>
             <a:pPr>
-              <a:defRPr sz="1500" b="0">
-                <a:solidFill>
-                  <a:srgbClr val="565E5C"/>
+              <a:defRPr sz="1400" b="0">
+                <a:solidFill>
+                  <a:srgbClr val="4E5C56"/>
                 </a:solidFill>
                 <a:latin typeface="Aptos"/>
               </a:defRPr>
             </a:pPr>
             <a:r>
-              <a:t>Potential value: less manual sorting and a clearer audit trail.</a:t>
-            </a:r>
-          </a:p>
-        </p:txBody>
-      </p:sp>
-      <p:sp>
-        <p:nvSpPr>
-          <p:cNvPr id="7" name="TextBox 6"/>
+              <a:t>Potential value is less manual sorting and a clearer audit trail for research decisions.</a:t>
+            </a:r>
+          </a:p>
+        </p:txBody>
+      </p:sp>
+      <p:sp>
+        <p:nvSpPr>
+          <p:cNvPr id="7" name="Rectangle 6"/>
+          <p:cNvSpPr/>
+          <p:nvPr/>
+        </p:nvSpPr>
+        <p:spPr>
+          <a:xfrm>
+            <a:off x="585216" y="6355080"/>
+            <a:ext cx="11018520" cy="14630"/>
+          </a:xfrm>
+          <a:prstGeom prst="rect">
+            <a:avLst/>
+          </a:prstGeom>
+          <a:solidFill>
+            <a:srgbClr val="CDD8D1"/>
+          </a:solidFill>
+          <a:ln>
+            <a:noFill/>
+          </a:ln>
+        </p:spPr>
+        <p:style>
+          <a:lnRef idx="1">
+            <a:schemeClr val="accent1"/>
+          </a:lnRef>
+          <a:fillRef idx="3">
+            <a:schemeClr val="accent1"/>
+          </a:fillRef>
+          <a:effectRef idx="2">
+            <a:schemeClr val="accent1"/>
+          </a:effectRef>
+          <a:fontRef idx="minor">
+            <a:schemeClr val="lt1"/>
+          </a:fontRef>
+        </p:style>
+        <p:txBody>
+          <a:bodyPr rtlCol="0" anchor="ctr"/>
+          <a:lstStyle/>
+          <a:p>
+            <a:pPr algn="ctr"/>
+          </a:p>
+        </p:txBody>
+      </p:sp>
+      <p:sp>
+        <p:nvSpPr>
+          <p:cNvPr id="8" name="TextBox 7"/>
           <p:cNvSpPr txBox="1"/>
           <p:nvPr/>
         </p:nvSpPr>
         <p:spPr>
           <a:xfrm>
-            <a:off x="10991088" y="6464808"/>
-            <a:ext cx="658368" cy="256032"/>
+            <a:off x="10972800" y="6419088"/>
+            <a:ext cx="621792" cy="201168"/>
           </a:xfrm>
           <a:prstGeom prst="rect">
             <a:avLst/>
@@ -6759,15 +7691,15 @@
           <a:noFill/>
         </p:spPr>
         <p:txBody>
-          <a:bodyPr wrap="square" lIns="0" rIns="0" tIns="0" bIns="0">
+          <a:bodyPr wrap="square" lIns="0" rIns="0" tIns="0" bIns="0" anchor="ctr">
             <a:spAutoFit/>
           </a:bodyPr>
           <a:lstStyle/>
           <a:p>
-            <a:pPr>
+            <a:pPr algn="r">
               <a:defRPr sz="900" b="0">
                 <a:solidFill>
-                  <a:srgbClr val="565E5C"/>
+                  <a:srgbClr val="4E5C56"/>
                 </a:solidFill>
                 <a:latin typeface="Aptos"/>
               </a:defRPr>
@@ -6780,18 +7712,18 @@
       </p:sp>
       <p:sp>
         <p:nvSpPr>
-          <p:cNvPr id="8" name="Rounded Rectangle 7"/>
+          <p:cNvPr id="9" name="Rounded Rectangle 8"/>
           <p:cNvSpPr/>
           <p:nvPr/>
         </p:nvSpPr>
         <p:spPr>
           <a:xfrm>
-            <a:off x="566928" y="2523744"/>
-            <a:ext cx="3547872" cy="2944368"/>
+            <a:off x="585216" y="2432304"/>
+            <a:ext cx="3557016" cy="2578608"/>
           </a:xfrm>
           <a:prstGeom prst="roundRect">
             <a:avLst>
-              <a:gd name="adj" fmla="val 8000"/>
+              <a:gd name="adj" fmla="val 6000"/>
             </a:avLst>
           </a:prstGeom>
           <a:solidFill>
@@ -6799,7 +7731,7 @@
           </a:solidFill>
           <a:ln w="10160">
             <a:solidFill>
-              <a:srgbClr val="D8DCD8"/>
+              <a:srgbClr val="CDD8D1"/>
             </a:solidFill>
           </a:ln>
         </p:spPr>
@@ -6827,14 +7759,14 @@
       </p:sp>
       <p:sp>
         <p:nvSpPr>
-          <p:cNvPr id="9" name="TextBox 8"/>
+          <p:cNvPr id="10" name="TextBox 9"/>
           <p:cNvSpPr txBox="1"/>
           <p:nvPr/>
         </p:nvSpPr>
         <p:spPr>
           <a:xfrm>
-            <a:off x="786384" y="2752344"/>
-            <a:ext cx="3108960" cy="256032"/>
+            <a:off x="804672" y="2679192"/>
+            <a:ext cx="3090672" cy="256032"/>
           </a:xfrm>
           <a:prstGeom prst="rect">
             <a:avLst/>
@@ -6842,7 +7774,7 @@
           <a:noFill/>
         </p:spPr>
         <p:txBody>
-          <a:bodyPr wrap="square" lIns="0" rIns="0" tIns="0" bIns="0">
+          <a:bodyPr wrap="square" lIns="0" rIns="0" tIns="0" bIns="0" anchor="ctr">
             <a:spAutoFit/>
           </a:bodyPr>
           <a:lstStyle/>
@@ -6850,27 +7782,27 @@
             <a:pPr>
               <a:defRPr sz="1000" b="1">
                 <a:solidFill>
-                  <a:srgbClr val="215E4E"/>
+                  <a:srgbClr val="13664E"/>
                 </a:solidFill>
                 <a:latin typeface="Aptos"/>
               </a:defRPr>
             </a:pPr>
             <a:r>
-              <a:t>USER</a:t>
-            </a:r>
-          </a:p>
-        </p:txBody>
-      </p:sp>
-      <p:sp>
-        <p:nvSpPr>
-          <p:cNvPr id="10" name="TextBox 9"/>
+              <a:t>USER TO INTERVIEW</a:t>
+            </a:r>
+          </a:p>
+        </p:txBody>
+      </p:sp>
+      <p:sp>
+        <p:nvSpPr>
+          <p:cNvPr id="11" name="TextBox 10"/>
           <p:cNvSpPr txBox="1"/>
           <p:nvPr/>
         </p:nvSpPr>
         <p:spPr>
           <a:xfrm>
-            <a:off x="786384" y="3099815"/>
-            <a:ext cx="3108960" cy="566928"/>
+            <a:off x="804672" y="3127248"/>
+            <a:ext cx="3108960" cy="493776"/>
           </a:xfrm>
           <a:prstGeom prst="rect">
             <a:avLst/>
@@ -6878,35 +7810,35 @@
           <a:noFill/>
         </p:spPr>
         <p:txBody>
-          <a:bodyPr wrap="square" anchor="ctr" lIns="0" rIns="0" tIns="0" bIns="0">
+          <a:bodyPr wrap="square" lIns="0" rIns="0" tIns="0" bIns="0" anchor="ctr">
             <a:spAutoFit/>
           </a:bodyPr>
           <a:lstStyle/>
           <a:p>
             <a:pPr>
-              <a:defRPr sz="1900" b="1">
-                <a:solidFill>
-                  <a:srgbClr val="181B1B"/>
+              <a:defRPr sz="2100" b="1">
+                <a:solidFill>
+                  <a:srgbClr val="18221F"/>
                 </a:solidFill>
                 <a:latin typeface="Aptos"/>
               </a:defRPr>
             </a:pPr>
             <a:r>
-              <a:t>Research teams</a:t>
-            </a:r>
-          </a:p>
-        </p:txBody>
-      </p:sp>
-      <p:sp>
-        <p:nvSpPr>
-          <p:cNvPr id="11" name="TextBox 10"/>
+              <a:t>Fund research teams</a:t>
+            </a:r>
+          </a:p>
+        </p:txBody>
+      </p:sp>
+      <p:sp>
+        <p:nvSpPr>
+          <p:cNvPr id="12" name="TextBox 11"/>
           <p:cNvSpPr txBox="1"/>
           <p:nvPr/>
         </p:nvSpPr>
         <p:spPr>
           <a:xfrm>
-            <a:off x="786384" y="3712463"/>
-            <a:ext cx="3108960" cy="1581912"/>
+            <a:off x="804672" y="3813048"/>
+            <a:ext cx="3081528" cy="804672"/>
           </a:xfrm>
           <a:prstGeom prst="rect">
             <a:avLst/>
@@ -6914,7 +7846,7 @@
           <a:noFill/>
         </p:spPr>
         <p:txBody>
-          <a:bodyPr wrap="square" anchor="ctr" lIns="0" rIns="0" tIns="0" bIns="0">
+          <a:bodyPr wrap="square" lIns="0" rIns="0" tIns="0" bIns="0" anchor="ctr">
             <a:spAutoFit/>
           </a:bodyPr>
           <a:lstStyle/>
@@ -6922,31 +7854,31 @@
             <a:pPr>
               <a:defRPr sz="1400" b="0">
                 <a:solidFill>
-                  <a:srgbClr val="565E5C"/>
+                  <a:srgbClr val="4E5C56"/>
                 </a:solidFill>
                 <a:latin typeface="Aptos"/>
               </a:defRPr>
             </a:pPr>
             <a:r>
-              <a:t>Interview analysts and independent research desks that already compare disclosures.</a:t>
-            </a:r>
-          </a:p>
-        </p:txBody>
-      </p:sp>
-      <p:sp>
-        <p:nvSpPr>
-          <p:cNvPr id="12" name="Rounded Rectangle 11"/>
+              <a:t>Start with analysts and independent desks already comparing disclosures.</a:t>
+            </a:r>
+          </a:p>
+        </p:txBody>
+      </p:sp>
+      <p:sp>
+        <p:nvSpPr>
+          <p:cNvPr id="13" name="Rounded Rectangle 12"/>
           <p:cNvSpPr/>
           <p:nvPr/>
         </p:nvSpPr>
         <p:spPr>
           <a:xfrm>
-            <a:off x="4315968" y="2523744"/>
-            <a:ext cx="3547872" cy="2944368"/>
+            <a:off x="4306824" y="2432304"/>
+            <a:ext cx="3557016" cy="2578608"/>
           </a:xfrm>
           <a:prstGeom prst="roundRect">
             <a:avLst>
-              <a:gd name="adj" fmla="val 8000"/>
+              <a:gd name="adj" fmla="val 6000"/>
             </a:avLst>
           </a:prstGeom>
           <a:solidFill>
@@ -6954,7 +7886,7 @@
           </a:solidFill>
           <a:ln w="10160">
             <a:solidFill>
-              <a:srgbClr val="D8DCD8"/>
+              <a:srgbClr val="CDD8D1"/>
             </a:solidFill>
           </a:ln>
         </p:spPr>
@@ -6982,14 +7914,14 @@
       </p:sp>
       <p:sp>
         <p:nvSpPr>
-          <p:cNvPr id="13" name="TextBox 12"/>
+          <p:cNvPr id="14" name="TextBox 13"/>
           <p:cNvSpPr txBox="1"/>
           <p:nvPr/>
         </p:nvSpPr>
         <p:spPr>
           <a:xfrm>
-            <a:off x="4535424" y="2752344"/>
-            <a:ext cx="3108960" cy="256032"/>
+            <a:off x="4526280" y="2679192"/>
+            <a:ext cx="3090672" cy="256032"/>
           </a:xfrm>
           <a:prstGeom prst="rect">
             <a:avLst/>
@@ -6997,7 +7929,7 @@
           <a:noFill/>
         </p:spPr>
         <p:txBody>
-          <a:bodyPr wrap="square" lIns="0" rIns="0" tIns="0" bIns="0">
+          <a:bodyPr wrap="square" lIns="0" rIns="0" tIns="0" bIns="0" anchor="ctr">
             <a:spAutoFit/>
           </a:bodyPr>
           <a:lstStyle/>
@@ -7005,27 +7937,27 @@
             <a:pPr>
               <a:defRPr sz="1000" b="1">
                 <a:solidFill>
-                  <a:srgbClr val="215E4E"/>
+                  <a:srgbClr val="13664E"/>
                 </a:solidFill>
                 <a:latin typeface="Aptos"/>
               </a:defRPr>
             </a:pPr>
             <a:r>
-              <a:t>BUYER HYPOTHESIS</a:t>
-            </a:r>
-          </a:p>
-        </p:txBody>
-      </p:sp>
-      <p:sp>
-        <p:nvSpPr>
-          <p:cNvPr id="14" name="TextBox 13"/>
+              <a:t>PILOT TO RUN</a:t>
+            </a:r>
+          </a:p>
+        </p:txBody>
+      </p:sp>
+      <p:sp>
+        <p:nvSpPr>
+          <p:cNvPr id="15" name="TextBox 14"/>
           <p:cNvSpPr txBox="1"/>
           <p:nvPr/>
         </p:nvSpPr>
         <p:spPr>
           <a:xfrm>
-            <a:off x="4535424" y="3099815"/>
-            <a:ext cx="3108960" cy="566928"/>
+            <a:off x="4526280" y="3127248"/>
+            <a:ext cx="3108960" cy="493776"/>
           </a:xfrm>
           <a:prstGeom prst="rect">
             <a:avLst/>
@@ -7033,35 +7965,35 @@
           <a:noFill/>
         </p:spPr>
         <p:txBody>
-          <a:bodyPr wrap="square" anchor="ctr" lIns="0" rIns="0" tIns="0" bIns="0">
+          <a:bodyPr wrap="square" lIns="0" rIns="0" tIns="0" bIns="0" anchor="ctr">
             <a:spAutoFit/>
           </a:bodyPr>
           <a:lstStyle/>
           <a:p>
             <a:pPr>
-              <a:defRPr sz="1900" b="1">
-                <a:solidFill>
-                  <a:srgbClr val="181B1B"/>
+              <a:defRPr sz="2100" b="1">
+                <a:solidFill>
+                  <a:srgbClr val="18221F"/>
                 </a:solidFill>
                 <a:latin typeface="Aptos"/>
               </a:defRPr>
             </a:pPr>
             <a:r>
-              <a:t>Team license</a:t>
-            </a:r>
-          </a:p>
-        </p:txBody>
-      </p:sp>
-      <p:sp>
-        <p:nvSpPr>
-          <p:cNvPr id="15" name="TextBox 14"/>
+              <a:t>Supervised research</a:t>
+            </a:r>
+          </a:p>
+        </p:txBody>
+      </p:sp>
+      <p:sp>
+        <p:nvSpPr>
+          <p:cNvPr id="16" name="TextBox 15"/>
           <p:cNvSpPr txBox="1"/>
           <p:nvPr/>
         </p:nvSpPr>
         <p:spPr>
           <a:xfrm>
-            <a:off x="4535424" y="3712463"/>
-            <a:ext cx="3108960" cy="1581912"/>
+            <a:off x="4526280" y="3813048"/>
+            <a:ext cx="3081528" cy="804672"/>
           </a:xfrm>
           <a:prstGeom prst="rect">
             <a:avLst/>
@@ -7069,7 +8001,7 @@
           <a:noFill/>
         </p:spPr>
         <p:txBody>
-          <a:bodyPr wrap="square" anchor="ctr" lIns="0" rIns="0" tIns="0" bIns="0">
+          <a:bodyPr wrap="square" lIns="0" rIns="0" tIns="0" bIns="0" anchor="ctr">
             <a:spAutoFit/>
           </a:bodyPr>
           <a:lstStyle/>
@@ -7077,39 +8009,39 @@
             <a:pPr>
               <a:defRPr sz="1400" b="0">
                 <a:solidFill>
-                  <a:srgbClr val="565E5C"/>
+                  <a:srgbClr val="4E5C56"/>
                 </a:solidFill>
                 <a:latin typeface="Aptos"/>
               </a:defRPr>
             </a:pPr>
             <a:r>
-              <a:t>Test whether teams would pay for source tracking, evaluation, and repeatable shortlists.</a:t>
-            </a:r>
-          </a:p>
-        </p:txBody>
-      </p:sp>
-      <p:sp>
-        <p:nvSpPr>
-          <p:cNvPr id="16" name="Rounded Rectangle 15"/>
+              <a:t>Use permissioned historical data; observe how teams inspect the shortlist.</a:t>
+            </a:r>
+          </a:p>
+        </p:txBody>
+      </p:sp>
+      <p:sp>
+        <p:nvSpPr>
+          <p:cNvPr id="17" name="Rounded Rectangle 16"/>
           <p:cNvSpPr/>
           <p:nvPr/>
         </p:nvSpPr>
         <p:spPr>
           <a:xfrm>
-            <a:off x="8065008" y="2523744"/>
-            <a:ext cx="3547872" cy="2944368"/>
+            <a:off x="8028431" y="2432304"/>
+            <a:ext cx="3557016" cy="2578608"/>
           </a:xfrm>
           <a:prstGeom prst="roundRect">
             <a:avLst>
-              <a:gd name="adj" fmla="val 8000"/>
+              <a:gd name="adj" fmla="val 6000"/>
             </a:avLst>
           </a:prstGeom>
           <a:solidFill>
-            <a:srgbClr val="E9F1EC"/>
+            <a:srgbClr val="FFFFFF"/>
           </a:solidFill>
           <a:ln w="10160">
             <a:solidFill>
-              <a:srgbClr val="D8DCD8"/>
+              <a:srgbClr val="CDD8D1"/>
             </a:solidFill>
           </a:ln>
         </p:spPr>
@@ -7137,14 +8069,14 @@
       </p:sp>
       <p:sp>
         <p:nvSpPr>
-          <p:cNvPr id="17" name="TextBox 16"/>
+          <p:cNvPr id="18" name="TextBox 17"/>
           <p:cNvSpPr txBox="1"/>
           <p:nvPr/>
         </p:nvSpPr>
         <p:spPr>
           <a:xfrm>
-            <a:off x="8284464" y="2752344"/>
-            <a:ext cx="3108960" cy="256032"/>
+            <a:off x="8247888" y="2679192"/>
+            <a:ext cx="3090672" cy="256032"/>
           </a:xfrm>
           <a:prstGeom prst="rect">
             <a:avLst/>
@@ -7152,7 +8084,7 @@
           <a:noFill/>
         </p:spPr>
         <p:txBody>
-          <a:bodyPr wrap="square" lIns="0" rIns="0" tIns="0" bIns="0">
+          <a:bodyPr wrap="square" lIns="0" rIns="0" tIns="0" bIns="0" anchor="ctr">
             <a:spAutoFit/>
           </a:bodyPr>
           <a:lstStyle/>
@@ -7160,27 +8092,27 @@
             <a:pPr>
               <a:defRPr sz="1000" b="1">
                 <a:solidFill>
-                  <a:srgbClr val="215E4E"/>
+                  <a:srgbClr val="13664E"/>
                 </a:solidFill>
                 <a:latin typeface="Aptos"/>
               </a:defRPr>
             </a:pPr>
             <a:r>
-              <a:t>FIRST CHANNEL</a:t>
-            </a:r>
-          </a:p>
-        </p:txBody>
-      </p:sp>
-      <p:sp>
-        <p:nvSpPr>
-          <p:cNvPr id="18" name="TextBox 17"/>
+              <a:t>MEASURE</a:t>
+            </a:r>
+          </a:p>
+        </p:txBody>
+      </p:sp>
+      <p:sp>
+        <p:nvSpPr>
+          <p:cNvPr id="19" name="TextBox 18"/>
           <p:cNvSpPr txBox="1"/>
           <p:nvPr/>
         </p:nvSpPr>
         <p:spPr>
           <a:xfrm>
-            <a:off x="8284464" y="3099815"/>
-            <a:ext cx="3108960" cy="566928"/>
+            <a:off x="8247888" y="3127248"/>
+            <a:ext cx="3108960" cy="493776"/>
           </a:xfrm>
           <a:prstGeom prst="rect">
             <a:avLst/>
@@ -7188,35 +8120,35 @@
           <a:noFill/>
         </p:spPr>
         <p:txBody>
-          <a:bodyPr wrap="square" anchor="ctr" lIns="0" rIns="0" tIns="0" bIns="0">
+          <a:bodyPr wrap="square" lIns="0" rIns="0" tIns="0" bIns="0" anchor="ctr">
             <a:spAutoFit/>
           </a:bodyPr>
           <a:lstStyle/>
           <a:p>
             <a:pPr>
-              <a:defRPr sz="1900" b="1">
-                <a:solidFill>
-                  <a:srgbClr val="181B1B"/>
+              <a:defRPr sz="2100" b="1">
+                <a:solidFill>
+                  <a:srgbClr val="18221F"/>
                 </a:solidFill>
                 <a:latin typeface="Aptos"/>
               </a:defRPr>
             </a:pPr>
             <a:r>
-              <a:t>Supervised pilots</a:t>
-            </a:r>
-          </a:p>
-        </p:txBody>
-      </p:sp>
-      <p:sp>
-        <p:nvSpPr>
-          <p:cNvPr id="19" name="TextBox 18"/>
+              <a:t>Time and trust</a:t>
+            </a:r>
+          </a:p>
+        </p:txBody>
+      </p:sp>
+      <p:sp>
+        <p:nvSpPr>
+          <p:cNvPr id="20" name="TextBox 19"/>
           <p:cNvSpPr txBox="1"/>
           <p:nvPr/>
         </p:nvSpPr>
         <p:spPr>
           <a:xfrm>
-            <a:off x="8284464" y="3712463"/>
-            <a:ext cx="3108960" cy="1581912"/>
+            <a:off x="8247888" y="3813048"/>
+            <a:ext cx="3081528" cy="804672"/>
           </a:xfrm>
           <a:prstGeom prst="rect">
             <a:avLst/>
@@ -7224,7 +8156,7 @@
           <a:noFill/>
         </p:spPr>
         <p:txBody>
-          <a:bodyPr wrap="square" anchor="ctr" lIns="0" rIns="0" tIns="0" bIns="0">
+          <a:bodyPr wrap="square" lIns="0" rIns="0" tIns="0" bIns="0" anchor="ctr">
             <a:spAutoFit/>
           </a:bodyPr>
           <a:lstStyle/>
@@ -7232,27 +8164,72 @@
             <a:pPr>
               <a:defRPr sz="1400" b="0">
                 <a:solidFill>
-                  <a:srgbClr val="565E5C"/>
+                  <a:srgbClr val="4E5C56"/>
                 </a:solidFill>
                 <a:latin typeface="Aptos"/>
               </a:defRPr>
             </a:pPr>
             <a:r>
-              <a:t>Observe the workflow with permissioned data before proposing price or scale.</a:t>
-            </a:r>
-          </a:p>
-        </p:txBody>
-      </p:sp>
-      <p:sp>
-        <p:nvSpPr>
-          <p:cNvPr id="20" name="TextBox 19"/>
+              <a:t>Compare review time, evidence traceability, and ranking lift over baselines.</a:t>
+            </a:r>
+          </a:p>
+        </p:txBody>
+      </p:sp>
+      <p:sp>
+        <p:nvSpPr>
+          <p:cNvPr id="21" name="Rounded Rectangle 20"/>
+          <p:cNvSpPr/>
+          <p:nvPr/>
+        </p:nvSpPr>
+        <p:spPr>
+          <a:xfrm>
+            <a:off x="585216" y="5330952"/>
+            <a:ext cx="11000232" cy="630936"/>
+          </a:xfrm>
+          <a:prstGeom prst="roundRect">
+            <a:avLst>
+              <a:gd name="adj" fmla="val 6000"/>
+            </a:avLst>
+          </a:prstGeom>
+          <a:solidFill>
+            <a:srgbClr val="E5F2EB"/>
+          </a:solidFill>
+          <a:ln>
+            <a:noFill/>
+          </a:ln>
+        </p:spPr>
+        <p:style>
+          <a:lnRef idx="1">
+            <a:schemeClr val="accent1"/>
+          </a:lnRef>
+          <a:fillRef idx="3">
+            <a:schemeClr val="accent1"/>
+          </a:fillRef>
+          <a:effectRef idx="2">
+            <a:schemeClr val="accent1"/>
+          </a:effectRef>
+          <a:fontRef idx="minor">
+            <a:schemeClr val="lt1"/>
+          </a:fontRef>
+        </p:style>
+        <p:txBody>
+          <a:bodyPr rtlCol="0" anchor="ctr"/>
+          <a:lstStyle/>
+          <a:p>
+            <a:pPr algn="ctr"/>
+          </a:p>
+        </p:txBody>
+      </p:sp>
+      <p:sp>
+        <p:nvSpPr>
+          <p:cNvPr id="22" name="TextBox 21"/>
           <p:cNvSpPr txBox="1"/>
           <p:nvPr/>
         </p:nvSpPr>
         <p:spPr>
           <a:xfrm>
-            <a:off x="566928" y="5769864"/>
-            <a:ext cx="10972800" cy="384048"/>
+            <a:off x="850392" y="5458968"/>
+            <a:ext cx="7909560" cy="365760"/>
           </a:xfrm>
           <a:prstGeom prst="rect">
             <a:avLst/>
@@ -7260,21 +8237,57 @@
           <a:noFill/>
         </p:spPr>
         <p:txBody>
-          <a:bodyPr wrap="square" anchor="ctr" lIns="0" rIns="0" tIns="0" bIns="0">
+          <a:bodyPr wrap="square" lIns="0" rIns="0" tIns="0" bIns="0" anchor="ctr">
             <a:spAutoFit/>
           </a:bodyPr>
           <a:lstStyle/>
           <a:p>
             <a:pPr>
-              <a:defRPr sz="1200" b="0">
-                <a:solidFill>
-                  <a:srgbClr val="565E5C"/>
+              <a:defRPr sz="1600" b="1">
+                <a:solidFill>
+                  <a:srgbClr val="13664E"/>
                 </a:solidFill>
                 <a:latin typeface="Aptos"/>
               </a:defRPr>
             </a:pPr>
             <a:r>
-              <a:t>No customer interviews, paying users, conversion rate, or market-size estimate are claimed.</a:t>
+              <a:t>Business hypothesis: a research-team license after a successful pilot.</a:t>
+            </a:r>
+          </a:p>
+        </p:txBody>
+      </p:sp>
+      <p:sp>
+        <p:nvSpPr>
+          <p:cNvPr id="23" name="TextBox 22"/>
+          <p:cNvSpPr txBox="1"/>
+          <p:nvPr/>
+        </p:nvSpPr>
+        <p:spPr>
+          <a:xfrm>
+            <a:off x="8485632" y="5522976"/>
+            <a:ext cx="2834640" cy="219456"/>
+          </a:xfrm>
+          <a:prstGeom prst="rect">
+            <a:avLst/>
+          </a:prstGeom>
+          <a:noFill/>
+        </p:spPr>
+        <p:txBody>
+          <a:bodyPr wrap="square" lIns="0" rIns="0" tIns="0" bIns="0" anchor="ctr">
+            <a:spAutoFit/>
+          </a:bodyPr>
+          <a:lstStyle/>
+          <a:p>
+            <a:pPr algn="r">
+              <a:defRPr sz="1000" b="0">
+                <a:solidFill>
+                  <a:srgbClr val="4E5C56"/>
+                </a:solidFill>
+                <a:latin typeface="Aptos"/>
+              </a:defRPr>
+            </a:pPr>
+            <a:r>
+              <a:t>No customer interviews or paying users yet</a:t>
             </a:r>
           </a:p>
         </p:txBody>
@@ -7293,7 +8306,7 @@
     <p:bg>
       <p:bgPr>
         <a:solidFill>
-          <a:srgbClr val="F8F8F6"/>
+          <a:srgbClr val="F7F9F7"/>
         </a:solidFill>
         <a:effectLst/>
       </p:bgPr>
@@ -7313,8 +8326,8 @@
         </p:nvSpPr>
         <p:spPr>
           <a:xfrm>
-            <a:off x="566928" y="338328"/>
-            <a:ext cx="5943600" cy="256032"/>
+            <a:off x="585216" y="228600"/>
+            <a:ext cx="7863840" cy="256032"/>
           </a:xfrm>
           <a:prstGeom prst="rect">
             <a:avLst/>
@@ -7322,7 +8335,7 @@
           <a:noFill/>
         </p:spPr>
         <p:txBody>
-          <a:bodyPr wrap="square" lIns="0" rIns="0" tIns="0" bIns="0">
+          <a:bodyPr wrap="square" lIns="0" rIns="0" tIns="0" bIns="0" anchor="ctr">
             <a:spAutoFit/>
           </a:bodyPr>
           <a:lstStyle/>
@@ -7330,13 +8343,13 @@
             <a:pPr>
               <a:defRPr sz="1000" b="1">
                 <a:solidFill>
-                  <a:srgbClr val="215E4E"/>
+                  <a:srgbClr val="13664E"/>
                 </a:solidFill>
                 <a:latin typeface="Aptos"/>
               </a:defRPr>
             </a:pPr>
             <a:r>
-              <a:t>RISKORA  /  AIBOOMI STARTUP WEEKEND</a:t>
+              <a:t>RISKORA  /  AIBOOMI STARTUP WEEKEND KOCHI</a:t>
             </a:r>
           </a:p>
         </p:txBody>
@@ -7349,8 +8362,8 @@
         </p:nvSpPr>
         <p:spPr>
           <a:xfrm>
-            <a:off x="9326880" y="338328"/>
-            <a:ext cx="2286000" cy="256032"/>
+            <a:off x="9326880" y="228600"/>
+            <a:ext cx="2258568" cy="256032"/>
           </a:xfrm>
           <a:prstGeom prst="rect">
             <a:avLst/>
@@ -7358,21 +8371,21 @@
           <a:noFill/>
         </p:spPr>
         <p:txBody>
-          <a:bodyPr wrap="square" lIns="0" rIns="0" tIns="0" bIns="0">
+          <a:bodyPr wrap="square" lIns="0" rIns="0" tIns="0" bIns="0" anchor="ctr">
             <a:spAutoFit/>
           </a:bodyPr>
           <a:lstStyle/>
           <a:p>
-            <a:pPr>
+            <a:pPr algn="r">
               <a:defRPr sz="1000" b="0">
                 <a:solidFill>
-                  <a:srgbClr val="565E5C"/>
+                  <a:srgbClr val="4E5C56"/>
                 </a:solidFill>
                 <a:latin typeface="Aptos"/>
               </a:defRPr>
             </a:pPr>
             <a:r>
-              <a:t>NEXT STEPS</a:t>
+              <a:t>PROOF AND NEXT STEPS</a:t>
             </a:r>
           </a:p>
         </p:txBody>
@@ -7385,14 +8398,14 @@
         </p:nvSpPr>
         <p:spPr>
           <a:xfrm>
-            <a:off x="566928" y="758952"/>
-            <a:ext cx="11045952" cy="10972"/>
+            <a:off x="585216" y="667512"/>
+            <a:ext cx="11018520" cy="14630"/>
           </a:xfrm>
           <a:prstGeom prst="rect">
             <a:avLst/>
           </a:prstGeom>
           <a:solidFill>
-            <a:srgbClr val="D8DCD8"/>
+            <a:srgbClr val="CDD8D1"/>
           </a:solidFill>
           <a:ln>
             <a:noFill/>
@@ -7428,8 +8441,8 @@
         </p:nvSpPr>
         <p:spPr>
           <a:xfrm>
-            <a:off x="566928" y="1024128"/>
-            <a:ext cx="10972800" cy="749808"/>
+            <a:off x="585216" y="896112"/>
+            <a:ext cx="10972800" cy="640080"/>
           </a:xfrm>
           <a:prstGeom prst="rect">
             <a:avLst/>
@@ -7437,7 +8450,7 @@
           <a:noFill/>
         </p:spPr>
         <p:txBody>
-          <a:bodyPr wrap="square" anchor="ctr" lIns="0" rIns="0" tIns="0" bIns="0">
+          <a:bodyPr wrap="square" lIns="0" rIns="0" tIns="0" bIns="0" anchor="ctr">
             <a:spAutoFit/>
           </a:bodyPr>
           <a:lstStyle/>
@@ -7445,13 +8458,13 @@
             <a:pPr>
               <a:defRPr sz="3000" b="1">
                 <a:solidFill>
-                  <a:srgbClr val="181B1B"/>
+                  <a:srgbClr val="18221F"/>
                 </a:solidFill>
                 <a:latin typeface="Aptos Display"/>
               </a:defRPr>
             </a:pPr>
             <a:r>
-              <a:t>Prove data quality and usefulness before scale.</a:t>
+              <a:t>A working MVP with a clear validation path.</a:t>
             </a:r>
           </a:p>
         </p:txBody>
@@ -7464,8 +8477,8 @@
         </p:nvSpPr>
         <p:spPr>
           <a:xfrm>
-            <a:off x="566928" y="1773936"/>
-            <a:ext cx="10927080" cy="411480"/>
+            <a:off x="585216" y="1600200"/>
+            <a:ext cx="10972800" cy="384048"/>
           </a:xfrm>
           <a:prstGeom prst="rect">
             <a:avLst/>
@@ -7473,35 +8486,78 @@
           <a:noFill/>
         </p:spPr>
         <p:txBody>
-          <a:bodyPr wrap="square" anchor="ctr" lIns="0" rIns="0" tIns="0" bIns="0">
+          <a:bodyPr wrap="square" lIns="0" rIns="0" tIns="0" bIns="0" anchor="ctr">
             <a:spAutoFit/>
           </a:bodyPr>
           <a:lstStyle/>
           <a:p>
             <a:pPr>
-              <a:defRPr sz="1500" b="0">
-                <a:solidFill>
-                  <a:srgbClr val="565E5C"/>
+              <a:defRPr sz="1400" b="0">
+                <a:solidFill>
+                  <a:srgbClr val="4E5C56"/>
                 </a:solidFill>
                 <a:latin typeface="Aptos"/>
               </a:defRPr>
             </a:pPr>
             <a:r>
-              <a:t>The working synthetic prototype is a starting point, not a validated market model.</a:t>
-            </a:r>
-          </a:p>
-        </p:txBody>
-      </p:sp>
-      <p:sp>
-        <p:nvSpPr>
-          <p:cNvPr id="7" name="TextBox 6"/>
+              <a:t>The current product demonstrates the research workflow; real-market accuracy still needs evidence.</a:t>
+            </a:r>
+          </a:p>
+        </p:txBody>
+      </p:sp>
+      <p:sp>
+        <p:nvSpPr>
+          <p:cNvPr id="7" name="Rectangle 6"/>
+          <p:cNvSpPr/>
+          <p:nvPr/>
+        </p:nvSpPr>
+        <p:spPr>
+          <a:xfrm>
+            <a:off x="585216" y="6355080"/>
+            <a:ext cx="11018520" cy="14630"/>
+          </a:xfrm>
+          <a:prstGeom prst="rect">
+            <a:avLst/>
+          </a:prstGeom>
+          <a:solidFill>
+            <a:srgbClr val="CDD8D1"/>
+          </a:solidFill>
+          <a:ln>
+            <a:noFill/>
+          </a:ln>
+        </p:spPr>
+        <p:style>
+          <a:lnRef idx="1">
+            <a:schemeClr val="accent1"/>
+          </a:lnRef>
+          <a:fillRef idx="3">
+            <a:schemeClr val="accent1"/>
+          </a:fillRef>
+          <a:effectRef idx="2">
+            <a:schemeClr val="accent1"/>
+          </a:effectRef>
+          <a:fontRef idx="minor">
+            <a:schemeClr val="lt1"/>
+          </a:fontRef>
+        </p:style>
+        <p:txBody>
+          <a:bodyPr rtlCol="0" anchor="ctr"/>
+          <a:lstStyle/>
+          <a:p>
+            <a:pPr algn="ctr"/>
+          </a:p>
+        </p:txBody>
+      </p:sp>
+      <p:sp>
+        <p:nvSpPr>
+          <p:cNvPr id="8" name="TextBox 7"/>
           <p:cNvSpPr txBox="1"/>
           <p:nvPr/>
         </p:nvSpPr>
         <p:spPr>
           <a:xfrm>
-            <a:off x="10991088" y="6464808"/>
-            <a:ext cx="658368" cy="256032"/>
+            <a:off x="10972800" y="6419088"/>
+            <a:ext cx="621792" cy="201168"/>
           </a:xfrm>
           <a:prstGeom prst="rect">
             <a:avLst/>
@@ -7509,15 +8565,15 @@
           <a:noFill/>
         </p:spPr>
         <p:txBody>
-          <a:bodyPr wrap="square" lIns="0" rIns="0" tIns="0" bIns="0">
+          <a:bodyPr wrap="square" lIns="0" rIns="0" tIns="0" bIns="0" anchor="ctr">
             <a:spAutoFit/>
           </a:bodyPr>
           <a:lstStyle/>
           <a:p>
-            <a:pPr>
+            <a:pPr algn="r">
               <a:defRPr sz="900" b="0">
                 <a:solidFill>
-                  <a:srgbClr val="565E5C"/>
+                  <a:srgbClr val="4E5C56"/>
                 </a:solidFill>
                 <a:latin typeface="Aptos"/>
               </a:defRPr>
@@ -7530,18 +8586,18 @@
       </p:sp>
       <p:sp>
         <p:nvSpPr>
-          <p:cNvPr id="8" name="Rounded Rectangle 7"/>
+          <p:cNvPr id="9" name="Rounded Rectangle 8"/>
           <p:cNvSpPr/>
           <p:nvPr/>
         </p:nvSpPr>
         <p:spPr>
           <a:xfrm>
-            <a:off x="566928" y="2523744"/>
-            <a:ext cx="3547872" cy="2944368"/>
+            <a:off x="585216" y="2304288"/>
+            <a:ext cx="5349240" cy="3127248"/>
           </a:xfrm>
           <a:prstGeom prst="roundRect">
             <a:avLst>
-              <a:gd name="adj" fmla="val 8000"/>
+              <a:gd name="adj" fmla="val 6000"/>
             </a:avLst>
           </a:prstGeom>
           <a:solidFill>
@@ -7549,7 +8605,7 @@
           </a:solidFill>
           <a:ln w="10160">
             <a:solidFill>
-              <a:srgbClr val="D8DCD8"/>
+              <a:srgbClr val="CDD8D1"/>
             </a:solidFill>
           </a:ln>
         </p:spPr>
@@ -7577,14 +8633,14 @@
       </p:sp>
       <p:sp>
         <p:nvSpPr>
-          <p:cNvPr id="9" name="TextBox 8"/>
+          <p:cNvPr id="10" name="TextBox 9"/>
           <p:cNvSpPr txBox="1"/>
           <p:nvPr/>
         </p:nvSpPr>
         <p:spPr>
           <a:xfrm>
-            <a:off x="786384" y="2752344"/>
-            <a:ext cx="3108960" cy="256032"/>
+            <a:off x="841248" y="2578608"/>
+            <a:ext cx="4800600" cy="283464"/>
           </a:xfrm>
           <a:prstGeom prst="rect">
             <a:avLst/>
@@ -7592,35 +8648,35 @@
           <a:noFill/>
         </p:spPr>
         <p:txBody>
-          <a:bodyPr wrap="square" lIns="0" rIns="0" tIns="0" bIns="0">
+          <a:bodyPr wrap="square" lIns="0" rIns="0" tIns="0" bIns="0" anchor="ctr">
             <a:spAutoFit/>
           </a:bodyPr>
           <a:lstStyle/>
           <a:p>
             <a:pPr>
-              <a:defRPr sz="1000" b="1">
-                <a:solidFill>
-                  <a:srgbClr val="215E4E"/>
+              <a:defRPr sz="1100" b="1">
+                <a:solidFill>
+                  <a:srgbClr val="13664E"/>
                 </a:solidFill>
                 <a:latin typeface="Aptos"/>
               </a:defRPr>
             </a:pPr>
             <a:r>
-              <a:t>DATA</a:t>
-            </a:r>
-          </a:p>
-        </p:txBody>
-      </p:sp>
-      <p:sp>
-        <p:nvSpPr>
-          <p:cNvPr id="10" name="TextBox 9"/>
+              <a:t>WORKS TODAY</a:t>
+            </a:r>
+          </a:p>
+        </p:txBody>
+      </p:sp>
+      <p:sp>
+        <p:nvSpPr>
+          <p:cNvPr id="11" name="TextBox 10"/>
           <p:cNvSpPr txBox="1"/>
           <p:nvPr/>
         </p:nvSpPr>
         <p:spPr>
           <a:xfrm>
-            <a:off x="786384" y="3099815"/>
-            <a:ext cx="3108960" cy="566928"/>
+            <a:off x="841248" y="3017520"/>
+            <a:ext cx="4718304" cy="2029968"/>
           </a:xfrm>
           <a:prstGeom prst="rect">
             <a:avLst/>
@@ -7628,57 +8684,29 @@
           <a:noFill/>
         </p:spPr>
         <p:txBody>
-          <a:bodyPr wrap="square" anchor="ctr" lIns="0" rIns="0" tIns="0" bIns="0">
+          <a:bodyPr wrap="square" lIns="0" rIns="0" tIns="0" bIns="0" anchor="ctr">
             <a:spAutoFit/>
           </a:bodyPr>
           <a:lstStyle/>
           <a:p>
             <a:pPr>
-              <a:defRPr sz="1900" b="1">
-                <a:solidFill>
-                  <a:srgbClr val="181B1B"/>
+              <a:defRPr sz="1700" b="0">
+                <a:solidFill>
+                  <a:srgbClr val="18221F"/>
                 </a:solidFill>
                 <a:latin typeface="Aptos"/>
               </a:defRPr>
             </a:pPr>
             <a:r>
-              <a:t>Permissioned history</a:t>
-            </a:r>
-          </a:p>
-        </p:txBody>
-      </p:sp>
-      <p:sp>
-        <p:nvSpPr>
-          <p:cNvPr id="11" name="TextBox 10"/>
-          <p:cNvSpPr txBox="1"/>
-          <p:nvPr/>
-        </p:nvSpPr>
-        <p:spPr>
-          <a:xfrm>
-            <a:off x="786384" y="3712463"/>
-            <a:ext cx="3108960" cy="1581912"/>
-          </a:xfrm>
-          <a:prstGeom prst="rect">
-            <a:avLst/>
-          </a:prstGeom>
-          <a:noFill/>
-        </p:spPr>
-        <p:txBody>
-          <a:bodyPr wrap="square" anchor="ctr" lIns="0" rIns="0" tIns="0" bIns="0">
-            <a:spAutoFit/>
-          </a:bodyPr>
-          <a:lstStyle/>
-          <a:p>
-            <a:pPr>
-              <a:defRPr sz="1400" b="0">
-                <a:solidFill>
-                  <a:srgbClr val="565E5C"/>
-                </a:solidFill>
-                <a:latin typeface="Aptos"/>
-              </a:defRPr>
-            </a:pPr>
-            <a:r>
-              <a:t>Validate source rights, publication dates, comparable statements, and corporate actions.</a:t>
+              <a:t>• Six-screen research app and CSV imports</a:t>
+            </a:r>
+            <a:br/>
+            <a:r>
+              <a:t>• Two AMC workbooks checked against holdings CSVs</a:t>
+            </a:r>
+            <a:br/>
+            <a:r>
+              <a:t>• Synthetic model, saved holdout, rankings, evidence</a:t>
             </a:r>
           </a:p>
         </p:txBody>
@@ -7691,21 +8719,19 @@
         </p:nvSpPr>
         <p:spPr>
           <a:xfrm>
-            <a:off x="4315968" y="2523744"/>
-            <a:ext cx="3547872" cy="2944368"/>
+            <a:off x="6190488" y="2304288"/>
+            <a:ext cx="5404104" cy="3127248"/>
           </a:xfrm>
           <a:prstGeom prst="roundRect">
             <a:avLst>
-              <a:gd name="adj" fmla="val 8000"/>
+              <a:gd name="adj" fmla="val 6000"/>
             </a:avLst>
           </a:prstGeom>
           <a:solidFill>
-            <a:srgbClr val="FFFFFF"/>
+            <a:srgbClr val="E5F2EB"/>
           </a:solidFill>
-          <a:ln w="10160">
-            <a:solidFill>
-              <a:srgbClr val="D8DCD8"/>
-            </a:solidFill>
+          <a:ln>
+            <a:noFill/>
           </a:ln>
         </p:spPr>
         <p:style>
@@ -7738,8 +8764,8 @@
         </p:nvSpPr>
         <p:spPr>
           <a:xfrm>
-            <a:off x="4535424" y="2752344"/>
-            <a:ext cx="3108960" cy="256032"/>
+            <a:off x="6455664" y="2578608"/>
+            <a:ext cx="4828032" cy="283464"/>
           </a:xfrm>
           <a:prstGeom prst="rect">
             <a:avLst/>
@@ -7747,21 +8773,21 @@
           <a:noFill/>
         </p:spPr>
         <p:txBody>
-          <a:bodyPr wrap="square" lIns="0" rIns="0" tIns="0" bIns="0">
+          <a:bodyPr wrap="square" lIns="0" rIns="0" tIns="0" bIns="0" anchor="ctr">
             <a:spAutoFit/>
           </a:bodyPr>
           <a:lstStyle/>
           <a:p>
             <a:pPr>
-              <a:defRPr sz="1000" b="1">
-                <a:solidFill>
-                  <a:srgbClr val="215E4E"/>
+              <a:defRPr sz="1100" b="1">
+                <a:solidFill>
+                  <a:srgbClr val="13664E"/>
                 </a:solidFill>
                 <a:latin typeface="Aptos"/>
               </a:defRPr>
             </a:pPr>
             <a:r>
-              <a:t>MODEL</a:t>
+              <a:t>NEEDS PROOF</a:t>
             </a:r>
           </a:p>
         </p:txBody>
@@ -7774,8 +8800,8 @@
         </p:nvSpPr>
         <p:spPr>
           <a:xfrm>
-            <a:off x="4535424" y="3099815"/>
-            <a:ext cx="3108960" cy="566928"/>
+            <a:off x="6455664" y="3017520"/>
+            <a:ext cx="4754880" cy="2029968"/>
           </a:xfrm>
           <a:prstGeom prst="rect">
             <a:avLst/>
@@ -7783,84 +8809,54 @@
           <a:noFill/>
         </p:spPr>
         <p:txBody>
-          <a:bodyPr wrap="square" anchor="ctr" lIns="0" rIns="0" tIns="0" bIns="0">
+          <a:bodyPr wrap="square" lIns="0" rIns="0" tIns="0" bIns="0" anchor="ctr">
             <a:spAutoFit/>
           </a:bodyPr>
           <a:lstStyle/>
           <a:p>
             <a:pPr>
-              <a:defRPr sz="1900" b="1">
-                <a:solidFill>
-                  <a:srgbClr val="181B1B"/>
+              <a:defRPr sz="1700" b="0">
+                <a:solidFill>
+                  <a:srgbClr val="18221F"/>
                 </a:solidFill>
                 <a:latin typeface="Aptos"/>
               </a:defRPr>
             </a:pPr>
             <a:r>
-              <a:t>Real holdouts</a:t>
-            </a:r>
-          </a:p>
-        </p:txBody>
-      </p:sp>
-      <p:sp>
-        <p:nvSpPr>
-          <p:cNvPr id="15" name="TextBox 14"/>
-          <p:cNvSpPr txBox="1"/>
-          <p:nvPr/>
-        </p:nvSpPr>
-        <p:spPr>
-          <a:xfrm>
-            <a:off x="4535424" y="3712463"/>
-            <a:ext cx="3108960" cy="1581912"/>
-          </a:xfrm>
-          <a:prstGeom prst="rect">
-            <a:avLst/>
-          </a:prstGeom>
-          <a:noFill/>
-        </p:spPr>
-        <p:txBody>
-          <a:bodyPr wrap="square" anchor="ctr" lIns="0" rIns="0" tIns="0" bIns="0">
-            <a:spAutoFit/>
-          </a:bodyPr>
-          <a:lstStyle/>
-          <a:p>
-            <a:pPr>
-              <a:defRPr sz="1400" b="0">
-                <a:solidFill>
-                  <a:srgbClr val="565E5C"/>
-                </a:solidFill>
-                <a:latin typeface="Aptos"/>
-              </a:defRPr>
-            </a:pPr>
-            <a:r>
-              <a:t>Test across funds and periods; audit missing data, survivorship, and calibration.</a:t>
-            </a:r>
-          </a:p>
-        </p:txBody>
-      </p:sp>
-      <p:sp>
-        <p:nvSpPr>
-          <p:cNvPr id="16" name="Rounded Rectangle 15"/>
+              <a:t>• Verify release dates and data-use rights</a:t>
+            </a:r>
+            <a:br/>
+            <a:r>
+              <a:t>• Run real holdouts across funds and periods</a:t>
+            </a:r>
+            <a:br/>
+            <a:r>
+              <a:t>• Test usefulness with research teams</a:t>
+            </a:r>
+          </a:p>
+        </p:txBody>
+      </p:sp>
+      <p:sp>
+        <p:nvSpPr>
+          <p:cNvPr id="15" name="Rounded Rectangle 14"/>
           <p:cNvSpPr/>
           <p:nvPr/>
         </p:nvSpPr>
         <p:spPr>
           <a:xfrm>
-            <a:off x="8065008" y="2523744"/>
-            <a:ext cx="3547872" cy="2944368"/>
+            <a:off x="585216" y="5596128"/>
+            <a:ext cx="11000232" cy="484632"/>
           </a:xfrm>
           <a:prstGeom prst="roundRect">
             <a:avLst>
-              <a:gd name="adj" fmla="val 8000"/>
+              <a:gd name="adj" fmla="val 6000"/>
             </a:avLst>
           </a:prstGeom>
           <a:solidFill>
-            <a:srgbClr val="E9F1EC"/>
+            <a:srgbClr val="13664E"/>
           </a:solidFill>
-          <a:ln w="10160">
-            <a:solidFill>
-              <a:srgbClr val="D8DCD8"/>
-            </a:solidFill>
+          <a:ln>
+            <a:noFill/>
           </a:ln>
         </p:spPr>
         <p:style>
@@ -7887,14 +8883,50 @@
       </p:sp>
       <p:sp>
         <p:nvSpPr>
+          <p:cNvPr id="16" name="TextBox 15"/>
+          <p:cNvSpPr txBox="1"/>
+          <p:nvPr/>
+        </p:nvSpPr>
+        <p:spPr>
+          <a:xfrm>
+            <a:off x="832104" y="5687568"/>
+            <a:ext cx="10479024" cy="265176"/>
+          </a:xfrm>
+          <a:prstGeom prst="rect">
+            <a:avLst/>
+          </a:prstGeom>
+          <a:noFill/>
+        </p:spPr>
+        <p:txBody>
+          <a:bodyPr wrap="square" lIns="0" rIns="0" tIns="0" bIns="0" anchor="ctr">
+            <a:spAutoFit/>
+          </a:bodyPr>
+          <a:lstStyle/>
+          <a:p>
+            <a:pPr>
+              <a:defRPr sz="1500" b="1">
+                <a:solidFill>
+                  <a:srgbClr val="FFFFFF"/>
+                </a:solidFill>
+                <a:latin typeface="Aptos"/>
+              </a:defRPr>
+            </a:pPr>
+            <a:r>
+              <a:t>ASK: two research teams and permissioned historical data for a measured pilot</a:t>
+            </a:r>
+          </a:p>
+        </p:txBody>
+      </p:sp>
+      <p:sp>
+        <p:nvSpPr>
           <p:cNvPr id="17" name="TextBox 16"/>
           <p:cNvSpPr txBox="1"/>
           <p:nvPr/>
         </p:nvSpPr>
         <p:spPr>
           <a:xfrm>
-            <a:off x="8284464" y="2752344"/>
-            <a:ext cx="3108960" cy="256032"/>
+            <a:off x="585216" y="6135624"/>
+            <a:ext cx="4023360" cy="182880"/>
           </a:xfrm>
           <a:prstGeom prst="rect">
             <a:avLst/>
@@ -7902,129 +8934,24 @@
           <a:noFill/>
         </p:spPr>
         <p:txBody>
-          <a:bodyPr wrap="square" lIns="0" rIns="0" tIns="0" bIns="0">
+          <a:bodyPr wrap="square" lIns="0" rIns="0" tIns="0" bIns="0" anchor="ctr">
             <a:spAutoFit/>
           </a:bodyPr>
           <a:lstStyle/>
           <a:p>
             <a:pPr>
-              <a:defRPr sz="1000" b="1">
-                <a:solidFill>
-                  <a:srgbClr val="215E4E"/>
+              <a:defRPr sz="1000" b="0">
+                <a:solidFill>
+                  <a:srgbClr val="13664E"/>
                 </a:solidFill>
                 <a:latin typeface="Aptos"/>
               </a:defRPr>
             </a:pPr>
             <a:r>
-              <a:t>PRODUCT</a:t>
-            </a:r>
-          </a:p>
-        </p:txBody>
-      </p:sp>
-      <p:sp>
-        <p:nvSpPr>
-          <p:cNvPr id="18" name="TextBox 17"/>
-          <p:cNvSpPr txBox="1"/>
-          <p:nvPr/>
-        </p:nvSpPr>
-        <p:spPr>
-          <a:xfrm>
-            <a:off x="8284464" y="3099815"/>
-            <a:ext cx="3108960" cy="566928"/>
-          </a:xfrm>
-          <a:prstGeom prst="rect">
-            <a:avLst/>
-          </a:prstGeom>
-          <a:noFill/>
-        </p:spPr>
-        <p:txBody>
-          <a:bodyPr wrap="square" anchor="ctr" lIns="0" rIns="0" tIns="0" bIns="0">
-            <a:spAutoFit/>
-          </a:bodyPr>
-          <a:lstStyle/>
-          <a:p>
-            <a:pPr>
-              <a:defRPr sz="1900" b="1">
-                <a:solidFill>
-                  <a:srgbClr val="181B1B"/>
-                </a:solidFill>
-                <a:latin typeface="Aptos"/>
-              </a:defRPr>
-            </a:pPr>
-            <a:r>
-              <a:t>User pilots</a:t>
-            </a:r>
-          </a:p>
-        </p:txBody>
-      </p:sp>
-      <p:sp>
-        <p:nvSpPr>
-          <p:cNvPr id="19" name="TextBox 18"/>
-          <p:cNvSpPr txBox="1"/>
-          <p:nvPr/>
-        </p:nvSpPr>
-        <p:spPr>
-          <a:xfrm>
-            <a:off x="8284464" y="3712463"/>
-            <a:ext cx="3108960" cy="1581912"/>
-          </a:xfrm>
-          <a:prstGeom prst="rect">
-            <a:avLst/>
-          </a:prstGeom>
-          <a:noFill/>
-        </p:spPr>
-        <p:txBody>
-          <a:bodyPr wrap="square" anchor="ctr" lIns="0" rIns="0" tIns="0" bIns="0">
-            <a:spAutoFit/>
-          </a:bodyPr>
-          <a:lstStyle/>
-          <a:p>
-            <a:pPr>
-              <a:defRPr sz="1400" b="0">
-                <a:solidFill>
-                  <a:srgbClr val="565E5C"/>
-                </a:solidFill>
-                <a:latin typeface="Aptos"/>
-              </a:defRPr>
-            </a:pPr>
-            <a:r>
-              <a:t>Test whether an auditable shortlist changes analyst decisions and saves time.</a:t>
-            </a:r>
-          </a:p>
-        </p:txBody>
-      </p:sp>
-      <p:sp>
-        <p:nvSpPr>
-          <p:cNvPr id="20" name="TextBox 19"/>
-          <p:cNvSpPr txBox="1"/>
-          <p:nvPr/>
-        </p:nvSpPr>
-        <p:spPr>
-          <a:xfrm>
-            <a:off x="566928" y="5769864"/>
-            <a:ext cx="10972800" cy="384048"/>
-          </a:xfrm>
-          <a:prstGeom prst="rect">
-            <a:avLst/>
-          </a:prstGeom>
-          <a:noFill/>
-        </p:spPr>
-        <p:txBody>
-          <a:bodyPr wrap="square" anchor="ctr" lIns="0" rIns="0" tIns="0" bIns="0">
-            <a:spAutoFit/>
-          </a:bodyPr>
-          <a:lstStyle/>
-          <a:p>
-            <a:pPr>
-              <a:defRPr sz="1200" b="0">
-                <a:solidFill>
-                  <a:srgbClr val="565E5C"/>
-                </a:solidFill>
-                <a:latin typeface="Aptos"/>
-              </a:defRPr>
-            </a:pPr>
-            <a:r>
-              <a:t>Risk boundary: a future disclosed position is not an observed trade; outputs are not investment advice.</a:t>
+              <a:rPr>
+                <a:hlinkClick r:id="rId2"/>
+              </a:rPr>
+              <a:t>github.com/ClashLex/Riskora</a:t>
             </a:r>
           </a:p>
         </p:txBody>
@@ -8355,4 +9282,324 @@
   </a:objectDefaults>
   <a:extraClrSchemeLst/>
 </a:theme>
+</file>
+
+<file path=ppt/theme/theme2.xml><?xml version="1.0" encoding="utf-8"?>
+<a:theme xmlns:a="http://schemas.openxmlformats.org/drawingml/2006/main" name="Office Theme">
+  <a:themeElements>
+    <a:clrScheme name="Office">
+      <a:dk1>
+        <a:sysClr val="windowText" lastClr="000000"/>
+      </a:dk1>
+      <a:lt1>
+        <a:sysClr val="window" lastClr="FFFFFF"/>
+      </a:lt1>
+      <a:dk2>
+        <a:srgbClr val="1F497D"/>
+      </a:dk2>
+      <a:lt2>
+        <a:srgbClr val="EEECE1"/>
+      </a:lt2>
+      <a:accent1>
+        <a:srgbClr val="4F81BD"/>
+      </a:accent1>
+      <a:accent2>
+        <a:srgbClr val="C0504D"/>
+      </a:accent2>
+      <a:accent3>
+        <a:srgbClr val="9BBB59"/>
+      </a:accent3>
+      <a:accent4>
+        <a:srgbClr val="8064A2"/>
+      </a:accent4>
+      <a:accent5>
+        <a:srgbClr val="4BACC6"/>
+      </a:accent5>
+      <a:accent6>
+        <a:srgbClr val="F79646"/>
+      </a:accent6>
+      <a:hlink>
+        <a:srgbClr val="0000FF"/>
+      </a:hlink>
+      <a:folHlink>
+        <a:srgbClr val="800080"/>
+      </a:folHlink>
+    </a:clrScheme>
+    <a:fontScheme name="Office">
+      <a:majorFont>
+        <a:latin typeface="Calibri"/>
+        <a:ea typeface=""/>
+        <a:cs typeface=""/>
+        <a:font script="Jpan" typeface="ＭＳ Ｐゴシック"/>
+        <a:font script="Hang" typeface="맑은 고딕"/>
+        <a:font script="Hans" typeface="宋体"/>
+        <a:font script="Hant" typeface="新細明體"/>
+        <a:font script="Arab" typeface="Times New Roman"/>
+        <a:font script="Hebr" typeface="Times New Roman"/>
+        <a:font script="Thai" typeface="Angsana New"/>
+        <a:font script="Ethi" typeface="Nyala"/>
+        <a:font script="Beng" typeface="Vrinda"/>
+        <a:font script="Gujr" typeface="Shruti"/>
+        <a:font script="Khmr" typeface="MoolBoran"/>
+        <a:font script="Knda" typeface="Tunga"/>
+        <a:font script="Guru" typeface="Raavi"/>
+        <a:font script="Cans" typeface="Euphemia"/>
+        <a:font script="Cher" typeface="Plantagenet Cherokee"/>
+        <a:font script="Yiii" typeface="Microsoft Yi Baiti"/>
+        <a:font script="Tibt" typeface="Microsoft Himalaya"/>
+        <a:font script="Thaa" typeface="MV Boli"/>
+        <a:font script="Deva" typeface="Mangal"/>
+        <a:font script="Telu" typeface="Gautami"/>
+        <a:font script="Taml" typeface="Latha"/>
+        <a:font script="Syrc" typeface="Estrangelo Edessa"/>
+        <a:font script="Orya" typeface="Kalinga"/>
+        <a:font script="Mlym" typeface="Kartika"/>
+        <a:font script="Laoo" typeface="DokChampa"/>
+        <a:font script="Sinh" typeface="Iskoola Pota"/>
+        <a:font script="Mong" typeface="Mongolian Baiti"/>
+        <a:font script="Viet" typeface="Times New Roman"/>
+        <a:font script="Uigh" typeface="Microsoft Uighur"/>
+        <a:font script="Geor" typeface="Sylfaen"/>
+      </a:majorFont>
+      <a:minorFont>
+        <a:latin typeface="Calibri"/>
+        <a:ea typeface=""/>
+        <a:cs typeface=""/>
+        <a:font script="Jpan" typeface="ＭＳ Ｐゴシック"/>
+        <a:font script="Hang" typeface="맑은 고딕"/>
+        <a:font script="Hans" typeface="宋体"/>
+        <a:font script="Hant" typeface="新細明體"/>
+        <a:font script="Arab" typeface="Arial"/>
+        <a:font script="Hebr" typeface="Arial"/>
+        <a:font script="Thai" typeface="Cordia New"/>
+        <a:font script="Ethi" typeface="Nyala"/>
+        <a:font script="Beng" typeface="Vrinda"/>
+        <a:font script="Gujr" typeface="Shruti"/>
+        <a:font script="Khmr" typeface="DaunPenh"/>
+        <a:font script="Knda" typeface="Tunga"/>
+        <a:font script="Guru" typeface="Raavi"/>
+        <a:font script="Cans" typeface="Euphemia"/>
+        <a:font script="Cher" typeface="Plantagenet Cherokee"/>
+        <a:font script="Yiii" typeface="Microsoft Yi Baiti"/>
+        <a:font script="Tibt" typeface="Microsoft Himalaya"/>
+        <a:font script="Thaa" typeface="MV Boli"/>
+        <a:font script="Deva" typeface="Mangal"/>
+        <a:font script="Telu" typeface="Gautami"/>
+        <a:font script="Taml" typeface="Latha"/>
+        <a:font script="Syrc" typeface="Estrangelo Edessa"/>
+        <a:font script="Orya" typeface="Kalinga"/>
+        <a:font script="Mlym" typeface="Kartika"/>
+        <a:font script="Laoo" typeface="DokChampa"/>
+        <a:font script="Sinh" typeface="Iskoola Pota"/>
+        <a:font script="Mong" typeface="Mongolian Baiti"/>
+        <a:font script="Viet" typeface="Arial"/>
+        <a:font script="Uigh" typeface="Microsoft Uighur"/>
+        <a:font script="Geor" typeface="Sylfaen"/>
+      </a:minorFont>
+    </a:fontScheme>
+    <a:fmtScheme name="Office">
+      <a:fillStyleLst>
+        <a:solidFill>
+          <a:schemeClr val="phClr"/>
+        </a:solidFill>
+        <a:gradFill rotWithShape="1">
+          <a:gsLst>
+            <a:gs pos="0">
+              <a:schemeClr val="phClr">
+                <a:tint val="50000"/>
+                <a:satMod val="300000"/>
+              </a:schemeClr>
+            </a:gs>
+            <a:gs pos="35000">
+              <a:schemeClr val="phClr">
+                <a:tint val="37000"/>
+                <a:satMod val="300000"/>
+              </a:schemeClr>
+            </a:gs>
+            <a:gs pos="100000">
+              <a:schemeClr val="phClr">
+                <a:tint val="15000"/>
+                <a:satMod val="350000"/>
+              </a:schemeClr>
+            </a:gs>
+          </a:gsLst>
+          <a:lin ang="16200000" scaled="1"/>
+        </a:gradFill>
+        <a:gradFill rotWithShape="1">
+          <a:gsLst>
+            <a:gs pos="0">
+              <a:schemeClr val="phClr">
+                <a:tint val="100000"/>
+                <a:shade val="100000"/>
+                <a:satMod val="130000"/>
+              </a:schemeClr>
+            </a:gs>
+            <a:gs pos="100000">
+              <a:schemeClr val="phClr">
+                <a:tint val="50000"/>
+                <a:shade val="100000"/>
+                <a:satMod val="350000"/>
+              </a:schemeClr>
+            </a:gs>
+          </a:gsLst>
+          <a:lin ang="16200000" scaled="0"/>
+        </a:gradFill>
+      </a:fillStyleLst>
+      <a:lnStyleLst>
+        <a:ln w="9525" cap="flat" cmpd="sng" algn="ctr">
+          <a:solidFill>
+            <a:schemeClr val="phClr">
+              <a:shade val="95000"/>
+              <a:satMod val="105000"/>
+            </a:schemeClr>
+          </a:solidFill>
+          <a:prstDash val="solid"/>
+        </a:ln>
+        <a:ln w="25400" cap="flat" cmpd="sng" algn="ctr">
+          <a:solidFill>
+            <a:schemeClr val="phClr"/>
+          </a:solidFill>
+          <a:prstDash val="solid"/>
+        </a:ln>
+        <a:ln w="38100" cap="flat" cmpd="sng" algn="ctr">
+          <a:solidFill>
+            <a:schemeClr val="phClr"/>
+          </a:solidFill>
+          <a:prstDash val="solid"/>
+        </a:ln>
+      </a:lnStyleLst>
+      <a:effectStyleLst>
+        <a:effectStyle>
+          <a:effectLst>
+            <a:outerShdw blurRad="40000" dist="20000" dir="5400000" rotWithShape="0">
+              <a:srgbClr val="000000">
+                <a:alpha val="38000"/>
+              </a:srgbClr>
+            </a:outerShdw>
+          </a:effectLst>
+        </a:effectStyle>
+        <a:effectStyle>
+          <a:effectLst>
+            <a:outerShdw blurRad="40000" dist="23000" dir="5400000" rotWithShape="0">
+              <a:srgbClr val="000000">
+                <a:alpha val="35000"/>
+              </a:srgbClr>
+            </a:outerShdw>
+          </a:effectLst>
+        </a:effectStyle>
+        <a:effectStyle>
+          <a:effectLst>
+            <a:outerShdw blurRad="40000" dist="23000" dir="5400000" rotWithShape="0">
+              <a:srgbClr val="000000">
+                <a:alpha val="35000"/>
+              </a:srgbClr>
+            </a:outerShdw>
+          </a:effectLst>
+          <a:scene3d>
+            <a:camera prst="orthographicFront">
+              <a:rot lat="0" lon="0" rev="0"/>
+            </a:camera>
+            <a:lightRig rig="threePt" dir="t">
+              <a:rot lat="0" lon="0" rev="1200000"/>
+            </a:lightRig>
+          </a:scene3d>
+          <a:sp3d>
+            <a:bevelT w="63500" h="25400"/>
+          </a:sp3d>
+        </a:effectStyle>
+      </a:effectStyleLst>
+      <a:bgFillStyleLst>
+        <a:solidFill>
+          <a:schemeClr val="phClr"/>
+        </a:solidFill>
+        <a:gradFill rotWithShape="1">
+          <a:gsLst>
+            <a:gs pos="0">
+              <a:schemeClr val="phClr">
+                <a:tint val="40000"/>
+                <a:satMod val="350000"/>
+              </a:schemeClr>
+            </a:gs>
+            <a:gs pos="40000">
+              <a:schemeClr val="phClr">
+                <a:tint val="45000"/>
+                <a:shade val="99000"/>
+                <a:satMod val="350000"/>
+              </a:schemeClr>
+            </a:gs>
+            <a:gs pos="100000">
+              <a:schemeClr val="phClr">
+                <a:shade val="20000"/>
+                <a:satMod val="255000"/>
+              </a:schemeClr>
+            </a:gs>
+          </a:gsLst>
+          <a:path path="circle">
+            <a:fillToRect l="50000" t="-80000" r="50000" b="180000"/>
+          </a:path>
+        </a:gradFill>
+        <a:gradFill rotWithShape="1">
+          <a:gsLst>
+            <a:gs pos="0">
+              <a:schemeClr val="phClr">
+                <a:tint val="80000"/>
+                <a:satMod val="300000"/>
+              </a:schemeClr>
+            </a:gs>
+            <a:gs pos="100000">
+              <a:schemeClr val="phClr">
+                <a:shade val="30000"/>
+                <a:satMod val="200000"/>
+              </a:schemeClr>
+            </a:gs>
+          </a:gsLst>
+          <a:path path="circle">
+            <a:fillToRect l="50000" t="50000" r="50000" b="50000"/>
+          </a:path>
+        </a:gradFill>
+      </a:bgFillStyleLst>
+    </a:fmtScheme>
+  </a:themeElements>
+  <a:objectDefaults>
+    <a:spDef>
+      <a:spPr/>
+      <a:bodyPr/>
+      <a:lstStyle/>
+      <a:style>
+        <a:lnRef idx="1">
+          <a:schemeClr val="accent1"/>
+        </a:lnRef>
+        <a:fillRef idx="3">
+          <a:schemeClr val="accent1"/>
+        </a:fillRef>
+        <a:effectRef idx="2">
+          <a:schemeClr val="accent1"/>
+        </a:effectRef>
+        <a:fontRef idx="minor">
+          <a:schemeClr val="lt1"/>
+        </a:fontRef>
+      </a:style>
+    </a:spDef>
+    <a:lnDef>
+      <a:spPr/>
+      <a:bodyPr/>
+      <a:lstStyle/>
+      <a:style>
+        <a:lnRef idx="2">
+          <a:schemeClr val="accent1"/>
+        </a:lnRef>
+        <a:fillRef idx="0">
+          <a:schemeClr val="accent1"/>
+        </a:fillRef>
+        <a:effectRef idx="1">
+          <a:schemeClr val="accent1"/>
+        </a:effectRef>
+        <a:fontRef idx="minor">
+          <a:schemeClr val="tx1"/>
+        </a:fontRef>
+      </a:style>
+    </a:lnDef>
+  </a:objectDefaults>
+  <a:extraClrSchemeLst/>
+</a:theme>
 </file>
--- a/docs/event-submission/Riskora-pitch-deck.pptx
+++ b/docs/event-submission/Riskora-pitch-deck.pptx
@@ -507,7 +507,7 @@
           <a:lstStyle/>
           <a:p>
             <a:r>
-              <a:t>0:00–0:20. Riskora is a research workspace for Indian equity mutual-fund disclosures. The target is a stock newly present in a later complete, comparable statement. It does not identify an order or trade date. The screenshot is the working local app, showing an actual ABSL Flexi Cap disclosure; its publication date is unverified.</a:t>
+              <a:t>0:00–0:20. Riskora is a research workspace for Indian equity mutual-fund disclosures. The target is a stock newly present in a later complete, comparable statement. It does not identify an order or trade date. The screenshot is the working local app, showing an actual ABSL Flexi Cap disclosure; its publication date is unverified. Ansil worked on the frontend and interface; Ihsan worked on backend, data, and event implementation.</a:t>
             </a:r>
           </a:p>
         </p:txBody>
@@ -863,13 +863,13 @@
           <a:p/>
           <a:p>
             <a:r>
-              <a:t>Q&amp;A: Does it predict trades? No: the target is a new later disclosed position. Is the accuracy real? No: the saved run is synthetic. Why AI? The classifier orders candidates from dated signals; optional LLM extraction is separate. Who pays? A team license is a testable hypothesis. Prior work/surprise element: answer from the team's actual event record; do not imply any unverified eligibility.</a:t>
+              <a:t>Q&amp;A: Does it predict trades? No: the target is a new later disclosed position. Is the accuracy real? No: the saved run is synthetic. Why AI? The classifier orders candidates from dated signals; optional LLM extraction is separate. Who pays? A team license is a testable hypothesis. Event history: the owner says the final Riskora version was built on 24 October after several idea changes; Git also records earlier exploratory work. No prior-prototype declaration or assigned surprise element was reported, and the official build-window times remain unconfirmed.</a:t>
             </a:r>
           </a:p>
           <a:p/>
           <a:p>
             <a:r>
-              <a:t>Source notes: code and data review in this repository; local UI captures on 24 Oct 2026; handbook timing and six-slide limit summarized in docs/event-submission/README.md. Keep the separate AI impact statement and a public demo/recording link for submission.</a:t>
+              <a:t>Source notes: code and data review in this repository; local UI captures on 24 Oct 2026; handbook timing and six-slide limit summarized in docs/event-submission/README.md. The live Render demo is linked on this slide and contains fictional synthetic data only. Keep the separate AI impact statement for submission.</a:t>
             </a:r>
           </a:p>
         </p:txBody>
@@ -8952,6 +8952,45 @@
                 <a:hlinkClick r:id="rId2"/>
               </a:rPr>
               <a:t>github.com/ClashLex/Riskora</a:t>
+            </a:r>
+          </a:p>
+        </p:txBody>
+      </p:sp>
+      <p:sp>
+        <p:nvSpPr>
+          <p:cNvPr id="18" name="TextBox 17"/>
+          <p:cNvSpPr txBox="1"/>
+          <p:nvPr/>
+        </p:nvSpPr>
+        <p:spPr>
+          <a:xfrm>
+            <a:off x="4590288" y="6135624"/>
+            <a:ext cx="4800600" cy="182880"/>
+          </a:xfrm>
+          <a:prstGeom prst="rect">
+            <a:avLst/>
+          </a:prstGeom>
+          <a:noFill/>
+        </p:spPr>
+        <p:txBody>
+          <a:bodyPr wrap="square" lIns="0" rIns="0" tIns="0" bIns="0" anchor="ctr">
+            <a:spAutoFit/>
+          </a:bodyPr>
+          <a:lstStyle/>
+          <a:p>
+            <a:pPr>
+              <a:defRPr sz="1000" b="0">
+                <a:solidFill>
+                  <a:srgbClr val="13664E"/>
+                </a:solidFill>
+                <a:latin typeface="Aptos"/>
+              </a:defRPr>
+            </a:pPr>
+            <a:r>
+              <a:rPr>
+                <a:hlinkClick r:id="rId3"/>
+              </a:rPr>
+              <a:t>Live demo: riskora-demo.onrender.com</a:t>
             </a:r>
           </a:p>
         </p:txBody>
